--- a/Agentic_RL_后训练洞察.pptx
+++ b/Agentic_RL_后训练洞察.pptx
@@ -3183,7 +3183,7 @@
               </a:defRPr>
             </a:pPr>
             <a:r>
-              <a:t>智能涌现：Agent 从概念验证走向规模落地</a:t>
+              <a:t>Agent 从概念验证走向规模落地</a:t>
             </a:r>
           </a:p>
         </p:txBody>
@@ -3253,7 +3253,7 @@
               </a:defRPr>
             </a:pPr>
             <a:r>
-              <a:t>"从'能聊'到'能做'的分水岭已经跨过，Agent 是载体"</a:t>
+              <a:t>从能聊到能做的分水岭已经跨过，Agent 是载体</a:t>
             </a:r>
           </a:p>
         </p:txBody>
@@ -3331,7 +3331,7 @@
               </a:defRPr>
             </a:pPr>
             <a:r>
-              <a:t>🔵 产品已落地</a:t>
+              <a:t>产品已落地</a:t>
             </a:r>
           </a:p>
         </p:txBody>
@@ -3366,15 +3366,15 @@
               </a:defRPr>
             </a:pPr>
             <a:r>
-              <a:t>2024.3 Devin — 编程Agent</a:t>
+              <a:t>2024.3 Devin</a:t>
             </a:r>
             <a:br/>
             <a:r>
-              <a:t>2025.1 Operator → Agent Mode</a:t>
+              <a:t>2025.1 Operator-&gt;Agent Mode</a:t>
             </a:r>
             <a:br/>
             <a:r>
-              <a:t>2025.3 Manus — 通用Agent</a:t>
+              <a:t>2025.3 Manus</a:t>
             </a:r>
             <a:br/>
             <a:r>
@@ -3387,7 +3387,7 @@
             <a:br/>
             <a:br/>
             <a:r>
-              <a:t>→ 节奏在加快</a:t>
+              <a:t>节奏在加快</a:t>
             </a:r>
           </a:p>
         </p:txBody>
@@ -3465,7 +3465,7 @@
               </a:defRPr>
             </a:pPr>
             <a:r>
-              <a:t>🟢 开源正在引爆</a:t>
+              <a:t>开源正在引爆</a:t>
             </a:r>
           </a:p>
         </p:txBody>
@@ -3500,26 +3500,12 @@
               </a:defRPr>
             </a:pPr>
             <a:r>
-              <a:t>Claude Code 代码泄露事件</a:t>
+              <a:t>Claude Code 51万行源码泄露</a:t>
             </a:r>
             <a:br/>
             <a:r>
-              <a:t>(2026.3 npm sourcemap暴露51万行)</a:t>
-            </a:r>
-            <a:br/>
-            <a:br/>
-            <a:r>
-              <a:t>OpenClaw 一天10万星</a:t>
-            </a:r>
-            <a:br/>
-            <a:r>
-              <a:t>总计24.7万GitHub星</a:t>
-            </a:r>
-            <a:br/>
-            <a:r>
-              <a:t>集成20+平台</a:t>
-            </a:r>
-            <a:br/>
+              <a:t>OpenClaw 24.7万星</a:t>
+            </a:r>
             <a:br/>
             <a:r>
               <a:t>开源小模型追平大模型</a:t>
@@ -3600,7 +3586,7 @@
               </a:defRPr>
             </a:pPr>
             <a:r>
-              <a:t>🟠 巨头真金白银</a:t>
+              <a:t>巨头真金白银</a:t>
             </a:r>
           </a:p>
         </p:txBody>
@@ -3639,25 +3625,15 @@
             </a:r>
             <a:br/>
             <a:r>
-              <a:t>采购RL环境</a:t>
+              <a:t>OpenAI RFT公开发布</a:t>
             </a:r>
             <a:br/>
+            <a:r>
+              <a:t>Google Gemini 2.5 Agent RL</a:t>
+            </a:r>
             <a:br/>
             <a:r>
-              <a:t>OpenAI RFT 对o4-mini</a:t>
-            </a:r>
-            <a:br/>
-            <a:r>
-              <a:t>公开发布 (2025.5)</a:t>
-            </a:r>
-            <a:br/>
-            <a:br/>
-            <a:r>
-              <a:t>Google Gemini 2.5整合</a:t>
-            </a:r>
-            <a:br/>
-            <a:r>
-              <a:t>Agent RL训练</a:t>
+              <a:t>Microsoft Copilot-&gt;Agent</a:t>
             </a:r>
           </a:p>
         </p:txBody>
@@ -3735,7 +3711,7 @@
               </a:defRPr>
             </a:pPr>
             <a:r>
-              <a:t>产品从早期探索走向成熟，开源用脚投票，巨头用真金白银下注 → Agent 时代已来</a:t>
+              <a:t>产品/开源/资本三维爆发 -&gt; Agent 时代已来</a:t>
             </a:r>
           </a:p>
         </p:txBody>
@@ -3839,7 +3815,7 @@
               </a:defRPr>
             </a:pPr>
             <a:r>
-              <a:t>ProRL Agent：Rollout-as-a-Service</a:t>
+              <a:t>ProRL Agent: Rollout-as-a-Service</a:t>
             </a:r>
           </a:p>
         </p:txBody>
@@ -3874,7 +3850,7 @@
               </a:defRPr>
             </a:pPr>
             <a:r>
-              <a:t>NVIDIA终结耦合式Agent RL — rollout生命周期独立为HTTP服务</a:t>
+              <a:t>NVIDIA终结耦合式Agent RL</a:t>
             </a:r>
           </a:p>
         </p:txBody>
@@ -3997,6 +3973,10 @@
             <a:r>
               <a:t>工具调用延迟不确定</a:t>
             </a:r>
+            <a:br/>
+            <a:r>
+              <a:t>GPU大量空转</a:t>
+            </a:r>
           </a:p>
         </p:txBody>
       </p:sp>
@@ -4112,11 +4092,15 @@
             </a:r>
             <a:br/>
             <a:r>
+              <a:t>INIT/RUN/EVAL三阶段</a:t>
+            </a:r>
+            <a:br/>
+            <a:r>
               <a:t>Token-in/token-out一致性</a:t>
             </a:r>
             <a:br/>
             <a:r>
-              <a:t>SWE-Bench 9.6%→18.0%</a:t>
+              <a:t>SWE-Bench 9.6%-&gt;18.0%</a:t>
             </a:r>
           </a:p>
         </p:txBody>
@@ -4189,12 +4173,12 @@
             <a:pPr algn="l">
               <a:defRPr sz="1300" b="1">
                 <a:solidFill>
-                  <a:srgbClr val="0096D6"/>
-                </a:solidFill>
-              </a:defRPr>
-            </a:pPr>
-            <a:r>
-              <a:t>启示</a:t>
+                  <a:srgbClr val="FF8C00"/>
+                </a:solidFill>
+              </a:defRPr>
+            </a:pPr>
+            <a:r>
+              <a:t>NPU启示</a:t>
             </a:r>
           </a:p>
         </p:txBody>
@@ -4229,15 +4213,19 @@
               </a:defRPr>
             </a:pPr>
             <a:r>
-              <a:t>NPU推理引擎需支持</a:t>
+              <a:t>第一优先级适配目标</a:t>
             </a:r>
             <a:br/>
             <a:r>
-              <a:t>Rollout服务化部署</a:t>
+              <a:t>vllm-ascend技术栈复用</a:t>
             </a:r>
             <a:br/>
             <a:r>
-              <a:t>vllm-ascend技术栈复用</a:t>
+              <a:t>Singularity-&gt;Docker适配</a:t>
+            </a:r>
+            <a:br/>
+            <a:r>
+              <a:t>HTTP延迟需co-located</a:t>
             </a:r>
           </a:p>
         </p:txBody>
@@ -4341,7 +4329,7 @@
               </a:defRPr>
             </a:pPr>
             <a:r>
-              <a:t>NVIDIA Dynamo：KV感知路由</a:t>
+              <a:t>Dynamo: KV感知异步调度</a:t>
             </a:r>
           </a:p>
         </p:txBody>
@@ -4376,7 +4364,7 @@
               </a:defRPr>
             </a:pPr>
             <a:r>
-              <a:t>让请求去已有缓存的节点 — 推理调度从[哪个空闲]变成[哪个有我的KV]</a:t>
+              <a:t>推理调度从哪个空闲变成哪个有我的KV</a:t>
             </a:r>
           </a:p>
         </p:txBody>
@@ -4489,15 +4477,15 @@
               </a:defRPr>
             </a:pPr>
             <a:r>
-              <a:t>标准负载均衡不知道</a:t>
+              <a:t>标准负载均衡不知KV分布</a:t>
             </a:r>
             <a:br/>
             <a:r>
-              <a:t>哪个节点有哪段KV cache</a:t>
+              <a:t>导致重复Prefill计算</a:t>
             </a:r>
             <a:br/>
             <a:r>
-              <a:t>导致重复Prefill计算</a:t>
+              <a:t>Agent多轮95%+可复用</a:t>
             </a:r>
           </a:p>
         </p:txBody>
@@ -4610,11 +4598,11 @@
               </a:defRPr>
             </a:pPr>
             <a:r>
-              <a:t>Radix Tree追踪全集群KV分布</a:t>
+              <a:t>Radix Tree追踪全集群KV</a:t>
             </a:r>
             <a:br/>
             <a:r>
-              <a:t>NIXL点对点KV传输库</a:t>
+              <a:t>NIXL点对点KV传输</a:t>
             </a:r>
             <a:br/>
             <a:r>
@@ -4695,12 +4683,12 @@
             <a:pPr algn="l">
               <a:defRPr sz="1300" b="1">
                 <a:solidFill>
-                  <a:srgbClr val="0096D6"/>
-                </a:solidFill>
-              </a:defRPr>
-            </a:pPr>
-            <a:r>
-              <a:t>启示</a:t>
+                  <a:srgbClr val="FF8C00"/>
+                </a:solidFill>
+              </a:defRPr>
+            </a:pPr>
+            <a:r>
+              <a:t>NPU启示</a:t>
             </a:r>
           </a:p>
         </p:txBody>
@@ -4743,7 +4731,11 @@
             </a:r>
             <a:br/>
             <a:r>
-              <a:t>和跨节点迁移能力</a:t>
+              <a:t>跨节点迁移能力</a:t>
+            </a:r>
+            <a:br/>
+            <a:r>
+              <a:t>HCCS是差异化机会</a:t>
             </a:r>
           </a:p>
         </p:txBody>
@@ -4847,7 +4839,7 @@
               </a:defRPr>
             </a:pPr>
             <a:r>
-              <a:t>LMCache：KV Cache跨引擎P2P共享</a:t>
+              <a:t>算法层升级概览</a:t>
             </a:r>
           </a:p>
         </p:txBody>
@@ -4882,7 +4874,7 @@
               </a:defRPr>
             </a:pPr>
             <a:r>
-              <a:t>KV cache不应是引擎私有资源，而应是集群级的共享池</a:t>
+              <a:t>挑战4+5驱动: off-policy容忍+步级归因</a:t>
             </a:r>
           </a:p>
         </p:txBody>
@@ -4955,12 +4947,12 @@
             <a:pPr algn="l">
               <a:defRPr sz="1300" b="1">
                 <a:solidFill>
-                  <a:srgbClr val="E84040"/>
-                </a:solidFill>
-              </a:defRPr>
-            </a:pPr>
-            <a:r>
-              <a:t>问题</a:t>
+                  <a:srgbClr val="FF8C00"/>
+                </a:solidFill>
+              </a:defRPr>
+            </a:pPr>
+            <a:r>
+              <a:t>off-policy容忍+多样性</a:t>
             </a:r>
           </a:p>
         </p:txBody>
@@ -4995,15 +4987,19 @@
               </a:defRPr>
             </a:pPr>
             <a:r>
-              <a:t>每个推理引擎独立维护KV</a:t>
+              <a:t>异步数据天然过时</a:t>
             </a:r>
             <a:br/>
             <a:r>
-              <a:t>同一prefix被多引擎重复计算</a:t>
+              <a:t>importance ratio失真</a:t>
             </a:r>
             <a:br/>
             <a:r>
-              <a:t>Agent场景95%+ context可复用</a:t>
+              <a:t>&gt;4步策略差训练发散</a:t>
+            </a:r>
+            <a:br/>
+            <a:r>
+              <a:t>-&gt; Decoupled PPO+DAPO+CISPO</a:t>
             </a:r>
           </a:p>
         </p:txBody>
@@ -5076,12 +5072,12 @@
             <a:pPr algn="l">
               <a:defRPr sz="1300" b="1">
                 <a:solidFill>
-                  <a:srgbClr val="00C853"/>
-                </a:solidFill>
-              </a:defRPr>
-            </a:pPr>
-            <a:r>
-              <a:t>方案</a:t>
+                  <a:srgbClr val="FF8C00"/>
+                </a:solidFill>
+              </a:defRPr>
+            </a:pPr>
+            <a:r>
+              <a:t>步级奖励+精细归因</a:t>
             </a:r>
           </a:p>
         </p:txBody>
@@ -5116,19 +5112,19 @@
               </a:defRPr>
             </a:pPr>
             <a:r>
-              <a:t>P2P共享：引擎间直接传输KV</a:t>
+              <a:t>84%算力浪费非关键步骤</a:t>
             </a:r>
             <a:br/>
             <a:r>
-              <a:t>Cache Offloading多级卸载</a:t>
+              <a:t>轨迹级奖励太粗</a:t>
             </a:r>
             <a:br/>
             <a:r>
-              <a:t>标准化KV存取API</a:t>
+              <a:t>无法区分碰巧vs学会</a:t>
             </a:r>
             <a:br/>
             <a:r>
-              <a:t>实测：15x吞吐提升</a:t>
+              <a:t>-&gt; Cursor实时RL+Meta SSR</a:t>
             </a:r>
           </a:p>
         </p:txBody>
@@ -5206,7 +5202,7 @@
               </a:defRPr>
             </a:pPr>
             <a:r>
-              <a:t>启示</a:t>
+              <a:t>算法层关键判断</a:t>
             </a:r>
           </a:p>
         </p:txBody>
@@ -5241,15 +5237,97 @@
               </a:defRPr>
             </a:pPr>
             <a:r>
-              <a:t>NPU推理软件栈需支持</a:t>
+              <a:t>异步是系统给的约束</a:t>
             </a:r>
             <a:br/>
             <a:r>
-              <a:t>标准化KV cache存取接口</a:t>
+              <a:t>算法必须在off-policy下收敛</a:t>
             </a:r>
             <a:br/>
             <a:r>
-              <a:t>和高效跨节点传输</a:t>
+              <a:t>归因精度决定学习效率</a:t>
+            </a:r>
+            <a:br/>
+            <a:r>
+              <a:t>基础设施越好算法越有空间</a:t>
+            </a:r>
+          </a:p>
+        </p:txBody>
+      </p:sp>
+      <p:sp>
+        <p:nvSpPr>
+          <p:cNvPr id="14" name="Rectangle 13"/>
+          <p:cNvSpPr/>
+          <p:nvPr/>
+        </p:nvSpPr>
+        <p:spPr>
+          <a:xfrm>
+            <a:off x="0" y="6035040"/>
+            <a:ext cx="12191695" cy="822960"/>
+          </a:xfrm>
+          <a:prstGeom prst="rect">
+            <a:avLst/>
+          </a:prstGeom>
+          <a:solidFill>
+            <a:srgbClr val="0A1422"/>
+          </a:solidFill>
+          <a:ln>
+            <a:noFill/>
+          </a:ln>
+        </p:spPr>
+        <p:style>
+          <a:lnRef idx="1">
+            <a:schemeClr val="accent1"/>
+          </a:lnRef>
+          <a:fillRef idx="3">
+            <a:schemeClr val="accent1"/>
+          </a:fillRef>
+          <a:effectRef idx="2">
+            <a:schemeClr val="accent1"/>
+          </a:effectRef>
+          <a:fontRef idx="minor">
+            <a:schemeClr val="lt1"/>
+          </a:fontRef>
+        </p:style>
+        <p:txBody>
+          <a:bodyPr rtlCol="0" anchor="ctr"/>
+          <a:lstStyle/>
+          <a:p>
+            <a:pPr algn="ctr"/>
+          </a:p>
+        </p:txBody>
+      </p:sp>
+      <p:sp>
+        <p:nvSpPr>
+          <p:cNvPr id="15" name="TextBox 14"/>
+          <p:cNvSpPr txBox="1"/>
+          <p:nvPr/>
+        </p:nvSpPr>
+        <p:spPr>
+          <a:xfrm>
+            <a:off x="457200" y="6126480"/>
+            <a:ext cx="10972800" cy="640080"/>
+          </a:xfrm>
+          <a:prstGeom prst="rect">
+            <a:avLst/>
+          </a:prstGeom>
+          <a:noFill/>
+        </p:spPr>
+        <p:txBody>
+          <a:bodyPr wrap="square">
+            <a:spAutoFit/>
+          </a:bodyPr>
+          <a:lstStyle/>
+          <a:p>
+            <a:pPr algn="l">
+              <a:defRPr sz="1200" b="1">
+                <a:solidFill>
+                  <a:srgbClr val="0096D6"/>
+                </a:solidFill>
+              </a:defRPr>
+            </a:pPr>
+            <a:r>
+              <a:t>算法层2个升级方向: off-policy容忍+步级归因 -&gt; 逐一展开</a:t>
             </a:r>
           </a:p>
         </p:txBody>
@@ -5353,7 +5431,7 @@
               </a:defRPr>
             </a:pPr>
             <a:r>
-              <a:t>Mooncake：KV Cache分离架构的生产级实践</a:t>
+              <a:t>Decoupled PPO + DAPO + CISPO</a:t>
             </a:r>
           </a:p>
         </p:txBody>
@@ -5388,7 +5466,7 @@
               </a:defRPr>
             </a:pPr>
             <a:r>
-              <a:t>月之暗面已部署 — RDMA+分布式KV Store实现prefill-decode分离</a:t>
+              <a:t>off-policy容忍: 基础架构+工业级改进</a:t>
             </a:r>
           </a:p>
         </p:txBody>
@@ -5461,12 +5539,12 @@
             <a:pPr algn="l">
               <a:defRPr sz="1300" b="1">
                 <a:solidFill>
-                  <a:srgbClr val="E84040"/>
-                </a:solidFill>
-              </a:defRPr>
-            </a:pPr>
-            <a:r>
-              <a:t>问题</a:t>
+                  <a:srgbClr val="FF8C00"/>
+                </a:solidFill>
+              </a:defRPr>
+            </a:pPr>
+            <a:r>
+              <a:t>Decoupled PPO(基础)</a:t>
             </a:r>
           </a:p>
         </p:txBody>
@@ -5501,19 +5579,19 @@
               </a:defRPr>
             </a:pPr>
             <a:r>
-              <a:t>大规模场景NIC成为</a:t>
+              <a:t>Actor-Learner物理分离</a:t>
             </a:r>
             <a:br/>
             <a:r>
-              <a:t>KV传输瓶颈</a:t>
+              <a:t>V-trace截断IS修正</a:t>
             </a:r>
             <a:br/>
             <a:r>
-              <a:t>disaggregated serving中</a:t>
+              <a:t>IW裁剪控制偏差</a:t>
             </a:r>
             <a:br/>
             <a:r>
-              <a:t>KV传输占TTFT大头</a:t>
+              <a:t>所有异步RL的基础</a:t>
             </a:r>
           </a:p>
         </p:txBody>
@@ -5586,12 +5664,12 @@
             <a:pPr algn="l">
               <a:defRPr sz="1300" b="1">
                 <a:solidFill>
-                  <a:srgbClr val="00C853"/>
-                </a:solidFill>
-              </a:defRPr>
-            </a:pPr>
-            <a:r>
-              <a:t>方案</a:t>
+                  <a:srgbClr val="FF8C00"/>
+                </a:solidFill>
+              </a:defRPr>
+            </a:pPr>
+            <a:r>
+              <a:t>DAPO(ByteDance)</a:t>
             </a:r>
           </a:p>
         </p:txBody>
@@ -5626,19 +5704,19 @@
               </a:defRPr>
             </a:pPr>
             <a:r>
-              <a:t>KVCache-centric架构</a:t>
+              <a:t>Clip-Higher解耦裁剪</a:t>
             </a:r>
             <a:br/>
             <a:r>
-              <a:t>RDMA+分布式KV Store</a:t>
+              <a:t>Dynamic Sampling过滤</a:t>
             </a:r>
             <a:br/>
             <a:r>
-              <a:t>prefill-decode物理分离</a:t>
+              <a:t>Token-level梯度</a:t>
             </a:r>
             <a:br/>
             <a:r>
-              <a:t>千卡规模生产部署</a:t>
+              <a:t>-&gt; OpenRLHF事实标准</a:t>
             </a:r>
           </a:p>
         </p:txBody>
@@ -5711,12 +5789,12 @@
             <a:pPr algn="l">
               <a:defRPr sz="1300" b="1">
                 <a:solidFill>
-                  <a:srgbClr val="0096D6"/>
-                </a:solidFill>
-              </a:defRPr>
-            </a:pPr>
-            <a:r>
-              <a:t>启示</a:t>
+                  <a:srgbClr val="FF8C00"/>
+                </a:solidFill>
+              </a:defRPr>
+            </a:pPr>
+            <a:r>
+              <a:t>CISPO(MiniMax)</a:t>
             </a:r>
           </a:p>
         </p:txBody>
@@ -5751,19 +5829,19 @@
               </a:defRPr>
             </a:pPr>
             <a:r>
-              <a:t>NPU互联架构(HCCS)</a:t>
+              <a:t>IS权重精细裁剪</a:t>
             </a:r>
             <a:br/>
             <a:r>
-              <a:t>天然适合做KV cache</a:t>
+              <a:t>200K上下文验证</a:t>
             </a:r>
             <a:br/>
             <a:r>
-              <a:t>跨节点共享</a:t>
+              <a:t>比DAPO快2x</a:t>
             </a:r>
             <a:br/>
             <a:r>
-              <a:t>是硬件差异化机会</a:t>
+              <a:t>-&gt; M2.5 SWE-Bench 80.2%</a:t>
             </a:r>
           </a:p>
         </p:txBody>
@@ -5867,7 +5945,7 @@
               </a:defRPr>
             </a:pPr>
             <a:r>
-              <a:t>Record环节：环境保真与工程可达（C6+C7）+ 行业空白</a:t>
+              <a:t>Cursor实时RL + Meta Self-Play SWE-RL</a:t>
             </a:r>
           </a:p>
         </p:txBody>
@@ -5902,7 +5980,7 @@
               </a:defRPr>
             </a:pPr>
             <a:r>
-              <a:t>基础设施层是业界投入最薄弱的环节 — 也是我们的机会</a:t>
+              <a:t>步级归因: 闭环训练+零标注自博弈</a:t>
             </a:r>
           </a:p>
         </p:txBody>
@@ -5980,7 +6058,7 @@
               </a:defRPr>
             </a:pPr>
             <a:r>
-              <a:t>Forge (MiniMax)</a:t>
+              <a:t>Cursor Composer 2</a:t>
             </a:r>
           </a:p>
         </p:txBody>
@@ -6015,19 +6093,19 @@
               </a:defRPr>
             </a:pPr>
             <a:r>
-              <a:t>Agent-环境解耦框架</a:t>
+              <a:t>production harness中RL</a:t>
             </a:r>
             <a:br/>
             <a:r>
-              <a:t>200K上下文支持</a:t>
+              <a:t>self-summarization 200K-&gt;1K</a:t>
             </a:r>
             <a:br/>
             <a:r>
-              <a:t>百万级日吞吐</a:t>
+              <a:t>compaction error降50%</a:t>
             </a:r>
             <a:br/>
             <a:r>
-              <a:t>40x训练加速</a:t>
+              <a:t>5小时端到端闭环</a:t>
             </a:r>
           </a:p>
         </p:txBody>
@@ -6100,12 +6178,12 @@
             <a:pPr algn="l">
               <a:defRPr sz="1300" b="1">
                 <a:solidFill>
-                  <a:srgbClr val="E84040"/>
-                </a:solidFill>
-              </a:defRPr>
-            </a:pPr>
-            <a:r>
-              <a:t>⚠️ 行业空白</a:t>
+                  <a:srgbClr val="FF8C00"/>
+                </a:solidFill>
+              </a:defRPr>
+            </a:pPr>
+            <a:r>
+              <a:t>Meta SSR</a:t>
             </a:r>
           </a:p>
         </p:txBody>
@@ -6140,20 +6218,19 @@
               </a:defRPr>
             </a:pPr>
             <a:r>
-              <a:t>精度/算子/框架层</a:t>
+              <a:t>零人工标注</a:t>
             </a:r>
             <a:br/>
             <a:r>
-              <a:t>业界技术供给不足</a:t>
+              <a:t>自博弈+环境验证</a:t>
             </a:r>
             <a:br/>
+            <a:r>
+              <a:t>ICLR 2026</a:t>
+            </a:r>
             <a:br/>
             <a:r>
-              <a:t>→ 这正是我们</a:t>
-            </a:r>
-            <a:br/>
-            <a:r>
-              <a:t>   应该投入的方向</a:t>
+              <a:t>SWE-Bench显著提升</a:t>
             </a:r>
           </a:p>
         </p:txBody>
@@ -6231,7 +6308,7 @@
               </a:defRPr>
             </a:pPr>
             <a:r>
-              <a:t>我们的定位</a:t>
+              <a:t>NPU启示</a:t>
             </a:r>
           </a:p>
         </p:txBody>
@@ -6266,101 +6343,19 @@
               </a:defRPr>
             </a:pPr>
             <a:r>
-              <a:t>Ascend精度基线</a:t>
+              <a:t>Agent RL评估信号</a:t>
             </a:r>
             <a:br/>
             <a:r>
-              <a:t>算子自动生成</a:t>
+              <a:t>来自环境闭环不需人标注</a:t>
             </a:r>
             <a:br/>
             <a:r>
-              <a:t>RL框架易用性</a:t>
+              <a:t>密集闭环天然含过程信号</a:t>
             </a:r>
             <a:br/>
             <a:r>
-              <a:t>算子扫描验证</a:t>
-            </a:r>
-            <a:br/>
-            <a:r>
-              <a:t>→ 见P15详细布局</a:t>
-            </a:r>
-          </a:p>
-        </p:txBody>
-      </p:sp>
-      <p:sp>
-        <p:nvSpPr>
-          <p:cNvPr id="14" name="Rectangle 13"/>
-          <p:cNvSpPr/>
-          <p:nvPr/>
-        </p:nvSpPr>
-        <p:spPr>
-          <a:xfrm>
-            <a:off x="0" y="6035040"/>
-            <a:ext cx="12191695" cy="822960"/>
-          </a:xfrm>
-          <a:prstGeom prst="rect">
-            <a:avLst/>
-          </a:prstGeom>
-          <a:solidFill>
-            <a:srgbClr val="0A1422"/>
-          </a:solidFill>
-          <a:ln>
-            <a:noFill/>
-          </a:ln>
-        </p:spPr>
-        <p:style>
-          <a:lnRef idx="1">
-            <a:schemeClr val="accent1"/>
-          </a:lnRef>
-          <a:fillRef idx="3">
-            <a:schemeClr val="accent1"/>
-          </a:fillRef>
-          <a:effectRef idx="2">
-            <a:schemeClr val="accent1"/>
-          </a:effectRef>
-          <a:fontRef idx="minor">
-            <a:schemeClr val="lt1"/>
-          </a:fontRef>
-        </p:style>
-        <p:txBody>
-          <a:bodyPr rtlCol="0" anchor="ctr"/>
-          <a:lstStyle/>
-          <a:p>
-            <a:pPr algn="ctr"/>
-          </a:p>
-        </p:txBody>
-      </p:sp>
-      <p:sp>
-        <p:nvSpPr>
-          <p:cNvPr id="15" name="TextBox 14"/>
-          <p:cNvSpPr txBox="1"/>
-          <p:nvPr/>
-        </p:nvSpPr>
-        <p:spPr>
-          <a:xfrm>
-            <a:off x="457200" y="6126480"/>
-            <a:ext cx="10972800" cy="640080"/>
-          </a:xfrm>
-          <a:prstGeom prst="rect">
-            <a:avLst/>
-          </a:prstGeom>
-          <a:noFill/>
-        </p:spPr>
-        <p:txBody>
-          <a:bodyPr wrap="square">
-            <a:spAutoFit/>
-          </a:bodyPr>
-          <a:lstStyle/>
-          <a:p>
-            <a:pPr algn="l">
-              <a:defRPr sz="1200" b="1">
-                <a:solidFill>
-                  <a:srgbClr val="0096D6"/>
-                </a:solidFill>
-              </a:defRPr>
-            </a:pPr>
-            <a:r>
-              <a:t>Record环节的行业空白 = 我们的战略机会 → P15展开我们的全栈布局</a:t>
+              <a:t>部分替代独立PRM</a:t>
             </a:r>
           </a:p>
         </p:txBody>
@@ -6499,7 +6494,7 @@
               </a:defRPr>
             </a:pPr>
             <a:r>
-              <a:t>Agentic RL 的六大挑战，没有一个能靠单点解决。全栈协同 = 我们[帮客户开箱即用]的价值锚点。</a:t>
+              <a:t>五个挑战驱动七个升级，没有一个能靠单点解决。全栈协同是价值锚点。</a:t>
             </a:r>
           </a:p>
         </p:txBody>
@@ -6577,7 +6572,7 @@
               </a:defRPr>
             </a:pPr>
             <a:r>
-              <a:t>🔵 行动方向 ① Reply</a:t>
+              <a:t>基础设施层</a:t>
             </a:r>
           </a:p>
         </p:txBody>
@@ -6612,41 +6607,37 @@
               </a:defRPr>
             </a:pPr>
             <a:r>
-              <a:t>对应挑战：C1+C4</a:t>
-            </a:r>
-            <a:br/>
-            <a:r>
-              <a:t>策略时效性+奖励归因</a:t>
+              <a:t>挑战1+2驱动</a:t>
             </a:r>
             <a:br/>
             <a:br/>
             <a:r>
-              <a:t>关键能力：</a:t>
+              <a:t>关键能力:</a:t>
             </a:r>
             <a:br/>
             <a:r>
-              <a:t>· 异步训练调度</a:t>
+              <a:t>- KV cache跨节点池化</a:t>
             </a:r>
             <a:br/>
             <a:r>
-              <a:t>· 跨节点通信优化</a:t>
+              <a:t>- 投机解码+量化加速</a:t>
             </a:r>
             <a:br/>
             <a:r>
-              <a:t>· Off-policy IS修正</a:t>
+              <a:t>- sandbox并行编排</a:t>
+            </a:r>
+            <a:br/>
+            <a:r>
+              <a:t>- 行业空白=我们的机会</a:t>
             </a:r>
             <a:br/>
             <a:br/>
             <a:r>
-              <a:t>技术参考：</a:t>
+              <a:t>技术参考:</a:t>
             </a:r>
             <a:br/>
             <a:r>
-              <a:t>Decoupled PPO / DAPO+CISPO</a:t>
-            </a:r>
-            <a:br/>
-            <a:r>
-              <a:t>Cursor+Meta SSR</a:t>
+              <a:t>LMCache/Mooncake/Eagle3/Forge</a:t>
             </a:r>
           </a:p>
         </p:txBody>
@@ -6724,7 +6715,7 @@
               </a:defRPr>
             </a:pPr>
             <a:r>
-              <a:t>🟢 行动方向 ② Routing</a:t>
+              <a:t>框架层</a:t>
             </a:r>
           </a:p>
         </p:txBody>
@@ -6759,41 +6750,33 @@
               </a:defRPr>
             </a:pPr>
             <a:r>
-              <a:t>对应挑战：C2+C3</a:t>
-            </a:r>
-            <a:br/>
-            <a:r>
-              <a:t>采集吞吐+推理效率</a:t>
+              <a:t>挑战2+3驱动</a:t>
             </a:r>
             <a:br/>
             <a:br/>
             <a:r>
-              <a:t>关键能力：</a:t>
+              <a:t>关键能力:</a:t>
             </a:r>
             <a:br/>
             <a:r>
-              <a:t>· KV cache共享/迁移</a:t>
+              <a:t>- Rollout服务化</a:t>
             </a:r>
             <a:br/>
             <a:r>
-              <a:t>· HCCS互联优化</a:t>
+              <a:t>- KV感知异步调度</a:t>
             </a:r>
             <a:br/>
             <a:r>
-              <a:t>· Rollout服务化</a:t>
+              <a:t>- 训推一致性保证</a:t>
             </a:r>
             <a:br/>
             <a:br/>
             <a:r>
-              <a:t>技术参考：</a:t>
+              <a:t>技术参考:</a:t>
             </a:r>
             <a:br/>
             <a:r>
-              <a:t>ProRL Agent / Dynamo</a:t>
-            </a:r>
-            <a:br/>
-            <a:r>
-              <a:t>LMCache / Mooncake</a:t>
+              <a:t>ProRL Agent/Dynamo</a:t>
             </a:r>
           </a:p>
         </p:txBody>
@@ -6871,7 +6854,7 @@
               </a:defRPr>
             </a:pPr>
             <a:r>
-              <a:t>🟠 行动方向 ③ Record ★</a:t>
+              <a:t>算法层</a:t>
             </a:r>
           </a:p>
         </p:txBody>
@@ -6906,41 +6889,37 @@
               </a:defRPr>
             </a:pPr>
             <a:r>
-              <a:t>对应挑战：C6+C7</a:t>
-            </a:r>
-            <a:br/>
-            <a:r>
-              <a:t>环境保真+工程可达</a:t>
-            </a:r>
-            <a:br/>
-            <a:r>
-              <a:t>⚠️ 行业空白 = 我们的机会</a:t>
+              <a:t>挑战4+5驱动</a:t>
             </a:r>
             <a:br/>
             <a:br/>
             <a:r>
-              <a:t>我们的能力：</a:t>
+              <a:t>关键能力:</a:t>
             </a:r>
             <a:br/>
             <a:r>
-              <a:t>· Ascend精度基线</a:t>
+              <a:t>- off-policy IS修正</a:t>
             </a:r>
             <a:br/>
             <a:r>
-              <a:t>· 算子自动生成+验证</a:t>
+              <a:t>- 多样性探索</a:t>
             </a:r>
             <a:br/>
             <a:r>
-              <a:t>· RL框架易用性</a:t>
-            </a:r>
-            <a:br/>
-            <a:r>
-              <a:t>· Agent hardness工程</a:t>
+              <a:t>- 步级过程信号</a:t>
             </a:r>
             <a:br/>
             <a:br/>
             <a:r>
-              <a:t>技术参考：Forge</a:t>
+              <a:t>技术参考:</a:t>
+            </a:r>
+            <a:br/>
+            <a:r>
+              <a:t>Decoupled PPO/DAPO+CISPO</a:t>
+            </a:r>
+            <a:br/>
+            <a:r>
+              <a:t>Cursor+Meta SSR</a:t>
             </a:r>
           </a:p>
         </p:txBody>
@@ -6975,7 +6954,7 @@
               </a:defRPr>
             </a:pPr>
             <a:r>
-              <a:t>⚪ 横切C5 数值可信：训推一致性 / bf16确定性计算 / 精度基线 — 穿透三层的精度底线</a:t>
+              <a:t>横切: 数值可信 -- 训推一致性/确定性计算/精度基线/算子自动生成 -- 穿透三层</a:t>
             </a:r>
           </a:p>
         </p:txBody>
@@ -7192,7 +7171,7 @@
               </a:defRPr>
             </a:pPr>
             <a:r>
-              <a:t>不可替代：从 SFT 到 Agentic RL，Agent 能力提升的关键路径</a:t>
+              <a:t>从 SFT 到 Agentic RL：Agent 能力提升的关键路径</a:t>
             </a:r>
           </a:p>
         </p:txBody>
@@ -7270,7 +7249,7 @@
               </a:defRPr>
             </a:pPr>
             <a:r>
-              <a:t>第一阶段 SFT/RLHF</a:t>
+              <a:t>SFT/RLHF</a:t>
             </a:r>
           </a:p>
         </p:txBody>
@@ -7305,20 +7284,16 @@
               </a:defRPr>
             </a:pPr>
             <a:r>
-              <a:t>模型：GPT-4, Llama-2-Chat</a:t>
+              <a:t>模型:GPT-4/Llama-2</a:t>
             </a:r>
             <a:br/>
             <a:r>
-              <a:t>算力：&lt;5%  场景：3-5种</a:t>
+              <a:t>算力:&lt;5% 场景:3-5种</a:t>
             </a:r>
             <a:br/>
             <a:br/>
             <a:r>
-              <a:t>✗ 天花板：状态空间大</a:t>
-            </a:r>
-            <a:br/>
-            <a:r>
-              <a:t>  演示覆盖不了</a:t>
+              <a:t>X 天花板:状态空间大</a:t>
             </a:r>
             <a:br/>
             <a:r>
@@ -7357,7 +7332,7 @@
               </a:defRPr>
             </a:pPr>
             <a:r>
-              <a:t>→</a:t>
+              <a:t>-&gt;</a:t>
             </a:r>
           </a:p>
         </p:txBody>
@@ -7435,7 +7410,7 @@
               </a:defRPr>
             </a:pPr>
             <a:r>
-              <a:t>第二阶段 DPO/KTO</a:t>
+              <a:t>DPO/KTO</a:t>
             </a:r>
           </a:p>
         </p:txBody>
@@ -7470,24 +7445,20 @@
               </a:defRPr>
             </a:pPr>
             <a:r>
-              <a:t>模型：Llama3.3, Qwen-2.5</a:t>
+              <a:t>模型:Llama3.3/Qwen-2.5</a:t>
             </a:r>
             <a:br/>
             <a:r>
-              <a:t>算力：5-15%  场景：5-10种</a:t>
+              <a:t>算力:5-15% 场景:5-10种</a:t>
             </a:r>
             <a:br/>
             <a:br/>
             <a:r>
-              <a:t>✗ 天花板：奖励来自</a:t>
+              <a:t>X 天花板:奖励来自</a:t>
             </a:r>
             <a:br/>
             <a:r>
               <a:t>  环境不来自偏好</a:t>
-            </a:r>
-            <a:br/>
-            <a:r>
-              <a:t>  能教对齐不能教交互</a:t>
             </a:r>
           </a:p>
         </p:txBody>
@@ -7522,7 +7493,7 @@
               </a:defRPr>
             </a:pPr>
             <a:r>
-              <a:t>→</a:t>
+              <a:t>-&gt;</a:t>
             </a:r>
           </a:p>
         </p:txBody>
@@ -7600,7 +7571,7 @@
               </a:defRPr>
             </a:pPr>
             <a:r>
-              <a:t>第三阶段 Agentic RL ★</a:t>
+              <a:t>Agentic RL *</a:t>
             </a:r>
           </a:p>
         </p:txBody>
@@ -7635,24 +7606,20 @@
               </a:defRPr>
             </a:pPr>
             <a:r>
-              <a:t>模型：GPT-5.4, Claude Opus 4.6</a:t>
+              <a:t>模型:GPT-5.4/Claude Opus 4.6</a:t>
             </a:r>
             <a:br/>
             <a:r>
-              <a:t>算力：40%+  场景：50+种</a:t>
+              <a:t>算力:40%+ 场景:50+种</a:t>
             </a:r>
             <a:br/>
             <a:br/>
             <a:r>
-              <a:t>✓ 不可替代的关键环节</a:t>
+              <a:t>V 不可替代的关键环节</a:t>
             </a:r>
             <a:br/>
             <a:r>
-              <a:t>  环境反馈, 覆盖无限态</a:t>
-            </a:r>
-            <a:br/>
-            <a:r>
-              <a:t>  从错误中学习</a:t>
+              <a:t>  环境反馈+从错误中学</a:t>
             </a:r>
           </a:p>
         </p:txBody>
@@ -7687,7 +7654,7 @@
               </a:defRPr>
             </a:pPr>
             <a:r>
-              <a:t>Harness的能力图，就是未来模型后训练的负载 — Agent必须在做事中学会做事</a:t>
+              <a:t>Harness的能力图就是未来模型后训练的负载</a:t>
             </a:r>
           </a:p>
         </p:txBody>
@@ -7800,12 +7767,7 @@
               </a:defRPr>
             </a:pPr>
             <a:r>
-              <a:t>模型更强 → 在环境中做事(Harness) → 产生交互轨迹 → 得到环境反馈 → 更新模型参数 → 模型更强</a:t>
-            </a:r>
-            <a:br/>
-            <a:br/>
-            <a:r>
-              <a:t>Anthropic投环境($1B+)  |  OpenAI开放grader(RFT)  |  Google全流程RL(Gemini 2.5)  |  Cursor用RL自研模型超Opus 4.6</a:t>
+              <a:t>模型更强-&gt;做事-&gt;轨迹-&gt;反馈-&gt;更新  |  Anthropic投环境  |  OpenAI开放grader  |  Google全流程RL  |  Cursor用RL自研超Opus</a:t>
             </a:r>
           </a:p>
         </p:txBody>
@@ -7883,7 +7845,7 @@
               </a:defRPr>
             </a:pPr>
             <a:r>
-              <a:t>Agentic RL后训练 = Agent能力提升的不可替代路径 → 但直接把LLM RL搬到Agent会结构性失配</a:t>
+              <a:t>Agentic RL = Agent能力提升的不可替代路径 -&gt; 但直接搬LLM RL到Agent会结构性失配</a:t>
             </a:r>
           </a:p>
         </p:txBody>
@@ -7987,7 +7949,7 @@
               </a:defRPr>
             </a:pPr>
             <a:r>
-              <a:t>范式跃迁：七维变化 → R3×三层 → 六挑战+横切</a:t>
+              <a:t>范式跃迁：七维变化 -&gt; 五个核心挑战</a:t>
             </a:r>
           </a:p>
         </p:txBody>
@@ -8065,7 +8027,7 @@
               </a:defRPr>
             </a:pPr>
             <a:r>
-              <a:t>七维对比（LLM RL → Agentic RL）</a:t>
+              <a:t>七维对比（LLM RL -&gt; Agentic RL）</a:t>
             </a:r>
           </a:p>
         </p:txBody>
@@ -8100,45 +8062,31 @@
               </a:defRPr>
             </a:pPr>
             <a:r>
-              <a:t>🔵组A（算力+循环）→ Reply</a:t>
+              <a:t>1.算力: 训练为主 -&gt; 推理90%+</a:t>
             </a:r>
             <a:br/>
             <a:r>
-              <a:t>  算力：训练为主 → 推理90%+</a:t>
+              <a:t>2.循环: 开环 -&gt; 闭环(分钟级)</a:t>
             </a:r>
             <a:br/>
             <a:r>
-              <a:t>  循环：开环 → 闭环(分钟级Episode)</a:t>
+              <a:t>3.环境: 无 -&gt; 真实(sandbox/工具链)</a:t>
             </a:r>
             <a:br/>
+            <a:r>
+              <a:t>4.数据: 标注 -&gt; 在线轨迹</a:t>
+            </a:r>
             <a:br/>
             <a:r>
-              <a:t>🟢组B（环境+数据+上下文）→ Routing</a:t>
+              <a:t>5.奖励: 人评 -&gt; 环境验证</a:t>
             </a:r>
             <a:br/>
             <a:r>
-              <a:t>  环境：无 → 真实(sandbox/浏览器)</a:t>
+              <a:t>6.探索: KL约束 -&gt; 大探索空间</a:t>
             </a:r>
             <a:br/>
             <a:r>
-              <a:t>  数据：标注 → 在线轨迹</a:t>
-            </a:r>
-            <a:br/>
-            <a:r>
-              <a:t>  上下文：短 → M级长程</a:t>
-            </a:r>
-            <a:br/>
-            <a:br/>
-            <a:r>
-              <a:t>🟠组C（奖励+探索）→ Record</a:t>
-            </a:r>
-            <a:br/>
-            <a:r>
-              <a:t>  奖励：人评 → 环境验证</a:t>
-            </a:r>
-            <a:br/>
-            <a:r>
-              <a:t>  探索：KL约束 → 大探索</a:t>
+              <a:t>7.上下文: 短 -&gt; M级长程</a:t>
             </a:r>
           </a:p>
         </p:txBody>
@@ -8152,7 +8100,7 @@
         <p:spPr>
           <a:xfrm>
             <a:off x="5669280" y="1188720"/>
-            <a:ext cx="5943600" cy="1188720"/>
+            <a:ext cx="5943600" cy="731520"/>
           </a:xfrm>
           <a:prstGeom prst="rect">
             <a:avLst/>
@@ -8216,7 +8164,7 @@
               </a:defRPr>
             </a:pPr>
             <a:r>
-              <a:t>🔵 Reply（算法层）</a:t>
+              <a:t>1 长序列推理开销</a:t>
             </a:r>
           </a:p>
         </p:txBody>
@@ -8230,7 +8178,7 @@
         <p:spPr>
           <a:xfrm>
             <a:off x="5806440" y="1645920"/>
-            <a:ext cx="5669280" cy="640080"/>
+            <a:ext cx="5669280" cy="182880"/>
           </a:xfrm>
           <a:prstGeom prst="rect">
             <a:avLst/>
@@ -8251,11 +8199,7 @@
               </a:defRPr>
             </a:pPr>
             <a:r>
-              <a:t>C1 策略时效性 — 策略版本差&gt;4步训练发散</a:t>
-            </a:r>
-            <a:br/>
-            <a:r>
-              <a:t>C4 奖励与归因 — 84%算力浪费在非关键步骤</a:t>
+              <a:t>M级context下KV Cache数GB，单步推理计算量和内存爆炸  *****</a:t>
             </a:r>
           </a:p>
         </p:txBody>
@@ -8268,8 +8212,8 @@
         </p:nvSpPr>
         <p:spPr>
           <a:xfrm>
-            <a:off x="5669280" y="2560320"/>
-            <a:ext cx="5943600" cy="1188720"/>
+            <a:off x="5669280" y="2011680"/>
+            <a:ext cx="5943600" cy="731520"/>
           </a:xfrm>
           <a:prstGeom prst="rect">
             <a:avLst/>
@@ -8311,7 +8255,7 @@
         </p:nvSpPr>
         <p:spPr>
           <a:xfrm>
-            <a:off x="5806440" y="2651760"/>
+            <a:off x="5806440" y="2103120"/>
             <a:ext cx="5669280" cy="365760"/>
           </a:xfrm>
           <a:prstGeom prst="rect">
@@ -8333,7 +8277,7 @@
               </a:defRPr>
             </a:pPr>
             <a:r>
-              <a:t>🟢 Routing（框架层）</a:t>
+              <a:t>2 环境交互延迟</a:t>
             </a:r>
           </a:p>
         </p:txBody>
@@ -8346,8 +8290,8 @@
         </p:nvSpPr>
         <p:spPr>
           <a:xfrm>
-            <a:off x="5806440" y="3017520"/>
-            <a:ext cx="5669280" cy="640080"/>
+            <a:off x="5806440" y="2468880"/>
+            <a:ext cx="5669280" cy="182880"/>
           </a:xfrm>
           <a:prstGeom prst="rect">
             <a:avLst/>
@@ -8368,11 +8312,7 @@
               </a:defRPr>
             </a:pPr>
             <a:r>
-              <a:t>C2 采集吞吐 — 单Agent KV Cache数GB，千并发撑爆显存</a:t>
-            </a:r>
-            <a:br/>
-            <a:r>
-              <a:t>C3 推理效率 — 70B模型不量化单卡放不下</a:t>
+              <a:t>闭环多轮串行+真实环境不可控，Episode耗时分钟级  ****</a:t>
             </a:r>
           </a:p>
         </p:txBody>
@@ -8385,8 +8325,8 @@
         </p:nvSpPr>
         <p:spPr>
           <a:xfrm>
-            <a:off x="5669280" y="3931920"/>
-            <a:ext cx="5943600" cy="1188720"/>
+            <a:off x="5669280" y="2834640"/>
+            <a:ext cx="5943600" cy="731520"/>
           </a:xfrm>
           <a:prstGeom prst="rect">
             <a:avLst/>
@@ -8428,7 +8368,7 @@
         </p:nvSpPr>
         <p:spPr>
           <a:xfrm>
-            <a:off x="5806440" y="4023359"/>
+            <a:off x="5806440" y="2926080"/>
             <a:ext cx="5669280" cy="365760"/>
           </a:xfrm>
           <a:prstGeom prst="rect">
@@ -8445,26 +8385,139 @@
             <a:pPr algn="l">
               <a:defRPr sz="1300" b="1">
                 <a:solidFill>
+                  <a:srgbClr val="00C853"/>
+                </a:solidFill>
+              </a:defRPr>
+            </a:pPr>
+            <a:r>
+              <a:t>3 在线数据吞吐瓶颈</a:t>
+            </a:r>
+          </a:p>
+        </p:txBody>
+      </p:sp>
+      <p:sp>
+        <p:nvSpPr>
+          <p:cNvPr id="15" name="TextBox 14"/>
+          <p:cNvSpPr txBox="1"/>
+          <p:nvPr/>
+        </p:nvSpPr>
+        <p:spPr>
+          <a:xfrm>
+            <a:off x="5806440" y="3291840"/>
+            <a:ext cx="5669280" cy="182880"/>
+          </a:xfrm>
+          <a:prstGeom prst="rect">
+            <a:avLst/>
+          </a:prstGeom>
+          <a:noFill/>
+        </p:spPr>
+        <p:txBody>
+          <a:bodyPr wrap="square">
+            <a:spAutoFit/>
+          </a:bodyPr>
+          <a:lstStyle/>
+          <a:p>
+            <a:pPr algn="l">
+              <a:defRPr sz="1100" b="0">
+                <a:solidFill>
+                  <a:srgbClr val="B0B8C8"/>
+                </a:solidFill>
+              </a:defRPr>
+            </a:pPr>
+            <a:r>
+              <a:t>on-policy数据产生速率被推理和环境速度卡死  ****</a:t>
+            </a:r>
+          </a:p>
+        </p:txBody>
+      </p:sp>
+      <p:sp>
+        <p:nvSpPr>
+          <p:cNvPr id="16" name="Rectangle 15"/>
+          <p:cNvSpPr/>
+          <p:nvPr/>
+        </p:nvSpPr>
+        <p:spPr>
+          <a:xfrm>
+            <a:off x="5669280" y="3657600"/>
+            <a:ext cx="5943600" cy="731520"/>
+          </a:xfrm>
+          <a:prstGeom prst="rect">
+            <a:avLst/>
+          </a:prstGeom>
+          <a:solidFill>
+            <a:srgbClr val="1B2A4A"/>
+          </a:solidFill>
+          <a:ln>
+            <a:noFill/>
+          </a:ln>
+        </p:spPr>
+        <p:style>
+          <a:lnRef idx="1">
+            <a:schemeClr val="accent1"/>
+          </a:lnRef>
+          <a:fillRef idx="3">
+            <a:schemeClr val="accent1"/>
+          </a:fillRef>
+          <a:effectRef idx="2">
+            <a:schemeClr val="accent1"/>
+          </a:effectRef>
+          <a:fontRef idx="minor">
+            <a:schemeClr val="lt1"/>
+          </a:fontRef>
+        </p:style>
+        <p:txBody>
+          <a:bodyPr rtlCol="0" anchor="ctr"/>
+          <a:lstStyle/>
+          <a:p>
+            <a:pPr algn="ctr"/>
+          </a:p>
+        </p:txBody>
+      </p:sp>
+      <p:sp>
+        <p:nvSpPr>
+          <p:cNvPr id="17" name="TextBox 16"/>
+          <p:cNvSpPr txBox="1"/>
+          <p:nvPr/>
+        </p:nvSpPr>
+        <p:spPr>
+          <a:xfrm>
+            <a:off x="5806440" y="3749039"/>
+            <a:ext cx="5669280" cy="365760"/>
+          </a:xfrm>
+          <a:prstGeom prst="rect">
+            <a:avLst/>
+          </a:prstGeom>
+          <a:noFill/>
+        </p:spPr>
+        <p:txBody>
+          <a:bodyPr wrap="square">
+            <a:spAutoFit/>
+          </a:bodyPr>
+          <a:lstStyle/>
+          <a:p>
+            <a:pPr algn="l">
+              <a:defRPr sz="1300" b="1">
+                <a:solidFill>
                   <a:srgbClr val="FF8C00"/>
                 </a:solidFill>
               </a:defRPr>
             </a:pPr>
             <a:r>
-              <a:t>🟠 Record（基础设施层）</a:t>
-            </a:r>
-          </a:p>
-        </p:txBody>
-      </p:sp>
-      <p:sp>
-        <p:nvSpPr>
-          <p:cNvPr id="15" name="TextBox 14"/>
-          <p:cNvSpPr txBox="1"/>
-          <p:nvPr/>
-        </p:nvSpPr>
-        <p:spPr>
-          <a:xfrm>
-            <a:off x="5806440" y="4389120"/>
-            <a:ext cx="5669280" cy="640080"/>
+              <a:t>4 探索效率</a:t>
+            </a:r>
+          </a:p>
+        </p:txBody>
+      </p:sp>
+      <p:sp>
+        <p:nvSpPr>
+          <p:cNvPr id="18" name="TextBox 17"/>
+          <p:cNvSpPr txBox="1"/>
+          <p:nvPr/>
+        </p:nvSpPr>
+        <p:spPr>
+          <a:xfrm>
+            <a:off x="5806440" y="4114800"/>
+            <a:ext cx="5669280" cy="182880"/>
           </a:xfrm>
           <a:prstGeom prst="rect">
             <a:avLst/>
@@ -8485,25 +8538,99 @@
               </a:defRPr>
             </a:pPr>
             <a:r>
-              <a:t>C6 环境保真 — sandbox偏差导致训练信号失真</a:t>
-            </a:r>
-            <a:br/>
-            <a:r>
-              <a:t>C7 工程可达 — 算法2-4周迭代，算子适配3-6个月</a:t>
-            </a:r>
-          </a:p>
-        </p:txBody>
-      </p:sp>
-      <p:sp>
-        <p:nvSpPr>
-          <p:cNvPr id="16" name="TextBox 15"/>
-          <p:cNvSpPr txBox="1"/>
-          <p:nvPr/>
-        </p:nvSpPr>
-        <p:spPr>
-          <a:xfrm>
-            <a:off x="5669280" y="5303520"/>
-            <a:ext cx="5943600" cy="365760"/>
+              <a:t>巨大策略空间中有效轨迹比例极低，算力浪费  ***</a:t>
+            </a:r>
+          </a:p>
+        </p:txBody>
+      </p:sp>
+      <p:sp>
+        <p:nvSpPr>
+          <p:cNvPr id="19" name="Rectangle 18"/>
+          <p:cNvSpPr/>
+          <p:nvPr/>
+        </p:nvSpPr>
+        <p:spPr>
+          <a:xfrm>
+            <a:off x="5669280" y="4480560"/>
+            <a:ext cx="5943600" cy="731520"/>
+          </a:xfrm>
+          <a:prstGeom prst="rect">
+            <a:avLst/>
+          </a:prstGeom>
+          <a:solidFill>
+            <a:srgbClr val="1B2A4A"/>
+          </a:solidFill>
+          <a:ln>
+            <a:noFill/>
+          </a:ln>
+        </p:spPr>
+        <p:style>
+          <a:lnRef idx="1">
+            <a:schemeClr val="accent1"/>
+          </a:lnRef>
+          <a:fillRef idx="3">
+            <a:schemeClr val="accent1"/>
+          </a:fillRef>
+          <a:effectRef idx="2">
+            <a:schemeClr val="accent1"/>
+          </a:effectRef>
+          <a:fontRef idx="minor">
+            <a:schemeClr val="lt1"/>
+          </a:fontRef>
+        </p:style>
+        <p:txBody>
+          <a:bodyPr rtlCol="0" anchor="ctr"/>
+          <a:lstStyle/>
+          <a:p>
+            <a:pPr algn="ctr"/>
+          </a:p>
+        </p:txBody>
+      </p:sp>
+      <p:sp>
+        <p:nvSpPr>
+          <p:cNvPr id="20" name="TextBox 19"/>
+          <p:cNvSpPr txBox="1"/>
+          <p:nvPr/>
+        </p:nvSpPr>
+        <p:spPr>
+          <a:xfrm>
+            <a:off x="5806440" y="4572000"/>
+            <a:ext cx="5669280" cy="365760"/>
+          </a:xfrm>
+          <a:prstGeom prst="rect">
+            <a:avLst/>
+          </a:prstGeom>
+          <a:noFill/>
+        </p:spPr>
+        <p:txBody>
+          <a:bodyPr wrap="square">
+            <a:spAutoFit/>
+          </a:bodyPr>
+          <a:lstStyle/>
+          <a:p>
+            <a:pPr algn="l">
+              <a:defRPr sz="1300" b="1">
+                <a:solidFill>
+                  <a:srgbClr val="FF8C00"/>
+                </a:solidFill>
+              </a:defRPr>
+            </a:pPr>
+            <a:r>
+              <a:t>5 稀疏延迟奖励的归因</a:t>
+            </a:r>
+          </a:p>
+        </p:txBody>
+      </p:sp>
+      <p:sp>
+        <p:nvSpPr>
+          <p:cNvPr id="21" name="TextBox 20"/>
+          <p:cNvSpPr txBox="1"/>
+          <p:nvPr/>
+        </p:nvSpPr>
+        <p:spPr>
+          <a:xfrm>
+            <a:off x="5806440" y="4937760"/>
+            <a:ext cx="5669280" cy="182880"/>
           </a:xfrm>
           <a:prstGeom prst="rect">
             <a:avLst/>
@@ -8524,14 +8651,49 @@
               </a:defRPr>
             </a:pPr>
             <a:r>
-              <a:t>⚪ 横切 C5 数值可信 — 穿透R3全流程，RL对数值噪声极敏感</a:t>
-            </a:r>
-          </a:p>
-        </p:txBody>
-      </p:sp>
-      <p:sp>
-        <p:nvSpPr>
-          <p:cNvPr id="17" name="Rectangle 16"/>
+              <a:t>奖励在Episode末端，中间几十步无信号  ***</a:t>
+            </a:r>
+          </a:p>
+        </p:txBody>
+      </p:sp>
+      <p:sp>
+        <p:nvSpPr>
+          <p:cNvPr id="22" name="TextBox 21"/>
+          <p:cNvSpPr txBox="1"/>
+          <p:nvPr/>
+        </p:nvSpPr>
+        <p:spPr>
+          <a:xfrm>
+            <a:off x="5669280" y="5394960"/>
+            <a:ext cx="5943600" cy="274320"/>
+          </a:xfrm>
+          <a:prstGeom prst="rect">
+            <a:avLst/>
+          </a:prstGeom>
+          <a:noFill/>
+        </p:spPr>
+        <p:txBody>
+          <a:bodyPr wrap="square">
+            <a:spAutoFit/>
+          </a:bodyPr>
+          <a:lstStyle/>
+          <a:p>
+            <a:pPr algn="l">
+              <a:defRPr sz="1000" b="0">
+                <a:solidFill>
+                  <a:srgbClr val="B0B8C8"/>
+                </a:solidFill>
+              </a:defRPr>
+            </a:pPr>
+            <a:r>
+              <a:t>横切: 数值可信 -- 穿透所有挑战，RL对数值噪声极敏感</a:t>
+            </a:r>
+          </a:p>
+        </p:txBody>
+      </p:sp>
+      <p:sp>
+        <p:nvSpPr>
+          <p:cNvPr id="23" name="Rectangle 22"/>
           <p:cNvSpPr/>
           <p:nvPr/>
         </p:nvSpPr>
@@ -8574,7 +8736,7 @@
       </p:sp>
       <p:sp>
         <p:nvSpPr>
-          <p:cNvPr id="18" name="TextBox 17"/>
+          <p:cNvPr id="24" name="TextBox 23"/>
           <p:cNvSpPr txBox="1"/>
           <p:nvPr/>
         </p:nvSpPr>
@@ -8602,7 +8764,7 @@
               </a:defRPr>
             </a:pPr>
             <a:r>
-              <a:t>6挑战+1横切沿R3数据流 Reply→Routing→Record 穿透三层架构 → P4展开全栈需求传导</a:t>
+              <a:t>5个挑战驱动后训练软件栈三层架构全面升级 -&gt; P4展开因果传导</a:t>
             </a:r>
           </a:p>
         </p:txBody>
@@ -8706,56 +8868,21 @@
               </a:defRPr>
             </a:pPr>
             <a:r>
-              <a:t>Agent RL后训练的全栈需求传导</a:t>
-            </a:r>
-          </a:p>
-        </p:txBody>
-      </p:sp>
-      <p:sp>
-        <p:nvSpPr>
-          <p:cNvPr id="4" name="TextBox 3"/>
-          <p:cNvSpPr txBox="1"/>
-          <p:nvPr/>
-        </p:nvSpPr>
-        <p:spPr>
-          <a:xfrm>
-            <a:off x="457200" y="594360"/>
-            <a:ext cx="10972800" cy="320040"/>
-          </a:xfrm>
-          <a:prstGeom prst="rect">
-            <a:avLst/>
-          </a:prstGeom>
-          <a:noFill/>
-        </p:spPr>
-        <p:txBody>
-          <a:bodyPr wrap="square">
-            <a:spAutoFit/>
-          </a:bodyPr>
-          <a:lstStyle/>
-          <a:p>
-            <a:pPr algn="l">
-              <a:defRPr sz="1400" b="0">
-                <a:solidFill>
-                  <a:srgbClr val="B0B8C8"/>
-                </a:solidFill>
-              </a:defRPr>
-            </a:pPr>
-            <a:r>
-              <a:t>R3 × 三层架构 × 8项技术</a:t>
-            </a:r>
-          </a:p>
-        </p:txBody>
-      </p:sp>
-      <p:sp>
-        <p:nvSpPr>
-          <p:cNvPr id="5" name="Rectangle 4"/>
+              <a:t>五挑战 -&gt; 七升级方向 -- 后训练软件栈三层全面升级</a:t>
+            </a:r>
+          </a:p>
+        </p:txBody>
+      </p:sp>
+      <p:sp>
+        <p:nvSpPr>
+          <p:cNvPr id="4" name="Rectangle 3"/>
           <p:cNvSpPr/>
           <p:nvPr/>
         </p:nvSpPr>
         <p:spPr>
           <a:xfrm>
-            <a:off x="274320" y="1188720"/>
-            <a:ext cx="11612880" cy="2011680"/>
+            <a:off x="182880" y="1097280"/>
+            <a:ext cx="2011680" cy="502920"/>
           </a:xfrm>
           <a:prstGeom prst="rect">
             <a:avLst/>
@@ -8791,49 +8918,49 @@
       </p:sp>
       <p:sp>
         <p:nvSpPr>
+          <p:cNvPr id="5" name="TextBox 4"/>
+          <p:cNvSpPr txBox="1"/>
+          <p:nvPr/>
+        </p:nvSpPr>
+        <p:spPr>
+          <a:xfrm>
+            <a:off x="320040" y="1188720"/>
+            <a:ext cx="1737360" cy="365760"/>
+          </a:xfrm>
+          <a:prstGeom prst="rect">
+            <a:avLst/>
+          </a:prstGeom>
+          <a:noFill/>
+        </p:spPr>
+        <p:txBody>
+          <a:bodyPr wrap="square">
+            <a:spAutoFit/>
+          </a:bodyPr>
+          <a:lstStyle/>
+          <a:p>
+            <a:pPr algn="l">
+              <a:defRPr sz="1300" b="1">
+                <a:solidFill>
+                  <a:srgbClr val="0096D6"/>
+                </a:solidFill>
+              </a:defRPr>
+            </a:pPr>
+            <a:r>
+              <a:t>1 推理开销</a:t>
+            </a:r>
+          </a:p>
+        </p:txBody>
+      </p:sp>
+      <p:sp>
+        <p:nvSpPr>
           <p:cNvPr id="6" name="TextBox 5"/>
           <p:cNvSpPr txBox="1"/>
           <p:nvPr/>
         </p:nvSpPr>
         <p:spPr>
           <a:xfrm>
-            <a:off x="411479" y="1280160"/>
-            <a:ext cx="11338559" cy="365760"/>
-          </a:xfrm>
-          <a:prstGeom prst="rect">
-            <a:avLst/>
-          </a:prstGeom>
-          <a:noFill/>
-        </p:spPr>
-        <p:txBody>
-          <a:bodyPr wrap="square">
-            <a:spAutoFit/>
-          </a:bodyPr>
-          <a:lstStyle/>
-          <a:p>
-            <a:pPr algn="l">
-              <a:defRPr sz="1300" b="1">
-                <a:solidFill>
-                  <a:srgbClr val="0096D6"/>
-                </a:solidFill>
-              </a:defRPr>
-            </a:pPr>
-            <a:r>
-              <a:t>挑战 → 栈层 → 新要求 → 技术</a:t>
-            </a:r>
-          </a:p>
-        </p:txBody>
-      </p:sp>
-      <p:sp>
-        <p:nvSpPr>
-          <p:cNvPr id="7" name="TextBox 6"/>
-          <p:cNvSpPr txBox="1"/>
-          <p:nvPr/>
-        </p:nvSpPr>
-        <p:spPr>
-          <a:xfrm>
-            <a:off x="411479" y="1645920"/>
-            <a:ext cx="11338559" cy="1463040"/>
+            <a:off x="320040" y="1554480"/>
+            <a:ext cx="1737360" cy="-45719"/>
           </a:xfrm>
           <a:prstGeom prst="rect">
             <a:avLst/>
@@ -8853,37 +8980,19 @@
                 </a:solidFill>
               </a:defRPr>
             </a:pPr>
-            <a:r>
-              <a:t>🔵 Reply（算法层）  C1策略时效+C4奖励归因 → off-policy修正+step-level归因 → Decoupled PPO | DAPO+CISPO | Cursor+Meta SSR</a:t>
-            </a:r>
-            <a:br/>
-            <a:br/>
-            <a:r>
-              <a:t>🟢 Routing（框架层）C2采集吞吐+C3推理效率 → KV-aware路由+量化分离 → ProRL Agent | Dynamo | LMCache | Mooncake</a:t>
-            </a:r>
-            <a:br/>
-            <a:br/>
-            <a:r>
-              <a:t>🟠 Record（基础设施）C6环境保真+C7工程可达 → sandbox保真+算子适配 → Forge + ⚠️行业空白</a:t>
-            </a:r>
-            <a:br/>
-            <a:br/>
-            <a:r>
-              <a:t>⚪ 横切C5 数值可信 — 穿透R3全流程，每层都须守住精度底线</a:t>
-            </a:r>
-          </a:p>
-        </p:txBody>
-      </p:sp>
-      <p:sp>
-        <p:nvSpPr>
-          <p:cNvPr id="8" name="Rectangle 7"/>
+          </a:p>
+        </p:txBody>
+      </p:sp>
+      <p:sp>
+        <p:nvSpPr>
+          <p:cNvPr id="7" name="Rectangle 6"/>
           <p:cNvSpPr/>
           <p:nvPr/>
         </p:nvSpPr>
         <p:spPr>
           <a:xfrm>
-            <a:off x="274320" y="3474720"/>
-            <a:ext cx="3657600" cy="2377440"/>
+            <a:off x="182880" y="1691640"/>
+            <a:ext cx="2011680" cy="502920"/>
           </a:xfrm>
           <a:prstGeom prst="rect">
             <a:avLst/>
@@ -8919,49 +9028,49 @@
       </p:sp>
       <p:sp>
         <p:nvSpPr>
+          <p:cNvPr id="8" name="TextBox 7"/>
+          <p:cNvSpPr txBox="1"/>
+          <p:nvPr/>
+        </p:nvSpPr>
+        <p:spPr>
+          <a:xfrm>
+            <a:off x="320040" y="1783080"/>
+            <a:ext cx="1737360" cy="365760"/>
+          </a:xfrm>
+          <a:prstGeom prst="rect">
+            <a:avLst/>
+          </a:prstGeom>
+          <a:noFill/>
+        </p:spPr>
+        <p:txBody>
+          <a:bodyPr wrap="square">
+            <a:spAutoFit/>
+          </a:bodyPr>
+          <a:lstStyle/>
+          <a:p>
+            <a:pPr algn="l">
+              <a:defRPr sz="1300" b="1">
+                <a:solidFill>
+                  <a:srgbClr val="00C853"/>
+                </a:solidFill>
+              </a:defRPr>
+            </a:pPr>
+            <a:r>
+              <a:t>2 环境延迟</a:t>
+            </a:r>
+          </a:p>
+        </p:txBody>
+      </p:sp>
+      <p:sp>
+        <p:nvSpPr>
           <p:cNvPr id="9" name="TextBox 8"/>
           <p:cNvSpPr txBox="1"/>
           <p:nvPr/>
         </p:nvSpPr>
         <p:spPr>
           <a:xfrm>
-            <a:off x="411479" y="3566160"/>
-            <a:ext cx="3383280" cy="365760"/>
-          </a:xfrm>
-          <a:prstGeom prst="rect">
-            <a:avLst/>
-          </a:prstGeom>
-          <a:noFill/>
-        </p:spPr>
-        <p:txBody>
-          <a:bodyPr wrap="square">
-            <a:spAutoFit/>
-          </a:bodyPr>
-          <a:lstStyle/>
-          <a:p>
-            <a:pPr algn="l">
-              <a:defRPr sz="1300" b="1">
-                <a:solidFill>
-                  <a:srgbClr val="0096D6"/>
-                </a:solidFill>
-              </a:defRPr>
-            </a:pPr>
-            <a:r>
-              <a:t>🔵 算法层（Reply）— 3项</a:t>
-            </a:r>
-          </a:p>
-        </p:txBody>
-      </p:sp>
-      <p:sp>
-        <p:nvSpPr>
-          <p:cNvPr id="10" name="TextBox 9"/>
-          <p:cNvSpPr txBox="1"/>
-          <p:nvPr/>
-        </p:nvSpPr>
-        <p:spPr>
-          <a:xfrm>
-            <a:off x="411479" y="3931920"/>
-            <a:ext cx="3383280" cy="1828800"/>
+            <a:off x="320040" y="2148840"/>
+            <a:ext cx="1737360" cy="-45719"/>
           </a:xfrm>
           <a:prstGeom prst="rect">
             <a:avLst/>
@@ -8981,44 +9090,19 @@
                 </a:solidFill>
               </a:defRPr>
             </a:pPr>
-            <a:r>
-              <a:t>Decoupled PPO</a:t>
-            </a:r>
-            <a:br/>
-            <a:r>
-              <a:t>  actor-learner分离+V-trace</a:t>
-            </a:r>
-            <a:br/>
-            <a:br/>
-            <a:r>
-              <a:t>DAPO+CISPO</a:t>
-            </a:r>
-            <a:br/>
-            <a:r>
-              <a:t>  工业级异步RL(ByteDance+MiniMax)</a:t>
-            </a:r>
-            <a:br/>
-            <a:br/>
-            <a:r>
-              <a:t>Cursor实时RL + Meta SSR</a:t>
-            </a:r>
-            <a:br/>
-            <a:r>
-              <a:t>  闭环训练实践</a:t>
-            </a:r>
-          </a:p>
-        </p:txBody>
-      </p:sp>
-      <p:sp>
-        <p:nvSpPr>
-          <p:cNvPr id="11" name="Rectangle 10"/>
+          </a:p>
+        </p:txBody>
+      </p:sp>
+      <p:sp>
+        <p:nvSpPr>
+          <p:cNvPr id="10" name="Rectangle 9"/>
           <p:cNvSpPr/>
           <p:nvPr/>
         </p:nvSpPr>
         <p:spPr>
           <a:xfrm>
-            <a:off x="4206240" y="3474720"/>
-            <a:ext cx="3840480" cy="2377440"/>
+            <a:off x="182880" y="2286000"/>
+            <a:ext cx="2011680" cy="502920"/>
           </a:xfrm>
           <a:prstGeom prst="rect">
             <a:avLst/>
@@ -9054,49 +9138,49 @@
       </p:sp>
       <p:sp>
         <p:nvSpPr>
+          <p:cNvPr id="11" name="TextBox 10"/>
+          <p:cNvSpPr txBox="1"/>
+          <p:nvPr/>
+        </p:nvSpPr>
+        <p:spPr>
+          <a:xfrm>
+            <a:off x="320040" y="2377440"/>
+            <a:ext cx="1737360" cy="365760"/>
+          </a:xfrm>
+          <a:prstGeom prst="rect">
+            <a:avLst/>
+          </a:prstGeom>
+          <a:noFill/>
+        </p:spPr>
+        <p:txBody>
+          <a:bodyPr wrap="square">
+            <a:spAutoFit/>
+          </a:bodyPr>
+          <a:lstStyle/>
+          <a:p>
+            <a:pPr algn="l">
+              <a:defRPr sz="1300" b="1">
+                <a:solidFill>
+                  <a:srgbClr val="00C853"/>
+                </a:solidFill>
+              </a:defRPr>
+            </a:pPr>
+            <a:r>
+              <a:t>3 数据吞吐</a:t>
+            </a:r>
+          </a:p>
+        </p:txBody>
+      </p:sp>
+      <p:sp>
+        <p:nvSpPr>
           <p:cNvPr id="12" name="TextBox 11"/>
           <p:cNvSpPr txBox="1"/>
           <p:nvPr/>
         </p:nvSpPr>
         <p:spPr>
           <a:xfrm>
-            <a:off x="4343400" y="3566160"/>
-            <a:ext cx="3566160" cy="365760"/>
-          </a:xfrm>
-          <a:prstGeom prst="rect">
-            <a:avLst/>
-          </a:prstGeom>
-          <a:noFill/>
-        </p:spPr>
-        <p:txBody>
-          <a:bodyPr wrap="square">
-            <a:spAutoFit/>
-          </a:bodyPr>
-          <a:lstStyle/>
-          <a:p>
-            <a:pPr algn="l">
-              <a:defRPr sz="1300" b="1">
-                <a:solidFill>
-                  <a:srgbClr val="00C853"/>
-                </a:solidFill>
-              </a:defRPr>
-            </a:pPr>
-            <a:r>
-              <a:t>🟢 框架层（Routing）— 4项</a:t>
-            </a:r>
-          </a:p>
-        </p:txBody>
-      </p:sp>
-      <p:sp>
-        <p:nvSpPr>
-          <p:cNvPr id="13" name="TextBox 12"/>
-          <p:cNvSpPr txBox="1"/>
-          <p:nvPr/>
-        </p:nvSpPr>
-        <p:spPr>
-          <a:xfrm>
-            <a:off x="4343400" y="3931920"/>
-            <a:ext cx="3566160" cy="1828800"/>
+            <a:off x="320040" y="2743200"/>
+            <a:ext cx="1737360" cy="-45719"/>
           </a:xfrm>
           <a:prstGeom prst="rect">
             <a:avLst/>
@@ -9116,49 +9200,19 @@
                 </a:solidFill>
               </a:defRPr>
             </a:pPr>
-            <a:r>
-              <a:t>ProRL Agent (NVIDIA)</a:t>
-            </a:r>
-            <a:br/>
-            <a:r>
-              <a:t>  Rollout-as-a-Service</a:t>
-            </a:r>
-            <a:br/>
-            <a:br/>
-            <a:r>
-              <a:t>Dynamo (NVIDIA)</a:t>
-            </a:r>
-            <a:br/>
-            <a:r>
-              <a:t>  KV-aware弹性路由</a:t>
-            </a:r>
-            <a:br/>
-            <a:br/>
-            <a:r>
-              <a:t>LMCache — KV Cache跨节点共享</a:t>
-            </a:r>
-            <a:br/>
-            <a:br/>
-            <a:r>
-              <a:t>Mooncake (月之暗面)</a:t>
-            </a:r>
-            <a:br/>
-            <a:r>
-              <a:t>  prefill-decode分离+KV池化</a:t>
-            </a:r>
-          </a:p>
-        </p:txBody>
-      </p:sp>
-      <p:sp>
-        <p:nvSpPr>
-          <p:cNvPr id="14" name="Rectangle 13"/>
+          </a:p>
+        </p:txBody>
+      </p:sp>
+      <p:sp>
+        <p:nvSpPr>
+          <p:cNvPr id="13" name="Rectangle 12"/>
           <p:cNvSpPr/>
           <p:nvPr/>
         </p:nvSpPr>
         <p:spPr>
           <a:xfrm>
-            <a:off x="8321040" y="3474720"/>
-            <a:ext cx="3657600" cy="2377440"/>
+            <a:off x="182880" y="2880360"/>
+            <a:ext cx="2011680" cy="502920"/>
           </a:xfrm>
           <a:prstGeom prst="rect">
             <a:avLst/>
@@ -9194,14 +9248,124 @@
       </p:sp>
       <p:sp>
         <p:nvSpPr>
+          <p:cNvPr id="14" name="TextBox 13"/>
+          <p:cNvSpPr txBox="1"/>
+          <p:nvPr/>
+        </p:nvSpPr>
+        <p:spPr>
+          <a:xfrm>
+            <a:off x="320040" y="2971800"/>
+            <a:ext cx="1737360" cy="365760"/>
+          </a:xfrm>
+          <a:prstGeom prst="rect">
+            <a:avLst/>
+          </a:prstGeom>
+          <a:noFill/>
+        </p:spPr>
+        <p:txBody>
+          <a:bodyPr wrap="square">
+            <a:spAutoFit/>
+          </a:bodyPr>
+          <a:lstStyle/>
+          <a:p>
+            <a:pPr algn="l">
+              <a:defRPr sz="1300" b="1">
+                <a:solidFill>
+                  <a:srgbClr val="FF8C00"/>
+                </a:solidFill>
+              </a:defRPr>
+            </a:pPr>
+            <a:r>
+              <a:t>4 探索效率</a:t>
+            </a:r>
+          </a:p>
+        </p:txBody>
+      </p:sp>
+      <p:sp>
+        <p:nvSpPr>
           <p:cNvPr id="15" name="TextBox 14"/>
           <p:cNvSpPr txBox="1"/>
           <p:nvPr/>
         </p:nvSpPr>
         <p:spPr>
           <a:xfrm>
-            <a:off x="8458200" y="3566160"/>
-            <a:ext cx="3383280" cy="365760"/>
+            <a:off x="320040" y="3337560"/>
+            <a:ext cx="1737360" cy="-45719"/>
+          </a:xfrm>
+          <a:prstGeom prst="rect">
+            <a:avLst/>
+          </a:prstGeom>
+          <a:noFill/>
+        </p:spPr>
+        <p:txBody>
+          <a:bodyPr wrap="square">
+            <a:spAutoFit/>
+          </a:bodyPr>
+          <a:lstStyle/>
+          <a:p>
+            <a:pPr algn="l">
+              <a:defRPr sz="1100" b="0">
+                <a:solidFill>
+                  <a:srgbClr val="B0B8C8"/>
+                </a:solidFill>
+              </a:defRPr>
+            </a:pPr>
+          </a:p>
+        </p:txBody>
+      </p:sp>
+      <p:sp>
+        <p:nvSpPr>
+          <p:cNvPr id="16" name="Rectangle 15"/>
+          <p:cNvSpPr/>
+          <p:nvPr/>
+        </p:nvSpPr>
+        <p:spPr>
+          <a:xfrm>
+            <a:off x="182880" y="3474720"/>
+            <a:ext cx="2011680" cy="502920"/>
+          </a:xfrm>
+          <a:prstGeom prst="rect">
+            <a:avLst/>
+          </a:prstGeom>
+          <a:solidFill>
+            <a:srgbClr val="1B2A4A"/>
+          </a:solidFill>
+          <a:ln>
+            <a:noFill/>
+          </a:ln>
+        </p:spPr>
+        <p:style>
+          <a:lnRef idx="1">
+            <a:schemeClr val="accent1"/>
+          </a:lnRef>
+          <a:fillRef idx="3">
+            <a:schemeClr val="accent1"/>
+          </a:fillRef>
+          <a:effectRef idx="2">
+            <a:schemeClr val="accent1"/>
+          </a:effectRef>
+          <a:fontRef idx="minor">
+            <a:schemeClr val="lt1"/>
+          </a:fontRef>
+        </p:style>
+        <p:txBody>
+          <a:bodyPr rtlCol="0" anchor="ctr"/>
+          <a:lstStyle/>
+          <a:p>
+            <a:pPr algn="ctr"/>
+          </a:p>
+        </p:txBody>
+      </p:sp>
+      <p:sp>
+        <p:nvSpPr>
+          <p:cNvPr id="17" name="TextBox 16"/>
+          <p:cNvSpPr txBox="1"/>
+          <p:nvPr/>
+        </p:nvSpPr>
+        <p:spPr>
+          <a:xfrm>
+            <a:off x="320040" y="3566160"/>
+            <a:ext cx="1737360" cy="365760"/>
           </a:xfrm>
           <a:prstGeom prst="rect">
             <a:avLst/>
@@ -9222,21 +9386,21 @@
               </a:defRPr>
             </a:pPr>
             <a:r>
-              <a:t>🟠 基础设施层（Record）— 1+空白</a:t>
-            </a:r>
-          </a:p>
-        </p:txBody>
-      </p:sp>
-      <p:sp>
-        <p:nvSpPr>
-          <p:cNvPr id="16" name="TextBox 15"/>
-          <p:cNvSpPr txBox="1"/>
-          <p:nvPr/>
-        </p:nvSpPr>
-        <p:spPr>
-          <a:xfrm>
-            <a:off x="8458200" y="3931920"/>
-            <a:ext cx="3383280" cy="1828800"/>
+              <a:t>5 奖励归因</a:t>
+            </a:r>
+          </a:p>
+        </p:txBody>
+      </p:sp>
+      <p:sp>
+        <p:nvSpPr>
+          <p:cNvPr id="18" name="TextBox 17"/>
+          <p:cNvSpPr txBox="1"/>
+          <p:nvPr/>
+        </p:nvSpPr>
+        <p:spPr>
+          <a:xfrm>
+            <a:off x="320040" y="3931920"/>
+            <a:ext cx="1737360" cy="-45719"/>
           </a:xfrm>
           <a:prstGeom prst="rect">
             <a:avLst/>
@@ -9256,36 +9420,1713 @@
                 </a:solidFill>
               </a:defRPr>
             </a:pPr>
-            <a:r>
-              <a:t>Forge分层设计 (MiniMax)</a:t>
-            </a:r>
-            <a:br/>
-            <a:r>
-              <a:t>  Agent-环境解耦框架</a:t>
-            </a:r>
-            <a:br/>
-            <a:br/>
-            <a:r>
-              <a:t>⚠️ 行业空白</a:t>
-            </a:r>
-            <a:br/>
-            <a:r>
-              <a:t>  基础设施层技术供给不足</a:t>
-            </a:r>
-            <a:br/>
-            <a:r>
-              <a:t>  精度/算子/框架 = 我们的机会</a:t>
-            </a:r>
-            <a:br/>
-            <a:r>
-              <a:t>  → 见P15我们的定位</a:t>
-            </a:r>
-          </a:p>
-        </p:txBody>
-      </p:sp>
-      <p:sp>
-        <p:nvSpPr>
-          <p:cNvPr id="17" name="Rectangle 16"/>
+          </a:p>
+        </p:txBody>
+      </p:sp>
+      <p:sp>
+        <p:nvSpPr>
+          <p:cNvPr id="19" name="Rectangle 18"/>
+          <p:cNvSpPr/>
+          <p:nvPr/>
+        </p:nvSpPr>
+        <p:spPr>
+          <a:xfrm>
+            <a:off x="2560320" y="1097280"/>
+            <a:ext cx="4754880" cy="502920"/>
+          </a:xfrm>
+          <a:prstGeom prst="rect">
+            <a:avLst/>
+          </a:prstGeom>
+          <a:solidFill>
+            <a:srgbClr val="1B2A4A"/>
+          </a:solidFill>
+          <a:ln>
+            <a:noFill/>
+          </a:ln>
+        </p:spPr>
+        <p:style>
+          <a:lnRef idx="1">
+            <a:schemeClr val="accent1"/>
+          </a:lnRef>
+          <a:fillRef idx="3">
+            <a:schemeClr val="accent1"/>
+          </a:fillRef>
+          <a:effectRef idx="2">
+            <a:schemeClr val="accent1"/>
+          </a:effectRef>
+          <a:fontRef idx="minor">
+            <a:schemeClr val="lt1"/>
+          </a:fontRef>
+        </p:style>
+        <p:txBody>
+          <a:bodyPr rtlCol="0" anchor="ctr"/>
+          <a:lstStyle/>
+          <a:p>
+            <a:pPr algn="ctr"/>
+          </a:p>
+        </p:txBody>
+      </p:sp>
+      <p:sp>
+        <p:nvSpPr>
+          <p:cNvPr id="20" name="TextBox 19"/>
+          <p:cNvSpPr txBox="1"/>
+          <p:nvPr/>
+        </p:nvSpPr>
+        <p:spPr>
+          <a:xfrm>
+            <a:off x="2697479" y="1188720"/>
+            <a:ext cx="4480560" cy="365760"/>
+          </a:xfrm>
+          <a:prstGeom prst="rect">
+            <a:avLst/>
+          </a:prstGeom>
+          <a:noFill/>
+        </p:spPr>
+        <p:txBody>
+          <a:bodyPr wrap="square">
+            <a:spAutoFit/>
+          </a:bodyPr>
+          <a:lstStyle/>
+          <a:p>
+            <a:pPr algn="l">
+              <a:defRPr sz="1300" b="1">
+                <a:solidFill>
+                  <a:srgbClr val="0096D6"/>
+                </a:solidFill>
+              </a:defRPr>
+            </a:pPr>
+            <a:r>
+              <a:t>a KV Cache分布式池化 [基础设施]</a:t>
+            </a:r>
+          </a:p>
+        </p:txBody>
+      </p:sp>
+      <p:sp>
+        <p:nvSpPr>
+          <p:cNvPr id="21" name="TextBox 20"/>
+          <p:cNvSpPr txBox="1"/>
+          <p:nvPr/>
+        </p:nvSpPr>
+        <p:spPr>
+          <a:xfrm>
+            <a:off x="2697479" y="1554480"/>
+            <a:ext cx="4480560" cy="-45719"/>
+          </a:xfrm>
+          <a:prstGeom prst="rect">
+            <a:avLst/>
+          </a:prstGeom>
+          <a:noFill/>
+        </p:spPr>
+        <p:txBody>
+          <a:bodyPr wrap="square">
+            <a:spAutoFit/>
+          </a:bodyPr>
+          <a:lstStyle/>
+          <a:p>
+            <a:pPr algn="l">
+              <a:defRPr sz="1100" b="0">
+                <a:solidFill>
+                  <a:srgbClr val="B0B8C8"/>
+                </a:solidFill>
+              </a:defRPr>
+            </a:pPr>
+            <a:r>
+              <a:t>因为:KV数GB 否则:显存爆</a:t>
+            </a:r>
+          </a:p>
+        </p:txBody>
+      </p:sp>
+      <p:sp>
+        <p:nvSpPr>
+          <p:cNvPr id="22" name="Rectangle 21"/>
+          <p:cNvSpPr/>
+          <p:nvPr/>
+        </p:nvSpPr>
+        <p:spPr>
+          <a:xfrm>
+            <a:off x="2560320" y="1691640"/>
+            <a:ext cx="4754880" cy="502920"/>
+          </a:xfrm>
+          <a:prstGeom prst="rect">
+            <a:avLst/>
+          </a:prstGeom>
+          <a:solidFill>
+            <a:srgbClr val="1B2A4A"/>
+          </a:solidFill>
+          <a:ln>
+            <a:noFill/>
+          </a:ln>
+        </p:spPr>
+        <p:style>
+          <a:lnRef idx="1">
+            <a:schemeClr val="accent1"/>
+          </a:lnRef>
+          <a:fillRef idx="3">
+            <a:schemeClr val="accent1"/>
+          </a:fillRef>
+          <a:effectRef idx="2">
+            <a:schemeClr val="accent1"/>
+          </a:effectRef>
+          <a:fontRef idx="minor">
+            <a:schemeClr val="lt1"/>
+          </a:fontRef>
+        </p:style>
+        <p:txBody>
+          <a:bodyPr rtlCol="0" anchor="ctr"/>
+          <a:lstStyle/>
+          <a:p>
+            <a:pPr algn="ctr"/>
+          </a:p>
+        </p:txBody>
+      </p:sp>
+      <p:sp>
+        <p:nvSpPr>
+          <p:cNvPr id="23" name="TextBox 22"/>
+          <p:cNvSpPr txBox="1"/>
+          <p:nvPr/>
+        </p:nvSpPr>
+        <p:spPr>
+          <a:xfrm>
+            <a:off x="2697479" y="1783080"/>
+            <a:ext cx="4480560" cy="365760"/>
+          </a:xfrm>
+          <a:prstGeom prst="rect">
+            <a:avLst/>
+          </a:prstGeom>
+          <a:noFill/>
+        </p:spPr>
+        <p:txBody>
+          <a:bodyPr wrap="square">
+            <a:spAutoFit/>
+          </a:bodyPr>
+          <a:lstStyle/>
+          <a:p>
+            <a:pPr algn="l">
+              <a:defRPr sz="1300" b="1">
+                <a:solidFill>
+                  <a:srgbClr val="0096D6"/>
+                </a:solidFill>
+              </a:defRPr>
+            </a:pPr>
+            <a:r>
+              <a:t>b 推理加速 [基础设施]</a:t>
+            </a:r>
+          </a:p>
+        </p:txBody>
+      </p:sp>
+      <p:sp>
+        <p:nvSpPr>
+          <p:cNvPr id="24" name="TextBox 23"/>
+          <p:cNvSpPr txBox="1"/>
+          <p:nvPr/>
+        </p:nvSpPr>
+        <p:spPr>
+          <a:xfrm>
+            <a:off x="2697479" y="2148840"/>
+            <a:ext cx="4480560" cy="-45719"/>
+          </a:xfrm>
+          <a:prstGeom prst="rect">
+            <a:avLst/>
+          </a:prstGeom>
+          <a:noFill/>
+        </p:spPr>
+        <p:txBody>
+          <a:bodyPr wrap="square">
+            <a:spAutoFit/>
+          </a:bodyPr>
+          <a:lstStyle/>
+          <a:p>
+            <a:pPr algn="l">
+              <a:defRPr sz="1100" b="0">
+                <a:solidFill>
+                  <a:srgbClr val="B0B8C8"/>
+                </a:solidFill>
+              </a:defRPr>
+            </a:pPr>
+            <a:r>
+              <a:t>因为:70B放不下 否则:成本崩</a:t>
+            </a:r>
+          </a:p>
+        </p:txBody>
+      </p:sp>
+      <p:sp>
+        <p:nvSpPr>
+          <p:cNvPr id="25" name="Rectangle 24"/>
+          <p:cNvSpPr/>
+          <p:nvPr/>
+        </p:nvSpPr>
+        <p:spPr>
+          <a:xfrm>
+            <a:off x="2560320" y="2286000"/>
+            <a:ext cx="4754880" cy="502920"/>
+          </a:xfrm>
+          <a:prstGeom prst="rect">
+            <a:avLst/>
+          </a:prstGeom>
+          <a:solidFill>
+            <a:srgbClr val="1B2A4A"/>
+          </a:solidFill>
+          <a:ln>
+            <a:noFill/>
+          </a:ln>
+        </p:spPr>
+        <p:style>
+          <a:lnRef idx="1">
+            <a:schemeClr val="accent1"/>
+          </a:lnRef>
+          <a:fillRef idx="3">
+            <a:schemeClr val="accent1"/>
+          </a:fillRef>
+          <a:effectRef idx="2">
+            <a:schemeClr val="accent1"/>
+          </a:effectRef>
+          <a:fontRef idx="minor">
+            <a:schemeClr val="lt1"/>
+          </a:fontRef>
+        </p:style>
+        <p:txBody>
+          <a:bodyPr rtlCol="0" anchor="ctr"/>
+          <a:lstStyle/>
+          <a:p>
+            <a:pPr algn="ctr"/>
+          </a:p>
+        </p:txBody>
+      </p:sp>
+      <p:sp>
+        <p:nvSpPr>
+          <p:cNvPr id="26" name="TextBox 25"/>
+          <p:cNvSpPr txBox="1"/>
+          <p:nvPr/>
+        </p:nvSpPr>
+        <p:spPr>
+          <a:xfrm>
+            <a:off x="2697479" y="2377440"/>
+            <a:ext cx="4480560" cy="365760"/>
+          </a:xfrm>
+          <a:prstGeom prst="rect">
+            <a:avLst/>
+          </a:prstGeom>
+          <a:noFill/>
+        </p:spPr>
+        <p:txBody>
+          <a:bodyPr wrap="square">
+            <a:spAutoFit/>
+          </a:bodyPr>
+          <a:lstStyle/>
+          <a:p>
+            <a:pPr algn="l">
+              <a:defRPr sz="1300" b="1">
+                <a:solidFill>
+                  <a:srgbClr val="0096D6"/>
+                </a:solidFill>
+              </a:defRPr>
+            </a:pPr>
+            <a:r>
+              <a:t>c sandbox并行化 [基础设施]</a:t>
+            </a:r>
+          </a:p>
+        </p:txBody>
+      </p:sp>
+      <p:sp>
+        <p:nvSpPr>
+          <p:cNvPr id="27" name="TextBox 26"/>
+          <p:cNvSpPr txBox="1"/>
+          <p:nvPr/>
+        </p:nvSpPr>
+        <p:spPr>
+          <a:xfrm>
+            <a:off x="2697479" y="2743200"/>
+            <a:ext cx="4480560" cy="-45719"/>
+          </a:xfrm>
+          <a:prstGeom prst="rect">
+            <a:avLst/>
+          </a:prstGeom>
+          <a:noFill/>
+        </p:spPr>
+        <p:txBody>
+          <a:bodyPr wrap="square">
+            <a:spAutoFit/>
+          </a:bodyPr>
+          <a:lstStyle/>
+          <a:p>
+            <a:pPr algn="l">
+              <a:defRPr sz="1100" b="0">
+                <a:solidFill>
+                  <a:srgbClr val="B0B8C8"/>
+                </a:solidFill>
+              </a:defRPr>
+            </a:pPr>
+            <a:r>
+              <a:t>因为:EP分钟级 否则:吞吐塞</a:t>
+            </a:r>
+          </a:p>
+        </p:txBody>
+      </p:sp>
+      <p:sp>
+        <p:nvSpPr>
+          <p:cNvPr id="28" name="Rectangle 27"/>
+          <p:cNvSpPr/>
+          <p:nvPr/>
+        </p:nvSpPr>
+        <p:spPr>
+          <a:xfrm>
+            <a:off x="2560320" y="2880360"/>
+            <a:ext cx="4754880" cy="502920"/>
+          </a:xfrm>
+          <a:prstGeom prst="rect">
+            <a:avLst/>
+          </a:prstGeom>
+          <a:solidFill>
+            <a:srgbClr val="1B2A4A"/>
+          </a:solidFill>
+          <a:ln>
+            <a:noFill/>
+          </a:ln>
+        </p:spPr>
+        <p:style>
+          <a:lnRef idx="1">
+            <a:schemeClr val="accent1"/>
+          </a:lnRef>
+          <a:fillRef idx="3">
+            <a:schemeClr val="accent1"/>
+          </a:fillRef>
+          <a:effectRef idx="2">
+            <a:schemeClr val="accent1"/>
+          </a:effectRef>
+          <a:fontRef idx="minor">
+            <a:schemeClr val="lt1"/>
+          </a:fontRef>
+        </p:style>
+        <p:txBody>
+          <a:bodyPr rtlCol="0" anchor="ctr"/>
+          <a:lstStyle/>
+          <a:p>
+            <a:pPr algn="ctr"/>
+          </a:p>
+        </p:txBody>
+      </p:sp>
+      <p:sp>
+        <p:nvSpPr>
+          <p:cNvPr id="29" name="TextBox 28"/>
+          <p:cNvSpPr txBox="1"/>
+          <p:nvPr/>
+        </p:nvSpPr>
+        <p:spPr>
+          <a:xfrm>
+            <a:off x="2697479" y="2971800"/>
+            <a:ext cx="4480560" cy="365760"/>
+          </a:xfrm>
+          <a:prstGeom prst="rect">
+            <a:avLst/>
+          </a:prstGeom>
+          <a:noFill/>
+        </p:spPr>
+        <p:txBody>
+          <a:bodyPr wrap="square">
+            <a:spAutoFit/>
+          </a:bodyPr>
+          <a:lstStyle/>
+          <a:p>
+            <a:pPr algn="l">
+              <a:defRPr sz="1300" b="1">
+                <a:solidFill>
+                  <a:srgbClr val="00C853"/>
+                </a:solidFill>
+              </a:defRPr>
+            </a:pPr>
+            <a:r>
+              <a:t>d 训推解耦 [框架]</a:t>
+            </a:r>
+          </a:p>
+        </p:txBody>
+      </p:sp>
+      <p:sp>
+        <p:nvSpPr>
+          <p:cNvPr id="30" name="TextBox 29"/>
+          <p:cNvSpPr txBox="1"/>
+          <p:nvPr/>
+        </p:nvSpPr>
+        <p:spPr>
+          <a:xfrm>
+            <a:off x="2697479" y="3337560"/>
+            <a:ext cx="4480560" cy="-45719"/>
+          </a:xfrm>
+          <a:prstGeom prst="rect">
+            <a:avLst/>
+          </a:prstGeom>
+          <a:noFill/>
+        </p:spPr>
+        <p:txBody>
+          <a:bodyPr wrap="square">
+            <a:spAutoFit/>
+          </a:bodyPr>
+          <a:lstStyle/>
+          <a:p>
+            <a:pPr algn="l">
+              <a:defRPr sz="1100" b="0">
+                <a:solidFill>
+                  <a:srgbClr val="B0B8C8"/>
+                </a:solidFill>
+              </a:defRPr>
+            </a:pPr>
+            <a:r>
+              <a:t>因为:I/O阻塞 否则:GPU空转</a:t>
+            </a:r>
+          </a:p>
+        </p:txBody>
+      </p:sp>
+      <p:sp>
+        <p:nvSpPr>
+          <p:cNvPr id="31" name="Rectangle 30"/>
+          <p:cNvSpPr/>
+          <p:nvPr/>
+        </p:nvSpPr>
+        <p:spPr>
+          <a:xfrm>
+            <a:off x="2560320" y="3474720"/>
+            <a:ext cx="4754880" cy="502920"/>
+          </a:xfrm>
+          <a:prstGeom prst="rect">
+            <a:avLst/>
+          </a:prstGeom>
+          <a:solidFill>
+            <a:srgbClr val="1B2A4A"/>
+          </a:solidFill>
+          <a:ln>
+            <a:noFill/>
+          </a:ln>
+        </p:spPr>
+        <p:style>
+          <a:lnRef idx="1">
+            <a:schemeClr val="accent1"/>
+          </a:lnRef>
+          <a:fillRef idx="3">
+            <a:schemeClr val="accent1"/>
+          </a:fillRef>
+          <a:effectRef idx="2">
+            <a:schemeClr val="accent1"/>
+          </a:effectRef>
+          <a:fontRef idx="minor">
+            <a:schemeClr val="lt1"/>
+          </a:fontRef>
+        </p:style>
+        <p:txBody>
+          <a:bodyPr rtlCol="0" anchor="ctr"/>
+          <a:lstStyle/>
+          <a:p>
+            <a:pPr algn="ctr"/>
+          </a:p>
+        </p:txBody>
+      </p:sp>
+      <p:sp>
+        <p:nvSpPr>
+          <p:cNvPr id="32" name="TextBox 31"/>
+          <p:cNvSpPr txBox="1"/>
+          <p:nvPr/>
+        </p:nvSpPr>
+        <p:spPr>
+          <a:xfrm>
+            <a:off x="2697479" y="3566160"/>
+            <a:ext cx="4480560" cy="365760"/>
+          </a:xfrm>
+          <a:prstGeom prst="rect">
+            <a:avLst/>
+          </a:prstGeom>
+          <a:noFill/>
+        </p:spPr>
+        <p:txBody>
+          <a:bodyPr wrap="square">
+            <a:spAutoFit/>
+          </a:bodyPr>
+          <a:lstStyle/>
+          <a:p>
+            <a:pPr algn="l">
+              <a:defRPr sz="1300" b="1">
+                <a:solidFill>
+                  <a:srgbClr val="00C853"/>
+                </a:solidFill>
+              </a:defRPr>
+            </a:pPr>
+            <a:r>
+              <a:t>e 异步调度 [框架]</a:t>
+            </a:r>
+          </a:p>
+        </p:txBody>
+      </p:sp>
+      <p:sp>
+        <p:nvSpPr>
+          <p:cNvPr id="33" name="TextBox 32"/>
+          <p:cNvSpPr txBox="1"/>
+          <p:nvPr/>
+        </p:nvSpPr>
+        <p:spPr>
+          <a:xfrm>
+            <a:off x="2697479" y="3931920"/>
+            <a:ext cx="4480560" cy="-45719"/>
+          </a:xfrm>
+          <a:prstGeom prst="rect">
+            <a:avLst/>
+          </a:prstGeom>
+          <a:noFill/>
+        </p:spPr>
+        <p:txBody>
+          <a:bodyPr wrap="square">
+            <a:spAutoFit/>
+          </a:bodyPr>
+          <a:lstStyle/>
+          <a:p>
+            <a:pPr algn="l">
+              <a:defRPr sz="1100" b="0">
+                <a:solidFill>
+                  <a:srgbClr val="B0B8C8"/>
+                </a:solidFill>
+              </a:defRPr>
+            </a:pPr>
+            <a:r>
+              <a:t>因为:流式产生 否则:等待空转</a:t>
+            </a:r>
+          </a:p>
+        </p:txBody>
+      </p:sp>
+      <p:sp>
+        <p:nvSpPr>
+          <p:cNvPr id="34" name="Rectangle 33"/>
+          <p:cNvSpPr/>
+          <p:nvPr/>
+        </p:nvSpPr>
+        <p:spPr>
+          <a:xfrm>
+            <a:off x="2560320" y="4069080"/>
+            <a:ext cx="4754880" cy="502920"/>
+          </a:xfrm>
+          <a:prstGeom prst="rect">
+            <a:avLst/>
+          </a:prstGeom>
+          <a:solidFill>
+            <a:srgbClr val="1B2A4A"/>
+          </a:solidFill>
+          <a:ln>
+            <a:noFill/>
+          </a:ln>
+        </p:spPr>
+        <p:style>
+          <a:lnRef idx="1">
+            <a:schemeClr val="accent1"/>
+          </a:lnRef>
+          <a:fillRef idx="3">
+            <a:schemeClr val="accent1"/>
+          </a:fillRef>
+          <a:effectRef idx="2">
+            <a:schemeClr val="accent1"/>
+          </a:effectRef>
+          <a:fontRef idx="minor">
+            <a:schemeClr val="lt1"/>
+          </a:fontRef>
+        </p:style>
+        <p:txBody>
+          <a:bodyPr rtlCol="0" anchor="ctr"/>
+          <a:lstStyle/>
+          <a:p>
+            <a:pPr algn="ctr"/>
+          </a:p>
+        </p:txBody>
+      </p:sp>
+      <p:sp>
+        <p:nvSpPr>
+          <p:cNvPr id="35" name="TextBox 34"/>
+          <p:cNvSpPr txBox="1"/>
+          <p:nvPr/>
+        </p:nvSpPr>
+        <p:spPr>
+          <a:xfrm>
+            <a:off x="2697479" y="4160520"/>
+            <a:ext cx="4480560" cy="365760"/>
+          </a:xfrm>
+          <a:prstGeom prst="rect">
+            <a:avLst/>
+          </a:prstGeom>
+          <a:noFill/>
+        </p:spPr>
+        <p:txBody>
+          <a:bodyPr wrap="square">
+            <a:spAutoFit/>
+          </a:bodyPr>
+          <a:lstStyle/>
+          <a:p>
+            <a:pPr algn="l">
+              <a:defRPr sz="1300" b="1">
+                <a:solidFill>
+                  <a:srgbClr val="FF8C00"/>
+                </a:solidFill>
+              </a:defRPr>
+            </a:pPr>
+            <a:r>
+              <a:t>f off-policy容忍 [算法]</a:t>
+            </a:r>
+          </a:p>
+        </p:txBody>
+      </p:sp>
+      <p:sp>
+        <p:nvSpPr>
+          <p:cNvPr id="36" name="TextBox 35"/>
+          <p:cNvSpPr txBox="1"/>
+          <p:nvPr/>
+        </p:nvSpPr>
+        <p:spPr>
+          <a:xfrm>
+            <a:off x="2697479" y="4526280"/>
+            <a:ext cx="4480560" cy="-45719"/>
+          </a:xfrm>
+          <a:prstGeom prst="rect">
+            <a:avLst/>
+          </a:prstGeom>
+          <a:noFill/>
+        </p:spPr>
+        <p:txBody>
+          <a:bodyPr wrap="square">
+            <a:spAutoFit/>
+          </a:bodyPr>
+          <a:lstStyle/>
+          <a:p>
+            <a:pPr algn="l">
+              <a:defRPr sz="1100" b="0">
+                <a:solidFill>
+                  <a:srgbClr val="B0B8C8"/>
+                </a:solidFill>
+              </a:defRPr>
+            </a:pPr>
+            <a:r>
+              <a:t>因为:数据过时 否则:训练发散</a:t>
+            </a:r>
+          </a:p>
+        </p:txBody>
+      </p:sp>
+      <p:sp>
+        <p:nvSpPr>
+          <p:cNvPr id="37" name="Rectangle 36"/>
+          <p:cNvSpPr/>
+          <p:nvPr/>
+        </p:nvSpPr>
+        <p:spPr>
+          <a:xfrm>
+            <a:off x="2560320" y="4663440"/>
+            <a:ext cx="4754880" cy="502920"/>
+          </a:xfrm>
+          <a:prstGeom prst="rect">
+            <a:avLst/>
+          </a:prstGeom>
+          <a:solidFill>
+            <a:srgbClr val="1B2A4A"/>
+          </a:solidFill>
+          <a:ln>
+            <a:noFill/>
+          </a:ln>
+        </p:spPr>
+        <p:style>
+          <a:lnRef idx="1">
+            <a:schemeClr val="accent1"/>
+          </a:lnRef>
+          <a:fillRef idx="3">
+            <a:schemeClr val="accent1"/>
+          </a:fillRef>
+          <a:effectRef idx="2">
+            <a:schemeClr val="accent1"/>
+          </a:effectRef>
+          <a:fontRef idx="minor">
+            <a:schemeClr val="lt1"/>
+          </a:fontRef>
+        </p:style>
+        <p:txBody>
+          <a:bodyPr rtlCol="0" anchor="ctr"/>
+          <a:lstStyle/>
+          <a:p>
+            <a:pPr algn="ctr"/>
+          </a:p>
+        </p:txBody>
+      </p:sp>
+      <p:sp>
+        <p:nvSpPr>
+          <p:cNvPr id="38" name="TextBox 37"/>
+          <p:cNvSpPr txBox="1"/>
+          <p:nvPr/>
+        </p:nvSpPr>
+        <p:spPr>
+          <a:xfrm>
+            <a:off x="2697479" y="4754879"/>
+            <a:ext cx="4480560" cy="365760"/>
+          </a:xfrm>
+          <a:prstGeom prst="rect">
+            <a:avLst/>
+          </a:prstGeom>
+          <a:noFill/>
+        </p:spPr>
+        <p:txBody>
+          <a:bodyPr wrap="square">
+            <a:spAutoFit/>
+          </a:bodyPr>
+          <a:lstStyle/>
+          <a:p>
+            <a:pPr algn="l">
+              <a:defRPr sz="1300" b="1">
+                <a:solidFill>
+                  <a:srgbClr val="FF8C00"/>
+                </a:solidFill>
+              </a:defRPr>
+            </a:pPr>
+            <a:r>
+              <a:t>g 步级归因 [算法]</a:t>
+            </a:r>
+          </a:p>
+        </p:txBody>
+      </p:sp>
+      <p:sp>
+        <p:nvSpPr>
+          <p:cNvPr id="39" name="TextBox 38"/>
+          <p:cNvSpPr txBox="1"/>
+          <p:nvPr/>
+        </p:nvSpPr>
+        <p:spPr>
+          <a:xfrm>
+            <a:off x="2697479" y="5120640"/>
+            <a:ext cx="4480560" cy="-45719"/>
+          </a:xfrm>
+          <a:prstGeom prst="rect">
+            <a:avLst/>
+          </a:prstGeom>
+          <a:noFill/>
+        </p:spPr>
+        <p:txBody>
+          <a:bodyPr wrap="square">
+            <a:spAutoFit/>
+          </a:bodyPr>
+          <a:lstStyle/>
+          <a:p>
+            <a:pPr algn="l">
+              <a:defRPr sz="1100" b="0">
+                <a:solidFill>
+                  <a:srgbClr val="B0B8C8"/>
+                </a:solidFill>
+              </a:defRPr>
+            </a:pPr>
+            <a:r>
+              <a:t>因为:奖励太粗 否则:84%浪费</a:t>
+            </a:r>
+          </a:p>
+        </p:txBody>
+      </p:sp>
+      <p:sp>
+        <p:nvSpPr>
+          <p:cNvPr id="40" name="Rectangle 39"/>
+          <p:cNvSpPr/>
+          <p:nvPr/>
+        </p:nvSpPr>
+        <p:spPr>
+          <a:xfrm>
+            <a:off x="7680960" y="1097280"/>
+            <a:ext cx="4114800" cy="502920"/>
+          </a:xfrm>
+          <a:prstGeom prst="rect">
+            <a:avLst/>
+          </a:prstGeom>
+          <a:solidFill>
+            <a:srgbClr val="1B2A4A"/>
+          </a:solidFill>
+          <a:ln>
+            <a:noFill/>
+          </a:ln>
+        </p:spPr>
+        <p:style>
+          <a:lnRef idx="1">
+            <a:schemeClr val="accent1"/>
+          </a:lnRef>
+          <a:fillRef idx="3">
+            <a:schemeClr val="accent1"/>
+          </a:fillRef>
+          <a:effectRef idx="2">
+            <a:schemeClr val="accent1"/>
+          </a:effectRef>
+          <a:fontRef idx="minor">
+            <a:schemeClr val="lt1"/>
+          </a:fontRef>
+        </p:style>
+        <p:txBody>
+          <a:bodyPr rtlCol="0" anchor="ctr"/>
+          <a:lstStyle/>
+          <a:p>
+            <a:pPr algn="ctr"/>
+          </a:p>
+        </p:txBody>
+      </p:sp>
+      <p:sp>
+        <p:nvSpPr>
+          <p:cNvPr id="41" name="TextBox 40"/>
+          <p:cNvSpPr txBox="1"/>
+          <p:nvPr/>
+        </p:nvSpPr>
+        <p:spPr>
+          <a:xfrm>
+            <a:off x="7818120" y="1188720"/>
+            <a:ext cx="3840480" cy="365760"/>
+          </a:xfrm>
+          <a:prstGeom prst="rect">
+            <a:avLst/>
+          </a:prstGeom>
+          <a:noFill/>
+        </p:spPr>
+        <p:txBody>
+          <a:bodyPr wrap="square">
+            <a:spAutoFit/>
+          </a:bodyPr>
+          <a:lstStyle/>
+          <a:p>
+            <a:pPr algn="l">
+              <a:defRPr sz="1300" b="1">
+                <a:solidFill>
+                  <a:srgbClr val="0096D6"/>
+                </a:solidFill>
+              </a:defRPr>
+            </a:pPr>
+            <a:r>
+              <a:t>LMCache / Mooncake</a:t>
+            </a:r>
+          </a:p>
+        </p:txBody>
+      </p:sp>
+      <p:sp>
+        <p:nvSpPr>
+          <p:cNvPr id="42" name="TextBox 41"/>
+          <p:cNvSpPr txBox="1"/>
+          <p:nvPr/>
+        </p:nvSpPr>
+        <p:spPr>
+          <a:xfrm>
+            <a:off x="7818120" y="1554480"/>
+            <a:ext cx="3840480" cy="-45719"/>
+          </a:xfrm>
+          <a:prstGeom prst="rect">
+            <a:avLst/>
+          </a:prstGeom>
+          <a:noFill/>
+        </p:spPr>
+        <p:txBody>
+          <a:bodyPr wrap="square">
+            <a:spAutoFit/>
+          </a:bodyPr>
+          <a:lstStyle/>
+          <a:p>
+            <a:pPr algn="l">
+              <a:defRPr sz="1100" b="0">
+                <a:solidFill>
+                  <a:srgbClr val="B0B8C8"/>
+                </a:solidFill>
+              </a:defRPr>
+            </a:pPr>
+          </a:p>
+        </p:txBody>
+      </p:sp>
+      <p:sp>
+        <p:nvSpPr>
+          <p:cNvPr id="43" name="Rectangle 42"/>
+          <p:cNvSpPr/>
+          <p:nvPr/>
+        </p:nvSpPr>
+        <p:spPr>
+          <a:xfrm>
+            <a:off x="7680960" y="1691640"/>
+            <a:ext cx="4114800" cy="502920"/>
+          </a:xfrm>
+          <a:prstGeom prst="rect">
+            <a:avLst/>
+          </a:prstGeom>
+          <a:solidFill>
+            <a:srgbClr val="1B2A4A"/>
+          </a:solidFill>
+          <a:ln>
+            <a:noFill/>
+          </a:ln>
+        </p:spPr>
+        <p:style>
+          <a:lnRef idx="1">
+            <a:schemeClr val="accent1"/>
+          </a:lnRef>
+          <a:fillRef idx="3">
+            <a:schemeClr val="accent1"/>
+          </a:fillRef>
+          <a:effectRef idx="2">
+            <a:schemeClr val="accent1"/>
+          </a:effectRef>
+          <a:fontRef idx="minor">
+            <a:schemeClr val="lt1"/>
+          </a:fontRef>
+        </p:style>
+        <p:txBody>
+          <a:bodyPr rtlCol="0" anchor="ctr"/>
+          <a:lstStyle/>
+          <a:p>
+            <a:pPr algn="ctr"/>
+          </a:p>
+        </p:txBody>
+      </p:sp>
+      <p:sp>
+        <p:nvSpPr>
+          <p:cNvPr id="44" name="TextBox 43"/>
+          <p:cNvSpPr txBox="1"/>
+          <p:nvPr/>
+        </p:nvSpPr>
+        <p:spPr>
+          <a:xfrm>
+            <a:off x="7818120" y="1783080"/>
+            <a:ext cx="3840480" cy="365760"/>
+          </a:xfrm>
+          <a:prstGeom prst="rect">
+            <a:avLst/>
+          </a:prstGeom>
+          <a:noFill/>
+        </p:spPr>
+        <p:txBody>
+          <a:bodyPr wrap="square">
+            <a:spAutoFit/>
+          </a:bodyPr>
+          <a:lstStyle/>
+          <a:p>
+            <a:pPr algn="l">
+              <a:defRPr sz="1300" b="1">
+                <a:solidFill>
+                  <a:srgbClr val="0096D6"/>
+                </a:solidFill>
+              </a:defRPr>
+            </a:pPr>
+            <a:r>
+              <a:t>Eagle3 / 4bit量化</a:t>
+            </a:r>
+          </a:p>
+        </p:txBody>
+      </p:sp>
+      <p:sp>
+        <p:nvSpPr>
+          <p:cNvPr id="45" name="TextBox 44"/>
+          <p:cNvSpPr txBox="1"/>
+          <p:nvPr/>
+        </p:nvSpPr>
+        <p:spPr>
+          <a:xfrm>
+            <a:off x="7818120" y="2148840"/>
+            <a:ext cx="3840480" cy="-45719"/>
+          </a:xfrm>
+          <a:prstGeom prst="rect">
+            <a:avLst/>
+          </a:prstGeom>
+          <a:noFill/>
+        </p:spPr>
+        <p:txBody>
+          <a:bodyPr wrap="square">
+            <a:spAutoFit/>
+          </a:bodyPr>
+          <a:lstStyle/>
+          <a:p>
+            <a:pPr algn="l">
+              <a:defRPr sz="1100" b="0">
+                <a:solidFill>
+                  <a:srgbClr val="B0B8C8"/>
+                </a:solidFill>
+              </a:defRPr>
+            </a:pPr>
+          </a:p>
+        </p:txBody>
+      </p:sp>
+      <p:sp>
+        <p:nvSpPr>
+          <p:cNvPr id="46" name="Rectangle 45"/>
+          <p:cNvSpPr/>
+          <p:nvPr/>
+        </p:nvSpPr>
+        <p:spPr>
+          <a:xfrm>
+            <a:off x="7680960" y="2286000"/>
+            <a:ext cx="4114800" cy="502920"/>
+          </a:xfrm>
+          <a:prstGeom prst="rect">
+            <a:avLst/>
+          </a:prstGeom>
+          <a:solidFill>
+            <a:srgbClr val="1B2A4A"/>
+          </a:solidFill>
+          <a:ln>
+            <a:noFill/>
+          </a:ln>
+        </p:spPr>
+        <p:style>
+          <a:lnRef idx="1">
+            <a:schemeClr val="accent1"/>
+          </a:lnRef>
+          <a:fillRef idx="3">
+            <a:schemeClr val="accent1"/>
+          </a:fillRef>
+          <a:effectRef idx="2">
+            <a:schemeClr val="accent1"/>
+          </a:effectRef>
+          <a:fontRef idx="minor">
+            <a:schemeClr val="lt1"/>
+          </a:fontRef>
+        </p:style>
+        <p:txBody>
+          <a:bodyPr rtlCol="0" anchor="ctr"/>
+          <a:lstStyle/>
+          <a:p>
+            <a:pPr algn="ctr"/>
+          </a:p>
+        </p:txBody>
+      </p:sp>
+      <p:sp>
+        <p:nvSpPr>
+          <p:cNvPr id="47" name="TextBox 46"/>
+          <p:cNvSpPr txBox="1"/>
+          <p:nvPr/>
+        </p:nvSpPr>
+        <p:spPr>
+          <a:xfrm>
+            <a:off x="7818120" y="2377440"/>
+            <a:ext cx="3840480" cy="365760"/>
+          </a:xfrm>
+          <a:prstGeom prst="rect">
+            <a:avLst/>
+          </a:prstGeom>
+          <a:noFill/>
+        </p:spPr>
+        <p:txBody>
+          <a:bodyPr wrap="square">
+            <a:spAutoFit/>
+          </a:bodyPr>
+          <a:lstStyle/>
+          <a:p>
+            <a:pPr algn="l">
+              <a:defRPr sz="1300" b="1">
+                <a:solidFill>
+                  <a:srgbClr val="0096D6"/>
+                </a:solidFill>
+              </a:defRPr>
+            </a:pPr>
+            <a:r>
+              <a:t>Forge</a:t>
+            </a:r>
+          </a:p>
+        </p:txBody>
+      </p:sp>
+      <p:sp>
+        <p:nvSpPr>
+          <p:cNvPr id="48" name="TextBox 47"/>
+          <p:cNvSpPr txBox="1"/>
+          <p:nvPr/>
+        </p:nvSpPr>
+        <p:spPr>
+          <a:xfrm>
+            <a:off x="7818120" y="2743200"/>
+            <a:ext cx="3840480" cy="-45719"/>
+          </a:xfrm>
+          <a:prstGeom prst="rect">
+            <a:avLst/>
+          </a:prstGeom>
+          <a:noFill/>
+        </p:spPr>
+        <p:txBody>
+          <a:bodyPr wrap="square">
+            <a:spAutoFit/>
+          </a:bodyPr>
+          <a:lstStyle/>
+          <a:p>
+            <a:pPr algn="l">
+              <a:defRPr sz="1100" b="0">
+                <a:solidFill>
+                  <a:srgbClr val="B0B8C8"/>
+                </a:solidFill>
+              </a:defRPr>
+            </a:pPr>
+          </a:p>
+        </p:txBody>
+      </p:sp>
+      <p:sp>
+        <p:nvSpPr>
+          <p:cNvPr id="49" name="Rectangle 48"/>
+          <p:cNvSpPr/>
+          <p:nvPr/>
+        </p:nvSpPr>
+        <p:spPr>
+          <a:xfrm>
+            <a:off x="7680960" y="2880360"/>
+            <a:ext cx="4114800" cy="502920"/>
+          </a:xfrm>
+          <a:prstGeom prst="rect">
+            <a:avLst/>
+          </a:prstGeom>
+          <a:solidFill>
+            <a:srgbClr val="1B2A4A"/>
+          </a:solidFill>
+          <a:ln>
+            <a:noFill/>
+          </a:ln>
+        </p:spPr>
+        <p:style>
+          <a:lnRef idx="1">
+            <a:schemeClr val="accent1"/>
+          </a:lnRef>
+          <a:fillRef idx="3">
+            <a:schemeClr val="accent1"/>
+          </a:fillRef>
+          <a:effectRef idx="2">
+            <a:schemeClr val="accent1"/>
+          </a:effectRef>
+          <a:fontRef idx="minor">
+            <a:schemeClr val="lt1"/>
+          </a:fontRef>
+        </p:style>
+        <p:txBody>
+          <a:bodyPr rtlCol="0" anchor="ctr"/>
+          <a:lstStyle/>
+          <a:p>
+            <a:pPr algn="ctr"/>
+          </a:p>
+        </p:txBody>
+      </p:sp>
+      <p:sp>
+        <p:nvSpPr>
+          <p:cNvPr id="50" name="TextBox 49"/>
+          <p:cNvSpPr txBox="1"/>
+          <p:nvPr/>
+        </p:nvSpPr>
+        <p:spPr>
+          <a:xfrm>
+            <a:off x="7818120" y="2971800"/>
+            <a:ext cx="3840480" cy="365760"/>
+          </a:xfrm>
+          <a:prstGeom prst="rect">
+            <a:avLst/>
+          </a:prstGeom>
+          <a:noFill/>
+        </p:spPr>
+        <p:txBody>
+          <a:bodyPr wrap="square">
+            <a:spAutoFit/>
+          </a:bodyPr>
+          <a:lstStyle/>
+          <a:p>
+            <a:pPr algn="l">
+              <a:defRPr sz="1300" b="1">
+                <a:solidFill>
+                  <a:srgbClr val="00C853"/>
+                </a:solidFill>
+              </a:defRPr>
+            </a:pPr>
+            <a:r>
+              <a:t>ProRL Agent (NVIDIA)</a:t>
+            </a:r>
+          </a:p>
+        </p:txBody>
+      </p:sp>
+      <p:sp>
+        <p:nvSpPr>
+          <p:cNvPr id="51" name="TextBox 50"/>
+          <p:cNvSpPr txBox="1"/>
+          <p:nvPr/>
+        </p:nvSpPr>
+        <p:spPr>
+          <a:xfrm>
+            <a:off x="7818120" y="3337560"/>
+            <a:ext cx="3840480" cy="-45719"/>
+          </a:xfrm>
+          <a:prstGeom prst="rect">
+            <a:avLst/>
+          </a:prstGeom>
+          <a:noFill/>
+        </p:spPr>
+        <p:txBody>
+          <a:bodyPr wrap="square">
+            <a:spAutoFit/>
+          </a:bodyPr>
+          <a:lstStyle/>
+          <a:p>
+            <a:pPr algn="l">
+              <a:defRPr sz="1100" b="0">
+                <a:solidFill>
+                  <a:srgbClr val="B0B8C8"/>
+                </a:solidFill>
+              </a:defRPr>
+            </a:pPr>
+          </a:p>
+        </p:txBody>
+      </p:sp>
+      <p:sp>
+        <p:nvSpPr>
+          <p:cNvPr id="52" name="Rectangle 51"/>
+          <p:cNvSpPr/>
+          <p:nvPr/>
+        </p:nvSpPr>
+        <p:spPr>
+          <a:xfrm>
+            <a:off x="7680960" y="3474720"/>
+            <a:ext cx="4114800" cy="502920"/>
+          </a:xfrm>
+          <a:prstGeom prst="rect">
+            <a:avLst/>
+          </a:prstGeom>
+          <a:solidFill>
+            <a:srgbClr val="1B2A4A"/>
+          </a:solidFill>
+          <a:ln>
+            <a:noFill/>
+          </a:ln>
+        </p:spPr>
+        <p:style>
+          <a:lnRef idx="1">
+            <a:schemeClr val="accent1"/>
+          </a:lnRef>
+          <a:fillRef idx="3">
+            <a:schemeClr val="accent1"/>
+          </a:fillRef>
+          <a:effectRef idx="2">
+            <a:schemeClr val="accent1"/>
+          </a:effectRef>
+          <a:fontRef idx="minor">
+            <a:schemeClr val="lt1"/>
+          </a:fontRef>
+        </p:style>
+        <p:txBody>
+          <a:bodyPr rtlCol="0" anchor="ctr"/>
+          <a:lstStyle/>
+          <a:p>
+            <a:pPr algn="ctr"/>
+          </a:p>
+        </p:txBody>
+      </p:sp>
+      <p:sp>
+        <p:nvSpPr>
+          <p:cNvPr id="53" name="TextBox 52"/>
+          <p:cNvSpPr txBox="1"/>
+          <p:nvPr/>
+        </p:nvSpPr>
+        <p:spPr>
+          <a:xfrm>
+            <a:off x="7818120" y="3566160"/>
+            <a:ext cx="3840480" cy="365760"/>
+          </a:xfrm>
+          <a:prstGeom prst="rect">
+            <a:avLst/>
+          </a:prstGeom>
+          <a:noFill/>
+        </p:spPr>
+        <p:txBody>
+          <a:bodyPr wrap="square">
+            <a:spAutoFit/>
+          </a:bodyPr>
+          <a:lstStyle/>
+          <a:p>
+            <a:pPr algn="l">
+              <a:defRPr sz="1300" b="1">
+                <a:solidFill>
+                  <a:srgbClr val="00C853"/>
+                </a:solidFill>
+              </a:defRPr>
+            </a:pPr>
+            <a:r>
+              <a:t>Dynamo (NVIDIA)</a:t>
+            </a:r>
+          </a:p>
+        </p:txBody>
+      </p:sp>
+      <p:sp>
+        <p:nvSpPr>
+          <p:cNvPr id="54" name="TextBox 53"/>
+          <p:cNvSpPr txBox="1"/>
+          <p:nvPr/>
+        </p:nvSpPr>
+        <p:spPr>
+          <a:xfrm>
+            <a:off x="7818120" y="3931920"/>
+            <a:ext cx="3840480" cy="-45719"/>
+          </a:xfrm>
+          <a:prstGeom prst="rect">
+            <a:avLst/>
+          </a:prstGeom>
+          <a:noFill/>
+        </p:spPr>
+        <p:txBody>
+          <a:bodyPr wrap="square">
+            <a:spAutoFit/>
+          </a:bodyPr>
+          <a:lstStyle/>
+          <a:p>
+            <a:pPr algn="l">
+              <a:defRPr sz="1100" b="0">
+                <a:solidFill>
+                  <a:srgbClr val="B0B8C8"/>
+                </a:solidFill>
+              </a:defRPr>
+            </a:pPr>
+          </a:p>
+        </p:txBody>
+      </p:sp>
+      <p:sp>
+        <p:nvSpPr>
+          <p:cNvPr id="55" name="Rectangle 54"/>
+          <p:cNvSpPr/>
+          <p:nvPr/>
+        </p:nvSpPr>
+        <p:spPr>
+          <a:xfrm>
+            <a:off x="7680960" y="4069080"/>
+            <a:ext cx="4114800" cy="502920"/>
+          </a:xfrm>
+          <a:prstGeom prst="rect">
+            <a:avLst/>
+          </a:prstGeom>
+          <a:solidFill>
+            <a:srgbClr val="1B2A4A"/>
+          </a:solidFill>
+          <a:ln>
+            <a:noFill/>
+          </a:ln>
+        </p:spPr>
+        <p:style>
+          <a:lnRef idx="1">
+            <a:schemeClr val="accent1"/>
+          </a:lnRef>
+          <a:fillRef idx="3">
+            <a:schemeClr val="accent1"/>
+          </a:fillRef>
+          <a:effectRef idx="2">
+            <a:schemeClr val="accent1"/>
+          </a:effectRef>
+          <a:fontRef idx="minor">
+            <a:schemeClr val="lt1"/>
+          </a:fontRef>
+        </p:style>
+        <p:txBody>
+          <a:bodyPr rtlCol="0" anchor="ctr"/>
+          <a:lstStyle/>
+          <a:p>
+            <a:pPr algn="ctr"/>
+          </a:p>
+        </p:txBody>
+      </p:sp>
+      <p:sp>
+        <p:nvSpPr>
+          <p:cNvPr id="56" name="TextBox 55"/>
+          <p:cNvSpPr txBox="1"/>
+          <p:nvPr/>
+        </p:nvSpPr>
+        <p:spPr>
+          <a:xfrm>
+            <a:off x="7818120" y="4160520"/>
+            <a:ext cx="3840480" cy="365760"/>
+          </a:xfrm>
+          <a:prstGeom prst="rect">
+            <a:avLst/>
+          </a:prstGeom>
+          <a:noFill/>
+        </p:spPr>
+        <p:txBody>
+          <a:bodyPr wrap="square">
+            <a:spAutoFit/>
+          </a:bodyPr>
+          <a:lstStyle/>
+          <a:p>
+            <a:pPr algn="l">
+              <a:defRPr sz="1300" b="1">
+                <a:solidFill>
+                  <a:srgbClr val="FF8C00"/>
+                </a:solidFill>
+              </a:defRPr>
+            </a:pPr>
+            <a:r>
+              <a:t>Decoupled PPO / DAPO+CISPO</a:t>
+            </a:r>
+          </a:p>
+        </p:txBody>
+      </p:sp>
+      <p:sp>
+        <p:nvSpPr>
+          <p:cNvPr id="57" name="TextBox 56"/>
+          <p:cNvSpPr txBox="1"/>
+          <p:nvPr/>
+        </p:nvSpPr>
+        <p:spPr>
+          <a:xfrm>
+            <a:off x="7818120" y="4526280"/>
+            <a:ext cx="3840480" cy="-45719"/>
+          </a:xfrm>
+          <a:prstGeom prst="rect">
+            <a:avLst/>
+          </a:prstGeom>
+          <a:noFill/>
+        </p:spPr>
+        <p:txBody>
+          <a:bodyPr wrap="square">
+            <a:spAutoFit/>
+          </a:bodyPr>
+          <a:lstStyle/>
+          <a:p>
+            <a:pPr algn="l">
+              <a:defRPr sz="1100" b="0">
+                <a:solidFill>
+                  <a:srgbClr val="B0B8C8"/>
+                </a:solidFill>
+              </a:defRPr>
+            </a:pPr>
+          </a:p>
+        </p:txBody>
+      </p:sp>
+      <p:sp>
+        <p:nvSpPr>
+          <p:cNvPr id="58" name="Rectangle 57"/>
+          <p:cNvSpPr/>
+          <p:nvPr/>
+        </p:nvSpPr>
+        <p:spPr>
+          <a:xfrm>
+            <a:off x="7680960" y="4663440"/>
+            <a:ext cx="4114800" cy="502920"/>
+          </a:xfrm>
+          <a:prstGeom prst="rect">
+            <a:avLst/>
+          </a:prstGeom>
+          <a:solidFill>
+            <a:srgbClr val="1B2A4A"/>
+          </a:solidFill>
+          <a:ln>
+            <a:noFill/>
+          </a:ln>
+        </p:spPr>
+        <p:style>
+          <a:lnRef idx="1">
+            <a:schemeClr val="accent1"/>
+          </a:lnRef>
+          <a:fillRef idx="3">
+            <a:schemeClr val="accent1"/>
+          </a:fillRef>
+          <a:effectRef idx="2">
+            <a:schemeClr val="accent1"/>
+          </a:effectRef>
+          <a:fontRef idx="minor">
+            <a:schemeClr val="lt1"/>
+          </a:fontRef>
+        </p:style>
+        <p:txBody>
+          <a:bodyPr rtlCol="0" anchor="ctr"/>
+          <a:lstStyle/>
+          <a:p>
+            <a:pPr algn="ctr"/>
+          </a:p>
+        </p:txBody>
+      </p:sp>
+      <p:sp>
+        <p:nvSpPr>
+          <p:cNvPr id="59" name="TextBox 58"/>
+          <p:cNvSpPr txBox="1"/>
+          <p:nvPr/>
+        </p:nvSpPr>
+        <p:spPr>
+          <a:xfrm>
+            <a:off x="7818120" y="4754879"/>
+            <a:ext cx="3840480" cy="365760"/>
+          </a:xfrm>
+          <a:prstGeom prst="rect">
+            <a:avLst/>
+          </a:prstGeom>
+          <a:noFill/>
+        </p:spPr>
+        <p:txBody>
+          <a:bodyPr wrap="square">
+            <a:spAutoFit/>
+          </a:bodyPr>
+          <a:lstStyle/>
+          <a:p>
+            <a:pPr algn="l">
+              <a:defRPr sz="1300" b="1">
+                <a:solidFill>
+                  <a:srgbClr val="FF8C00"/>
+                </a:solidFill>
+              </a:defRPr>
+            </a:pPr>
+            <a:r>
+              <a:t>Cursor实时RL / Meta SSR</a:t>
+            </a:r>
+          </a:p>
+        </p:txBody>
+      </p:sp>
+      <p:sp>
+        <p:nvSpPr>
+          <p:cNvPr id="60" name="TextBox 59"/>
+          <p:cNvSpPr txBox="1"/>
+          <p:nvPr/>
+        </p:nvSpPr>
+        <p:spPr>
+          <a:xfrm>
+            <a:off x="7818120" y="5120640"/>
+            <a:ext cx="3840480" cy="-45719"/>
+          </a:xfrm>
+          <a:prstGeom prst="rect">
+            <a:avLst/>
+          </a:prstGeom>
+          <a:noFill/>
+        </p:spPr>
+        <p:txBody>
+          <a:bodyPr wrap="square">
+            <a:spAutoFit/>
+          </a:bodyPr>
+          <a:lstStyle/>
+          <a:p>
+            <a:pPr algn="l">
+              <a:defRPr sz="1100" b="0">
+                <a:solidFill>
+                  <a:srgbClr val="B0B8C8"/>
+                </a:solidFill>
+              </a:defRPr>
+            </a:pPr>
+          </a:p>
+        </p:txBody>
+      </p:sp>
+      <p:sp>
+        <p:nvSpPr>
+          <p:cNvPr id="61" name="TextBox 60"/>
+          <p:cNvSpPr txBox="1"/>
+          <p:nvPr/>
+        </p:nvSpPr>
+        <p:spPr>
+          <a:xfrm>
+            <a:off x="182880" y="5303520"/>
+            <a:ext cx="11430000" cy="274320"/>
+          </a:xfrm>
+          <a:prstGeom prst="rect">
+            <a:avLst/>
+          </a:prstGeom>
+          <a:noFill/>
+        </p:spPr>
+        <p:txBody>
+          <a:bodyPr wrap="square">
+            <a:spAutoFit/>
+          </a:bodyPr>
+          <a:lstStyle/>
+          <a:p>
+            <a:pPr algn="l">
+              <a:defRPr sz="1000" b="0">
+                <a:solidFill>
+                  <a:srgbClr val="B0B8C8"/>
+                </a:solidFill>
+              </a:defRPr>
+            </a:pPr>
+            <a:r>
+              <a:t>横切: 数值精度保证 -&gt; 训推一致性 / 确定性计算 / 精度基线 / 算子自动生成</a:t>
+            </a:r>
+          </a:p>
+        </p:txBody>
+      </p:sp>
+      <p:sp>
+        <p:nvSpPr>
+          <p:cNvPr id="62" name="TextBox 61"/>
+          <p:cNvSpPr txBox="1"/>
+          <p:nvPr/>
+        </p:nvSpPr>
+        <p:spPr>
+          <a:xfrm>
+            <a:off x="182880" y="5669280"/>
+            <a:ext cx="3840480" cy="274320"/>
+          </a:xfrm>
+          <a:prstGeom prst="rect">
+            <a:avLst/>
+          </a:prstGeom>
+          <a:noFill/>
+        </p:spPr>
+        <p:txBody>
+          <a:bodyPr wrap="square">
+            <a:spAutoFit/>
+          </a:bodyPr>
+          <a:lstStyle/>
+          <a:p>
+            <a:pPr algn="l">
+              <a:defRPr sz="1000" b="0">
+                <a:solidFill>
+                  <a:srgbClr val="0096D6"/>
+                </a:solidFill>
+              </a:defRPr>
+            </a:pPr>
+            <a:r>
+              <a:t>基础设施层 a+b+c (1,2驱动)</a:t>
+            </a:r>
+          </a:p>
+        </p:txBody>
+      </p:sp>
+      <p:sp>
+        <p:nvSpPr>
+          <p:cNvPr id="63" name="TextBox 62"/>
+          <p:cNvSpPr txBox="1"/>
+          <p:nvPr/>
+        </p:nvSpPr>
+        <p:spPr>
+          <a:xfrm>
+            <a:off x="4206240" y="5669280"/>
+            <a:ext cx="3840480" cy="274320"/>
+          </a:xfrm>
+          <a:prstGeom prst="rect">
+            <a:avLst/>
+          </a:prstGeom>
+          <a:noFill/>
+        </p:spPr>
+        <p:txBody>
+          <a:bodyPr wrap="square">
+            <a:spAutoFit/>
+          </a:bodyPr>
+          <a:lstStyle/>
+          <a:p>
+            <a:pPr algn="l">
+              <a:defRPr sz="1000" b="0">
+                <a:solidFill>
+                  <a:srgbClr val="00C853"/>
+                </a:solidFill>
+              </a:defRPr>
+            </a:pPr>
+            <a:r>
+              <a:t>框架层 d+e (2,3驱动)</a:t>
+            </a:r>
+          </a:p>
+        </p:txBody>
+      </p:sp>
+      <p:sp>
+        <p:nvSpPr>
+          <p:cNvPr id="64" name="TextBox 63"/>
+          <p:cNvSpPr txBox="1"/>
+          <p:nvPr/>
+        </p:nvSpPr>
+        <p:spPr>
+          <a:xfrm>
+            <a:off x="8229600" y="5669280"/>
+            <a:ext cx="3840480" cy="274320"/>
+          </a:xfrm>
+          <a:prstGeom prst="rect">
+            <a:avLst/>
+          </a:prstGeom>
+          <a:noFill/>
+        </p:spPr>
+        <p:txBody>
+          <a:bodyPr wrap="square">
+            <a:spAutoFit/>
+          </a:bodyPr>
+          <a:lstStyle/>
+          <a:p>
+            <a:pPr algn="l">
+              <a:defRPr sz="1000" b="0">
+                <a:solidFill>
+                  <a:srgbClr val="FF8C00"/>
+                </a:solidFill>
+              </a:defRPr>
+            </a:pPr>
+            <a:r>
+              <a:t>算法层 f+g (4,5驱动)</a:t>
+            </a:r>
+          </a:p>
+        </p:txBody>
+      </p:sp>
+      <p:sp>
+        <p:nvSpPr>
+          <p:cNvPr id="65" name="Rectangle 64"/>
           <p:cNvSpPr/>
           <p:nvPr/>
         </p:nvSpPr>
@@ -9328,7 +11169,7 @@
       </p:sp>
       <p:sp>
         <p:nvSpPr>
-          <p:cNvPr id="18" name="TextBox 17"/>
+          <p:cNvPr id="66" name="TextBox 65"/>
           <p:cNvSpPr txBox="1"/>
           <p:nvPr/>
         </p:nvSpPr>
@@ -9356,7 +11197,7 @@
               </a:defRPr>
             </a:pPr>
             <a:r>
-              <a:t>Agent RL后训练不只是调算法，是全栈问题 — 空白处恰恰是我们的机会</a:t>
+              <a:t>五挑战驱动七升级，每层都有因果必然 -&gt; 先看基础设施层</a:t>
             </a:r>
           </a:p>
         </p:txBody>
@@ -9460,7 +11301,7 @@
               </a:defRPr>
             </a:pPr>
             <a:r>
-              <a:t>Reply环节：策略时效性与奖励归因（C1+C4）</a:t>
+              <a:t>基础设施层升级概览</a:t>
             </a:r>
           </a:p>
         </p:txBody>
@@ -9495,7 +11336,7 @@
               </a:defRPr>
             </a:pPr>
             <a:r>
-              <a:t>异步训练的核心张力：吞吐量与数据新鲜度不可兼得</a:t>
+              <a:t>挑战1+2驱动: KV池化+推理加速+sandbox并行</a:t>
             </a:r>
           </a:p>
         </p:txBody>
@@ -9573,7 +11414,7 @@
               </a:defRPr>
             </a:pPr>
             <a:r>
-              <a:t>Decoupled PPO</a:t>
+              <a:t>KV Cache分布式池化</a:t>
             </a:r>
           </a:p>
         </p:txBody>
@@ -9608,15 +11449,19 @@
               </a:defRPr>
             </a:pPr>
             <a:r>
-              <a:t>Off-Policy基础层</a:t>
+              <a:t>单Agent会话KV数GB</a:t>
             </a:r>
             <a:br/>
             <a:r>
-              <a:t>actor-learner分离</a:t>
+              <a:t>千并发撑爆显存</a:t>
             </a:r>
             <a:br/>
             <a:r>
-              <a:t>V-trace IS修正</a:t>
+              <a:t>必须跨节点池化</a:t>
+            </a:r>
+            <a:br/>
+            <a:r>
+              <a:t>-&gt; LMCache+Mooncake</a:t>
             </a:r>
           </a:p>
         </p:txBody>
@@ -9694,7 +11539,7 @@
               </a:defRPr>
             </a:pPr>
             <a:r>
-              <a:t>DAPO+CISPO</a:t>
+              <a:t>推理加速</a:t>
             </a:r>
           </a:p>
         </p:txBody>
@@ -9729,15 +11574,19 @@
               </a:defRPr>
             </a:pPr>
             <a:r>
-              <a:t>工业级RL算法层</a:t>
+              <a:t>90%算力在推理</a:t>
             </a:r>
             <a:br/>
             <a:r>
-              <a:t>ByteDance+MiniMax</a:t>
+              <a:t>70B模型不量化放不下</a:t>
             </a:r>
             <a:br/>
             <a:r>
-              <a:t>比标准PPO快2x</a:t>
+              <a:t>串行decode瓶颈</a:t>
+            </a:r>
+            <a:br/>
+            <a:r>
+              <a:t>-&gt; Eagle3+4bit量化</a:t>
             </a:r>
           </a:p>
         </p:txBody>
@@ -9815,7 +11664,7 @@
               </a:defRPr>
             </a:pPr>
             <a:r>
-              <a:t>Cursor+Meta SSR</a:t>
+              <a:t>sandbox并行化</a:t>
             </a:r>
           </a:p>
         </p:txBody>
@@ -9850,15 +11699,19 @@
               </a:defRPr>
             </a:pPr>
             <a:r>
-              <a:t>闭环训练实践层</a:t>
+              <a:t>EP分钟级串行等待</a:t>
             </a:r>
             <a:br/>
             <a:r>
-              <a:t>5小时端到端</a:t>
+              <a:t>环境不可控+偏差</a:t>
             </a:r>
             <a:br/>
             <a:r>
-              <a:t>零标注自博弈</a:t>
+              <a:t>-&gt; Forge框架级编排</a:t>
+            </a:r>
+            <a:br/>
+            <a:r>
+              <a:t>-&gt; 行业空白=我们的机会</a:t>
             </a:r>
           </a:p>
         </p:txBody>
@@ -9936,7 +11789,7 @@
               </a:defRPr>
             </a:pPr>
             <a:r>
-              <a:t>Reply环节小结：Decoupled PPO做基础 → DAPO+CISPO做改进 → Cursor+Meta做实践验证</a:t>
+              <a:t>基础设施层3个升级方向: KV池化+推理加速+sandbox并行 -&gt; 逐一展开</a:t>
             </a:r>
           </a:p>
         </p:txBody>
@@ -10040,7 +11893,7 @@
               </a:defRPr>
             </a:pPr>
             <a:r>
-              <a:t>Decoupled PPO：异步RL的基础架构</a:t>
+              <a:t>LMCache + Mooncake: KV Cache池化</a:t>
             </a:r>
           </a:p>
         </p:txBody>
@@ -10075,7 +11928,7 @@
               </a:defRPr>
             </a:pPr>
             <a:r>
-              <a:t>没有actor-learner分离，DAPO和CISPO都跑不起来</a:t>
+              <a:t>KV Cache不应是引擎私有资源，而应是集群级共享池</a:t>
             </a:r>
           </a:p>
         </p:txBody>
@@ -10188,15 +12041,15 @@
               </a:defRPr>
             </a:pPr>
             <a:r>
-              <a:t>异步架构下rollout数据天然off-policy</a:t>
+              <a:t>每个推理引擎独立KV</a:t>
             </a:r>
             <a:br/>
             <a:r>
-              <a:t>importance ratio失真</a:t>
+              <a:t>同一prefix多引擎重复计算</a:t>
             </a:r>
             <a:br/>
             <a:r>
-              <a:t>策略版本差&gt;4步训练发散</a:t>
+              <a:t>Agent场景95%+可复用</a:t>
             </a:r>
           </a:p>
         </p:txBody>
@@ -10274,7 +12127,7 @@
               </a:defRPr>
             </a:pPr>
             <a:r>
-              <a:t>方案</a:t>
+              <a:t>LMCache</a:t>
             </a:r>
           </a:p>
         </p:txBody>
@@ -10309,19 +12162,19 @@
               </a:defRPr>
             </a:pPr>
             <a:r>
-              <a:t>Actor-Learner物理分离</a:t>
+              <a:t>P2P跨引擎共享KV</a:t>
             </a:r>
             <a:br/>
             <a:r>
-              <a:t>V-trace截断重要性采样修正</a:t>
+              <a:t>Cache Offloading多级卸载</a:t>
             </a:r>
             <a:br/>
             <a:r>
-              <a:t>Importance weight裁剪</a:t>
+              <a:t>标准化存取API</a:t>
             </a:r>
             <a:br/>
             <a:r>
-              <a:t>所有异步RL的基础</a:t>
+              <a:t>实测:15x吞吐提升</a:t>
             </a:r>
           </a:p>
         </p:txBody>
@@ -10394,12 +12247,12 @@
             <a:pPr algn="l">
               <a:defRPr sz="1300" b="1">
                 <a:solidFill>
-                  <a:srgbClr val="0096D6"/>
-                </a:solidFill>
-              </a:defRPr>
-            </a:pPr>
-            <a:r>
-              <a:t>启示</a:t>
+                  <a:srgbClr val="00C853"/>
+                </a:solidFill>
+              </a:defRPr>
+            </a:pPr>
+            <a:r>
+              <a:t>Mooncake(月之暗面)</a:t>
             </a:r>
           </a:p>
         </p:txBody>
@@ -10434,15 +12287,19 @@
               </a:defRPr>
             </a:pPr>
             <a:r>
-              <a:t>NPU的RL kernel需支持</a:t>
+              <a:t>RDMA+分布式KV Store</a:t>
             </a:r>
             <a:br/>
             <a:r>
-              <a:t>off-policy IW计算</a:t>
+              <a:t>prefill-decode物理分离</a:t>
             </a:r>
             <a:br/>
             <a:r>
-              <a:t>V-trace修正算子</a:t>
+              <a:t>千卡规模生产部署</a:t>
+            </a:r>
+            <a:br/>
+            <a:r>
+              <a:t>HCCS天然适配</a:t>
             </a:r>
           </a:p>
         </p:txBody>
@@ -10546,7 +12403,7 @@
               </a:defRPr>
             </a:pPr>
             <a:r>
-              <a:t>DAPO+CISPO：工业级异步RL算法</a:t>
+              <a:t>Eagle3 + 4bit量化: 推理加速</a:t>
             </a:r>
           </a:p>
         </p:txBody>
@@ -10581,7 +12438,7 @@
               </a:defRPr>
             </a:pPr>
             <a:r>
-              <a:t>ByteDance Seed + MiniMax — 开源事实标准+超长horizon加速</a:t>
+              <a:t>投机解码+量化是Agent RL推理侧的标配优化</a:t>
             </a:r>
           </a:p>
         </p:txBody>
@@ -10659,7 +12516,7 @@
               </a:defRPr>
             </a:pPr>
             <a:r>
-              <a:t>DAPO (ByteDance)</a:t>
+              <a:t>Eagle3投机解码</a:t>
             </a:r>
           </a:p>
         </p:txBody>
@@ -10694,23 +12551,19 @@
               </a:defRPr>
             </a:pPr>
             <a:r>
-              <a:t>四大技术：Clip-Higher</a:t>
+              <a:t>draft+verify范式</a:t>
             </a:r>
             <a:br/>
             <a:r>
-              <a:t>Dynamic Sampling</a:t>
+              <a:t>2-3x解码加速</a:t>
             </a:r>
             <a:br/>
             <a:r>
-              <a:t>Token-level Loss</a:t>
+              <a:t>Google/AWS/NVIDIA生产部署</a:t>
             </a:r>
             <a:br/>
             <a:r>
-              <a:t>Overlong Shaping</a:t>
-            </a:r>
-            <a:br/>
-            <a:r>
-              <a:t>→ Qwen2.5-32B AIME 50%</a:t>
+              <a:t>vLLM/SGLang原生支持</a:t>
             </a:r>
           </a:p>
         </p:txBody>
@@ -10783,12 +12636,12 @@
             <a:pPr algn="l">
               <a:defRPr sz="1300" b="1">
                 <a:solidFill>
-                  <a:srgbClr val="00C853"/>
-                </a:solidFill>
-              </a:defRPr>
-            </a:pPr>
-            <a:r>
-              <a:t>CISPO (MiniMax)</a:t>
+                  <a:srgbClr val="0096D6"/>
+                </a:solidFill>
+              </a:defRPr>
+            </a:pPr>
+            <a:r>
+              <a:t>4bit(mxfp8/mxfp4)量化</a:t>
             </a:r>
           </a:p>
         </p:txBody>
@@ -10823,19 +12676,19 @@
               </a:defRPr>
             </a:pPr>
             <a:r>
-              <a:t>IS权重裁剪</a:t>
+              <a:t>显存压缩4x</a:t>
             </a:r>
             <a:br/>
             <a:r>
-              <a:t>200K上下文验证</a:t>
+              <a:t>70B模型单卡可推理</a:t>
             </a:r>
             <a:br/>
             <a:r>
-              <a:t>比DAPO快2x</a:t>
+              <a:t>量化是被迫选择非激进</a:t>
             </a:r>
             <a:br/>
             <a:r>
-              <a:t>→ M2.5 SWE-Bench 80.2%</a:t>
+              <a:t>需精度恢复算法</a:t>
             </a:r>
           </a:p>
         </p:txBody>
@@ -10913,7 +12766,7 @@
               </a:defRPr>
             </a:pPr>
             <a:r>
-              <a:t>并列互补</a:t>
+              <a:t>NPU启示</a:t>
             </a:r>
           </a:p>
         </p:txBody>
@@ -10948,15 +12801,19 @@
               </a:defRPr>
             </a:pPr>
             <a:r>
-              <a:t>DAPO=异步训练稳定性</a:t>
+              <a:t>Eagle3需在910C验证</a:t>
             </a:r>
             <a:br/>
             <a:r>
-              <a:t>CISPO=长horizon加速</a:t>
+              <a:t>结构化输出准确率待测</a:t>
             </a:r>
             <a:br/>
             <a:r>
-              <a:t>两者并列互补非从属</a:t>
+              <a:t>4bit kernel需CANN适配</a:t>
+            </a:r>
+            <a:br/>
+            <a:r>
+              <a:t>我们的技术切入点</a:t>
             </a:r>
           </a:p>
         </p:txBody>
@@ -11060,7 +12917,7 @@
               </a:defRPr>
             </a:pPr>
             <a:r>
-              <a:t>Cursor实时RL + Meta Self-Play SWE-RL</a:t>
+              <a:t>Forge: sandbox并行化 + 行业空白</a:t>
             </a:r>
           </a:p>
         </p:txBody>
@@ -11095,7 +12952,7 @@
               </a:defRPr>
             </a:pPr>
             <a:r>
-              <a:t>工业级闭环训练：5小时端到端 + 零标注自博弈</a:t>
+              <a:t>基础设施层是业界投入最薄弱的环节</a:t>
             </a:r>
           </a:p>
         </p:txBody>
@@ -11173,7 +13030,7 @@
               </a:defRPr>
             </a:pPr>
             <a:r>
-              <a:t>Cursor Composer 2</a:t>
+              <a:t>Forge(MiniMax)</a:t>
             </a:r>
           </a:p>
         </p:txBody>
@@ -11208,19 +13065,19 @@
               </a:defRPr>
             </a:pPr>
             <a:r>
-              <a:t>在production harness中RL训练</a:t>
+              <a:t>Agent-环境解耦框架</a:t>
             </a:r>
             <a:br/>
             <a:r>
-              <a:t>self-summarization 200K→1K</a:t>
+              <a:t>200K上下文支持</a:t>
             </a:r>
             <a:br/>
             <a:r>
-              <a:t>compaction error降50%</a:t>
+              <a:t>百万级日吞吐</a:t>
             </a:r>
             <a:br/>
             <a:r>
-              <a:t>5小时端到端闭环</a:t>
+              <a:t>40x训练加速</a:t>
             </a:r>
           </a:p>
         </p:txBody>
@@ -11293,12 +13150,12 @@
             <a:pPr algn="l">
               <a:defRPr sz="1300" b="1">
                 <a:solidFill>
-                  <a:srgbClr val="00C853"/>
-                </a:solidFill>
-              </a:defRPr>
-            </a:pPr>
-            <a:r>
-              <a:t>Meta SSR</a:t>
+                  <a:srgbClr val="E84040"/>
+                </a:solidFill>
+              </a:defRPr>
+            </a:pPr>
+            <a:r>
+              <a:t>行业空白</a:t>
             </a:r>
           </a:p>
         </p:txBody>
@@ -11333,19 +13190,19 @@
               </a:defRPr>
             </a:pPr>
             <a:r>
-              <a:t>零人工标注</a:t>
+              <a:t>精度/算子/框架层</a:t>
             </a:r>
             <a:br/>
             <a:r>
-              <a:t>自博弈+环境验证</a:t>
+              <a:t>业界技术供给不足</a:t>
             </a:r>
             <a:br/>
             <a:r>
-              <a:t>ICLR 2026</a:t>
+              <a:t>基础设施层只有Forge</a:t>
             </a:r>
             <a:br/>
             <a:r>
-              <a:t>SWE-Bench显著提升</a:t>
+              <a:t>-&gt; 这是我们的机会</a:t>
             </a:r>
           </a:p>
         </p:txBody>
@@ -11423,7 +13280,7 @@
               </a:defRPr>
             </a:pPr>
             <a:r>
-              <a:t>启示</a:t>
+              <a:t>我们的定位</a:t>
             </a:r>
           </a:p>
         </p:txBody>
@@ -11458,15 +13315,19 @@
               </a:defRPr>
             </a:pPr>
             <a:r>
-              <a:t>Agent RL的评估信号</a:t>
+              <a:t>Ascend精度基线</a:t>
             </a:r>
             <a:br/>
             <a:r>
-              <a:t>来自环境闭环</a:t>
+              <a:t>算子自动生成+验证</a:t>
             </a:r>
             <a:br/>
             <a:r>
-              <a:t>不需要人工标注</a:t>
+              <a:t>RL框架易用性</a:t>
+            </a:r>
+            <a:br/>
+            <a:r>
+              <a:t>Agent hardness工程</a:t>
             </a:r>
           </a:p>
         </p:txBody>
@@ -11570,7 +13431,7 @@
               </a:defRPr>
             </a:pPr>
             <a:r>
-              <a:t>Routing环节：采集吞吐与推理效率（C2+C3）</a:t>
+              <a:t>框架层升级概览</a:t>
             </a:r>
           </a:p>
         </p:txBody>
@@ -11605,7 +13466,7 @@
               </a:defRPr>
             </a:pPr>
             <a:r>
-              <a:t>推理侧从[无状态处理器]变成[有状态会话管理器]</a:t>
+              <a:t>挑战2+3驱动: 训推解耦+异步调度</a:t>
             </a:r>
           </a:p>
         </p:txBody>
@@ -11683,7 +13544,7 @@
               </a:defRPr>
             </a:pPr>
             <a:r>
-              <a:t>ProRL Agent</a:t>
+              <a:t>训推解耦</a:t>
             </a:r>
           </a:p>
         </p:txBody>
@@ -11718,15 +13579,19 @@
               </a:defRPr>
             </a:pPr>
             <a:r>
-              <a:t>NVIDIA</a:t>
+              <a:t>Rollout和Trainer耦合</a:t>
             </a:r>
             <a:br/>
             <a:r>
-              <a:t>Rollout-as-a-Service</a:t>
+              <a:t>环境I/O阻塞GPU训练</a:t>
             </a:r>
             <a:br/>
             <a:r>
-              <a:t>训推完全解耦</a:t>
+              <a:t>必须服务化解耦</a:t>
+            </a:r>
+            <a:br/>
+            <a:r>
+              <a:t>-&gt; ProRL Agent</a:t>
             </a:r>
           </a:p>
         </p:txBody>
@@ -11804,7 +13669,7 @@
               </a:defRPr>
             </a:pPr>
             <a:r>
-              <a:t>Dynamo</a:t>
+              <a:t>异步流水线+KV感知调度</a:t>
             </a:r>
           </a:p>
         </p:txBody>
@@ -11839,15 +13704,19 @@
               </a:defRPr>
             </a:pPr>
             <a:r>
-              <a:t>NVIDIA</a:t>
+              <a:t>EP分钟级不可同步等</a:t>
             </a:r>
             <a:br/>
             <a:r>
-              <a:t>KV-aware路由</a:t>
+              <a:t>流式数据产生需编排</a:t>
             </a:r>
             <a:br/>
             <a:r>
-              <a:t>30x吞吐提升</a:t>
+              <a:t>请求要去有KV的节点</a:t>
+            </a:r>
+            <a:br/>
+            <a:r>
+              <a:t>-&gt; Dynamo</a:t>
             </a:r>
           </a:p>
         </p:txBody>
@@ -11920,12 +13789,12 @@
             <a:pPr algn="l">
               <a:defRPr sz="1300" b="1">
                 <a:solidFill>
-                  <a:srgbClr val="00C853"/>
-                </a:solidFill>
-              </a:defRPr>
-            </a:pPr>
-            <a:r>
-              <a:t>LMCache+Mooncake</a:t>
+                  <a:srgbClr val="FF8C00"/>
+                </a:solidFill>
+              </a:defRPr>
+            </a:pPr>
+            <a:r>
+              <a:t>框架层关键判断</a:t>
             </a:r>
           </a:p>
         </p:txBody>
@@ -11960,15 +13829,19 @@
               </a:defRPr>
             </a:pPr>
             <a:r>
-              <a:t>KV Cache跨节点共享</a:t>
+              <a:t>训推解耦是所有Agent RL</a:t>
             </a:r>
             <a:br/>
             <a:r>
-              <a:t>prefill-decode分离</a:t>
+              <a:t>的公共底座</a:t>
             </a:r>
             <a:br/>
             <a:r>
-              <a:t>月之暗面生产部署</a:t>
+              <a:t>先做这个再叠算法优化</a:t>
+            </a:r>
+            <a:br/>
+            <a:r>
+              <a:t>-&gt; 我们的第一优先级</a:t>
             </a:r>
           </a:p>
         </p:txBody>
@@ -12046,7 +13919,7 @@
               </a:defRPr>
             </a:pPr>
             <a:r>
-              <a:t>Routing环节：推理集群必须从无状态升级为有状态——KV感知是核心能力</a:t>
+              <a:t>框架层2个升级方向: 训推解耦+异步调度 -&gt; 逐一展开</a:t>
             </a:r>
           </a:p>
         </p:txBody>

--- a/Agentic_RL_后训练洞察.pptx
+++ b/Agentic_RL_后训练洞察.pptx
@@ -4874,7 +4874,7 @@
               </a:defRPr>
             </a:pPr>
             <a:r>
-              <a:t>挑战4+5驱动: off-policy容忍+步级归因</a:t>
+              <a:t>挑战1+4+5驱动: off-policy容忍+步级归因+上下文自压缩</a:t>
             </a:r>
           </a:p>
         </p:txBody>
@@ -5197,12 +5197,12 @@
             <a:pPr algn="l">
               <a:defRPr sz="1300" b="1">
                 <a:solidFill>
-                  <a:srgbClr val="0096D6"/>
-                </a:solidFill>
-              </a:defRPr>
-            </a:pPr>
-            <a:r>
-              <a:t>算法层关键判断</a:t>
+                  <a:srgbClr val="FF8C00"/>
+                </a:solidFill>
+              </a:defRPr>
+            </a:pPr>
+            <a:r>
+              <a:t>上下文自压缩(h)</a:t>
             </a:r>
           </a:p>
         </p:txBody>
@@ -5237,19 +5237,19 @@
               </a:defRPr>
             </a:pPr>
             <a:r>
-              <a:t>异步是系统给的约束</a:t>
+              <a:t>M级上下文推理开销爆炸</a:t>
             </a:r>
             <a:br/>
             <a:r>
-              <a:t>算法必须在off-policy下收敛</a:t>
+              <a:t>模型通过RL学会自主压缩</a:t>
             </a:r>
             <a:br/>
             <a:r>
-              <a:t>归因精度决定学习效率</a:t>
+              <a:t>Composer 2: 200K-&gt;1K</a:t>
             </a:r>
             <a:br/>
             <a:r>
-              <a:t>基础设施越好算法越有空间</a:t>
+              <a:t>compaction error降50%</a:t>
             </a:r>
           </a:p>
         </p:txBody>
@@ -10109,8 +10109,8 @@
         </p:nvSpPr>
         <p:spPr>
           <a:xfrm>
-            <a:off x="2560320" y="4663440"/>
-            <a:ext cx="4754880" cy="502920"/>
+            <a:off x="2560320" y="4434840"/>
+            <a:ext cx="4754880" cy="457200"/>
           </a:xfrm>
           <a:prstGeom prst="rect">
             <a:avLst/>
@@ -10152,7 +10152,7 @@
         </p:nvSpPr>
         <p:spPr>
           <a:xfrm>
-            <a:off x="2697479" y="4754879"/>
+            <a:off x="2697479" y="4526279"/>
             <a:ext cx="4480560" cy="365760"/>
           </a:xfrm>
           <a:prstGeom prst="rect">
@@ -10187,8 +10187,8 @@
         </p:nvSpPr>
         <p:spPr>
           <a:xfrm>
-            <a:off x="2697479" y="5120640"/>
-            <a:ext cx="4480560" cy="-45719"/>
+            <a:off x="2697479" y="4892040"/>
+            <a:ext cx="4480560" cy="-91439"/>
           </a:xfrm>
           <a:prstGeom prst="rect">
             <a:avLst/>
@@ -10222,8 +10222,8 @@
         </p:nvSpPr>
         <p:spPr>
           <a:xfrm>
-            <a:off x="7680960" y="1097280"/>
-            <a:ext cx="4114800" cy="502920"/>
+            <a:off x="2560320" y="4937760"/>
+            <a:ext cx="4754880" cy="457200"/>
           </a:xfrm>
           <a:prstGeom prst="rect">
             <a:avLst/>
@@ -10265,8 +10265,8 @@
         </p:nvSpPr>
         <p:spPr>
           <a:xfrm>
-            <a:off x="7818120" y="1188720"/>
-            <a:ext cx="3840480" cy="365760"/>
+            <a:off x="2697479" y="5029200"/>
+            <a:ext cx="4480560" cy="365760"/>
           </a:xfrm>
           <a:prstGeom prst="rect">
             <a:avLst/>
@@ -10282,12 +10282,12 @@
             <a:pPr algn="l">
               <a:defRPr sz="1300" b="1">
                 <a:solidFill>
-                  <a:srgbClr val="0096D6"/>
-                </a:solidFill>
-              </a:defRPr>
-            </a:pPr>
-            <a:r>
-              <a:t>LMCache / Mooncake</a:t>
+                  <a:srgbClr val="FF8C00"/>
+                </a:solidFill>
+              </a:defRPr>
+            </a:pPr>
+            <a:r>
+              <a:t>h 上下文自压缩 [算法]</a:t>
             </a:r>
           </a:p>
         </p:txBody>
@@ -10300,8 +10300,8 @@
         </p:nvSpPr>
         <p:spPr>
           <a:xfrm>
-            <a:off x="7818120" y="1554480"/>
-            <a:ext cx="3840480" cy="-45719"/>
+            <a:off x="2697479" y="5394960"/>
+            <a:ext cx="4480560" cy="-91439"/>
           </a:xfrm>
           <a:prstGeom prst="rect">
             <a:avLst/>
@@ -10321,6 +10321,9 @@
                 </a:solidFill>
               </a:defRPr>
             </a:pPr>
+            <a:r>
+              <a:t>因为:M级上下文爆炸 否则:truncation丢信息</a:t>
+            </a:r>
           </a:p>
         </p:txBody>
       </p:sp>
@@ -10332,7 +10335,7 @@
         </p:nvSpPr>
         <p:spPr>
           <a:xfrm>
-            <a:off x="7680960" y="1691640"/>
+            <a:off x="7680960" y="1097280"/>
             <a:ext cx="4114800" cy="502920"/>
           </a:xfrm>
           <a:prstGeom prst="rect">
@@ -10375,7 +10378,7 @@
         </p:nvSpPr>
         <p:spPr>
           <a:xfrm>
-            <a:off x="7818120" y="1783080"/>
+            <a:off x="7818120" y="1188720"/>
             <a:ext cx="3840480" cy="365760"/>
           </a:xfrm>
           <a:prstGeom prst="rect">
@@ -10397,7 +10400,7 @@
               </a:defRPr>
             </a:pPr>
             <a:r>
-              <a:t>Eagle3 / 4bit量化</a:t>
+              <a:t>LMCache / Mooncake</a:t>
             </a:r>
           </a:p>
         </p:txBody>
@@ -10410,7 +10413,7 @@
         </p:nvSpPr>
         <p:spPr>
           <a:xfrm>
-            <a:off x="7818120" y="2148840"/>
+            <a:off x="7818120" y="1554480"/>
             <a:ext cx="3840480" cy="-45719"/>
           </a:xfrm>
           <a:prstGeom prst="rect">
@@ -10442,7 +10445,7 @@
         </p:nvSpPr>
         <p:spPr>
           <a:xfrm>
-            <a:off x="7680960" y="2286000"/>
+            <a:off x="7680960" y="1691640"/>
             <a:ext cx="4114800" cy="502920"/>
           </a:xfrm>
           <a:prstGeom prst="rect">
@@ -10485,7 +10488,7 @@
         </p:nvSpPr>
         <p:spPr>
           <a:xfrm>
-            <a:off x="7818120" y="2377440"/>
+            <a:off x="7818120" y="1783080"/>
             <a:ext cx="3840480" cy="365760"/>
           </a:xfrm>
           <a:prstGeom prst="rect">
@@ -10507,7 +10510,7 @@
               </a:defRPr>
             </a:pPr>
             <a:r>
-              <a:t>Forge</a:t>
+              <a:t>Eagle3 / 4bit量化</a:t>
             </a:r>
           </a:p>
         </p:txBody>
@@ -10520,7 +10523,7 @@
         </p:nvSpPr>
         <p:spPr>
           <a:xfrm>
-            <a:off x="7818120" y="2743200"/>
+            <a:off x="7818120" y="2148840"/>
             <a:ext cx="3840480" cy="-45719"/>
           </a:xfrm>
           <a:prstGeom prst="rect">
@@ -10552,7 +10555,7 @@
         </p:nvSpPr>
         <p:spPr>
           <a:xfrm>
-            <a:off x="7680960" y="2880360"/>
+            <a:off x="7680960" y="2286000"/>
             <a:ext cx="4114800" cy="502920"/>
           </a:xfrm>
           <a:prstGeom prst="rect">
@@ -10595,7 +10598,7 @@
         </p:nvSpPr>
         <p:spPr>
           <a:xfrm>
-            <a:off x="7818120" y="2971800"/>
+            <a:off x="7818120" y="2377440"/>
             <a:ext cx="3840480" cy="365760"/>
           </a:xfrm>
           <a:prstGeom prst="rect">
@@ -10612,12 +10615,12 @@
             <a:pPr algn="l">
               <a:defRPr sz="1300" b="1">
                 <a:solidFill>
-                  <a:srgbClr val="00C853"/>
-                </a:solidFill>
-              </a:defRPr>
-            </a:pPr>
-            <a:r>
-              <a:t>ProRL Agent (NVIDIA)</a:t>
+                  <a:srgbClr val="0096D6"/>
+                </a:solidFill>
+              </a:defRPr>
+            </a:pPr>
+            <a:r>
+              <a:t>Forge</a:t>
             </a:r>
           </a:p>
         </p:txBody>
@@ -10630,7 +10633,7 @@
         </p:nvSpPr>
         <p:spPr>
           <a:xfrm>
-            <a:off x="7818120" y="3337560"/>
+            <a:off x="7818120" y="2743200"/>
             <a:ext cx="3840480" cy="-45719"/>
           </a:xfrm>
           <a:prstGeom prst="rect">
@@ -10662,7 +10665,7 @@
         </p:nvSpPr>
         <p:spPr>
           <a:xfrm>
-            <a:off x="7680960" y="3474720"/>
+            <a:off x="7680960" y="2880360"/>
             <a:ext cx="4114800" cy="502920"/>
           </a:xfrm>
           <a:prstGeom prst="rect">
@@ -10705,7 +10708,7 @@
         </p:nvSpPr>
         <p:spPr>
           <a:xfrm>
-            <a:off x="7818120" y="3566160"/>
+            <a:off x="7818120" y="2971800"/>
             <a:ext cx="3840480" cy="365760"/>
           </a:xfrm>
           <a:prstGeom prst="rect">
@@ -10727,7 +10730,7 @@
               </a:defRPr>
             </a:pPr>
             <a:r>
-              <a:t>Dynamo (NVIDIA)</a:t>
+              <a:t>ProRL Agent (NVIDIA)</a:t>
             </a:r>
           </a:p>
         </p:txBody>
@@ -10740,7 +10743,7 @@
         </p:nvSpPr>
         <p:spPr>
           <a:xfrm>
-            <a:off x="7818120" y="3931920"/>
+            <a:off x="7818120" y="3337560"/>
             <a:ext cx="3840480" cy="-45719"/>
           </a:xfrm>
           <a:prstGeom prst="rect">
@@ -10772,7 +10775,7 @@
         </p:nvSpPr>
         <p:spPr>
           <a:xfrm>
-            <a:off x="7680960" y="4069080"/>
+            <a:off x="7680960" y="3474720"/>
             <a:ext cx="4114800" cy="502920"/>
           </a:xfrm>
           <a:prstGeom prst="rect">
@@ -10815,7 +10818,7 @@
         </p:nvSpPr>
         <p:spPr>
           <a:xfrm>
-            <a:off x="7818120" y="4160520"/>
+            <a:off x="7818120" y="3566160"/>
             <a:ext cx="3840480" cy="365760"/>
           </a:xfrm>
           <a:prstGeom prst="rect">
@@ -10832,12 +10835,12 @@
             <a:pPr algn="l">
               <a:defRPr sz="1300" b="1">
                 <a:solidFill>
-                  <a:srgbClr val="FF8C00"/>
-                </a:solidFill>
-              </a:defRPr>
-            </a:pPr>
-            <a:r>
-              <a:t>Decoupled PPO / DAPO+CISPO</a:t>
+                  <a:srgbClr val="00C853"/>
+                </a:solidFill>
+              </a:defRPr>
+            </a:pPr>
+            <a:r>
+              <a:t>Dynamo (NVIDIA)</a:t>
             </a:r>
           </a:p>
         </p:txBody>
@@ -10850,7 +10853,7 @@
         </p:nvSpPr>
         <p:spPr>
           <a:xfrm>
-            <a:off x="7818120" y="4526280"/>
+            <a:off x="7818120" y="3931920"/>
             <a:ext cx="3840480" cy="-45719"/>
           </a:xfrm>
           <a:prstGeom prst="rect">
@@ -10882,7 +10885,7 @@
         </p:nvSpPr>
         <p:spPr>
           <a:xfrm>
-            <a:off x="7680960" y="4663440"/>
+            <a:off x="7680960" y="4069080"/>
             <a:ext cx="4114800" cy="502920"/>
           </a:xfrm>
           <a:prstGeom prst="rect">
@@ -10925,7 +10928,7 @@
         </p:nvSpPr>
         <p:spPr>
           <a:xfrm>
-            <a:off x="7818120" y="4754879"/>
+            <a:off x="7818120" y="4160520"/>
             <a:ext cx="3840480" cy="365760"/>
           </a:xfrm>
           <a:prstGeom prst="rect">
@@ -10947,6 +10950,116 @@
               </a:defRPr>
             </a:pPr>
             <a:r>
+              <a:t>Decoupled PPO / DAPO+CISPO</a:t>
+            </a:r>
+          </a:p>
+        </p:txBody>
+      </p:sp>
+      <p:sp>
+        <p:nvSpPr>
+          <p:cNvPr id="60" name="TextBox 59"/>
+          <p:cNvSpPr txBox="1"/>
+          <p:nvPr/>
+        </p:nvSpPr>
+        <p:spPr>
+          <a:xfrm>
+            <a:off x="7818120" y="4526280"/>
+            <a:ext cx="3840480" cy="-45719"/>
+          </a:xfrm>
+          <a:prstGeom prst="rect">
+            <a:avLst/>
+          </a:prstGeom>
+          <a:noFill/>
+        </p:spPr>
+        <p:txBody>
+          <a:bodyPr wrap="square">
+            <a:spAutoFit/>
+          </a:bodyPr>
+          <a:lstStyle/>
+          <a:p>
+            <a:pPr algn="l">
+              <a:defRPr sz="1100" b="0">
+                <a:solidFill>
+                  <a:srgbClr val="B0B8C8"/>
+                </a:solidFill>
+              </a:defRPr>
+            </a:pPr>
+          </a:p>
+        </p:txBody>
+      </p:sp>
+      <p:sp>
+        <p:nvSpPr>
+          <p:cNvPr id="61" name="Rectangle 60"/>
+          <p:cNvSpPr/>
+          <p:nvPr/>
+        </p:nvSpPr>
+        <p:spPr>
+          <a:xfrm>
+            <a:off x="7680960" y="4434840"/>
+            <a:ext cx="4114800" cy="457200"/>
+          </a:xfrm>
+          <a:prstGeom prst="rect">
+            <a:avLst/>
+          </a:prstGeom>
+          <a:solidFill>
+            <a:srgbClr val="1B2A4A"/>
+          </a:solidFill>
+          <a:ln>
+            <a:noFill/>
+          </a:ln>
+        </p:spPr>
+        <p:style>
+          <a:lnRef idx="1">
+            <a:schemeClr val="accent1"/>
+          </a:lnRef>
+          <a:fillRef idx="3">
+            <a:schemeClr val="accent1"/>
+          </a:fillRef>
+          <a:effectRef idx="2">
+            <a:schemeClr val="accent1"/>
+          </a:effectRef>
+          <a:fontRef idx="minor">
+            <a:schemeClr val="lt1"/>
+          </a:fontRef>
+        </p:style>
+        <p:txBody>
+          <a:bodyPr rtlCol="0" anchor="ctr"/>
+          <a:lstStyle/>
+          <a:p>
+            <a:pPr algn="ctr"/>
+          </a:p>
+        </p:txBody>
+      </p:sp>
+      <p:sp>
+        <p:nvSpPr>
+          <p:cNvPr id="62" name="TextBox 61"/>
+          <p:cNvSpPr txBox="1"/>
+          <p:nvPr/>
+        </p:nvSpPr>
+        <p:spPr>
+          <a:xfrm>
+            <a:off x="7818120" y="4526279"/>
+            <a:ext cx="3840480" cy="365760"/>
+          </a:xfrm>
+          <a:prstGeom prst="rect">
+            <a:avLst/>
+          </a:prstGeom>
+          <a:noFill/>
+        </p:spPr>
+        <p:txBody>
+          <a:bodyPr wrap="square">
+            <a:spAutoFit/>
+          </a:bodyPr>
+          <a:lstStyle/>
+          <a:p>
+            <a:pPr algn="l">
+              <a:defRPr sz="1300" b="1">
+                <a:solidFill>
+                  <a:srgbClr val="FF8C00"/>
+                </a:solidFill>
+              </a:defRPr>
+            </a:pPr>
+            <a:r>
               <a:t>Cursor实时RL / Meta SSR</a:t>
             </a:r>
           </a:p>
@@ -10954,14 +11067,14 @@
       </p:sp>
       <p:sp>
         <p:nvSpPr>
-          <p:cNvPr id="60" name="TextBox 59"/>
-          <p:cNvSpPr txBox="1"/>
-          <p:nvPr/>
-        </p:nvSpPr>
-        <p:spPr>
-          <a:xfrm>
-            <a:off x="7818120" y="5120640"/>
-            <a:ext cx="3840480" cy="-45719"/>
+          <p:cNvPr id="63" name="TextBox 62"/>
+          <p:cNvSpPr txBox="1"/>
+          <p:nvPr/>
+        </p:nvSpPr>
+        <p:spPr>
+          <a:xfrm>
+            <a:off x="7818120" y="4892040"/>
+            <a:ext cx="3840480" cy="-91439"/>
           </a:xfrm>
           <a:prstGeom prst="rect">
             <a:avLst/>
@@ -10986,7 +11099,117 @@
       </p:sp>
       <p:sp>
         <p:nvSpPr>
-          <p:cNvPr id="61" name="TextBox 60"/>
+          <p:cNvPr id="64" name="Rectangle 63"/>
+          <p:cNvSpPr/>
+          <p:nvPr/>
+        </p:nvSpPr>
+        <p:spPr>
+          <a:xfrm>
+            <a:off x="7680960" y="4937760"/>
+            <a:ext cx="4114800" cy="457200"/>
+          </a:xfrm>
+          <a:prstGeom prst="rect">
+            <a:avLst/>
+          </a:prstGeom>
+          <a:solidFill>
+            <a:srgbClr val="1B2A4A"/>
+          </a:solidFill>
+          <a:ln>
+            <a:noFill/>
+          </a:ln>
+        </p:spPr>
+        <p:style>
+          <a:lnRef idx="1">
+            <a:schemeClr val="accent1"/>
+          </a:lnRef>
+          <a:fillRef idx="3">
+            <a:schemeClr val="accent1"/>
+          </a:fillRef>
+          <a:effectRef idx="2">
+            <a:schemeClr val="accent1"/>
+          </a:effectRef>
+          <a:fontRef idx="minor">
+            <a:schemeClr val="lt1"/>
+          </a:fontRef>
+        </p:style>
+        <p:txBody>
+          <a:bodyPr rtlCol="0" anchor="ctr"/>
+          <a:lstStyle/>
+          <a:p>
+            <a:pPr algn="ctr"/>
+          </a:p>
+        </p:txBody>
+      </p:sp>
+      <p:sp>
+        <p:nvSpPr>
+          <p:cNvPr id="65" name="TextBox 64"/>
+          <p:cNvSpPr txBox="1"/>
+          <p:nvPr/>
+        </p:nvSpPr>
+        <p:spPr>
+          <a:xfrm>
+            <a:off x="7818120" y="5029200"/>
+            <a:ext cx="3840480" cy="365760"/>
+          </a:xfrm>
+          <a:prstGeom prst="rect">
+            <a:avLst/>
+          </a:prstGeom>
+          <a:noFill/>
+        </p:spPr>
+        <p:txBody>
+          <a:bodyPr wrap="square">
+            <a:spAutoFit/>
+          </a:bodyPr>
+          <a:lstStyle/>
+          <a:p>
+            <a:pPr algn="l">
+              <a:defRPr sz="1300" b="1">
+                <a:solidFill>
+                  <a:srgbClr val="FF8C00"/>
+                </a:solidFill>
+              </a:defRPr>
+            </a:pPr>
+            <a:r>
+              <a:t>Cursor self-summarization</a:t>
+            </a:r>
+          </a:p>
+        </p:txBody>
+      </p:sp>
+      <p:sp>
+        <p:nvSpPr>
+          <p:cNvPr id="66" name="TextBox 65"/>
+          <p:cNvSpPr txBox="1"/>
+          <p:nvPr/>
+        </p:nvSpPr>
+        <p:spPr>
+          <a:xfrm>
+            <a:off x="7818120" y="5394960"/>
+            <a:ext cx="3840480" cy="-91439"/>
+          </a:xfrm>
+          <a:prstGeom prst="rect">
+            <a:avLst/>
+          </a:prstGeom>
+          <a:noFill/>
+        </p:spPr>
+        <p:txBody>
+          <a:bodyPr wrap="square">
+            <a:spAutoFit/>
+          </a:bodyPr>
+          <a:lstStyle/>
+          <a:p>
+            <a:pPr algn="l">
+              <a:defRPr sz="1100" b="0">
+                <a:solidFill>
+                  <a:srgbClr val="B0B8C8"/>
+                </a:solidFill>
+              </a:defRPr>
+            </a:pPr>
+          </a:p>
+        </p:txBody>
+      </p:sp>
+      <p:sp>
+        <p:nvSpPr>
+          <p:cNvPr id="67" name="TextBox 66"/>
           <p:cNvSpPr txBox="1"/>
           <p:nvPr/>
         </p:nvSpPr>
@@ -11021,7 +11244,7 @@
       </p:sp>
       <p:sp>
         <p:nvSpPr>
-          <p:cNvPr id="62" name="TextBox 61"/>
+          <p:cNvPr id="68" name="TextBox 67"/>
           <p:cNvSpPr txBox="1"/>
           <p:nvPr/>
         </p:nvSpPr>
@@ -11056,7 +11279,7 @@
       </p:sp>
       <p:sp>
         <p:nvSpPr>
-          <p:cNvPr id="63" name="TextBox 62"/>
+          <p:cNvPr id="69" name="TextBox 68"/>
           <p:cNvSpPr txBox="1"/>
           <p:nvPr/>
         </p:nvSpPr>
@@ -11091,7 +11314,7 @@
       </p:sp>
       <p:sp>
         <p:nvSpPr>
-          <p:cNvPr id="64" name="TextBox 63"/>
+          <p:cNvPr id="70" name="TextBox 69"/>
           <p:cNvSpPr txBox="1"/>
           <p:nvPr/>
         </p:nvSpPr>
@@ -11119,14 +11342,14 @@
               </a:defRPr>
             </a:pPr>
             <a:r>
-              <a:t>算法层 f+g (4,5驱动)</a:t>
-            </a:r>
-          </a:p>
-        </p:txBody>
-      </p:sp>
-      <p:sp>
-        <p:nvSpPr>
-          <p:cNvPr id="65" name="Rectangle 64"/>
+              <a:t>算法层 f+g+h (1,4,5驱动)</a:t>
+            </a:r>
+          </a:p>
+        </p:txBody>
+      </p:sp>
+      <p:sp>
+        <p:nvSpPr>
+          <p:cNvPr id="71" name="Rectangle 70"/>
           <p:cNvSpPr/>
           <p:nvPr/>
         </p:nvSpPr>
@@ -11169,7 +11392,7 @@
       </p:sp>
       <p:sp>
         <p:nvSpPr>
-          <p:cNvPr id="66" name="TextBox 65"/>
+          <p:cNvPr id="72" name="TextBox 71"/>
           <p:cNvSpPr txBox="1"/>
           <p:nvPr/>
         </p:nvSpPr>
@@ -11197,7 +11420,7 @@
               </a:defRPr>
             </a:pPr>
             <a:r>
-              <a:t>五挑战驱动七升级，每层都有因果必然 -&gt; 先看基础设施层</a:t>
+              <a:t>五挑战驱动八升级，每层都有因果必然 -&gt; 先看基础设施层</a:t>
             </a:r>
           </a:p>
         </p:txBody>

--- a/Agentic_RL_后训练洞察.pptx
+++ b/Agentic_RL_后训练洞察.pptx
@@ -8804,7 +8804,7 @@
         <p:spPr>
           <a:xfrm>
             <a:off x="0" y="0"/>
-            <a:ext cx="12191695" cy="1005840"/>
+            <a:ext cx="12191695" cy="822960"/>
           </a:xfrm>
           <a:prstGeom prst="rect">
             <a:avLst/>
@@ -8846,43 +8846,102 @@
         </p:nvSpPr>
         <p:spPr>
           <a:xfrm>
-            <a:off x="457200" y="137160"/>
-            <a:ext cx="10972800" cy="457200"/>
-          </a:xfrm>
-          <a:prstGeom prst="rect">
-            <a:avLst/>
-          </a:prstGeom>
-          <a:noFill/>
-        </p:spPr>
-        <p:txBody>
-          <a:bodyPr wrap="square">
-            <a:spAutoFit/>
-          </a:bodyPr>
-          <a:lstStyle/>
-          <a:p>
-            <a:pPr algn="l">
-              <a:defRPr sz="2400" b="1">
+            <a:off x="274320" y="137160"/>
+            <a:ext cx="10972800" cy="320040"/>
+          </a:xfrm>
+          <a:prstGeom prst="rect">
+            <a:avLst/>
+          </a:prstGeom>
+          <a:noFill/>
+        </p:spPr>
+        <p:txBody>
+          <a:bodyPr wrap="none">
+            <a:spAutoFit/>
+          </a:bodyPr>
+          <a:lstStyle/>
+          <a:p>
+            <a:pPr>
+              <a:defRPr sz="2000" b="1">
                 <a:solidFill>
                   <a:srgbClr val="FFFFFF"/>
                 </a:solidFill>
               </a:defRPr>
             </a:pPr>
             <a:r>
-              <a:t>五挑战 -&gt; 七升级方向 -- 后训练软件栈三层全面升级</a:t>
-            </a:r>
-          </a:p>
-        </p:txBody>
-      </p:sp>
-      <p:sp>
-        <p:nvSpPr>
-          <p:cNvPr id="4" name="Rectangle 3"/>
+              <a:t>P4 | Architecture Map: 9 Upgrade Directions on the Stack</a:t>
+            </a:r>
+          </a:p>
+        </p:txBody>
+      </p:sp>
+      <p:sp>
+        <p:nvSpPr>
+          <p:cNvPr id="4" name="TextBox 3"/>
+          <p:cNvSpPr txBox="1"/>
+          <p:nvPr/>
+        </p:nvSpPr>
+        <p:spPr>
+          <a:xfrm>
+            <a:off x="274320" y="457200"/>
+            <a:ext cx="10972800" cy="274320"/>
+          </a:xfrm>
+          <a:prstGeom prst="rect">
+            <a:avLst/>
+          </a:prstGeom>
+          <a:noFill/>
+        </p:spPr>
+        <p:txBody>
+          <a:bodyPr wrap="none">
+            <a:spAutoFit/>
+          </a:bodyPr>
+          <a:lstStyle/>
+          <a:p>
+            <a:pPr>
+              <a:defRPr sz="1100">
+                <a:solidFill>
+                  <a:srgbClr val="B0B8C8"/>
+                </a:solidFill>
+              </a:defRPr>
+            </a:pPr>
+            <a:r>
+              <a:t>Left: Agent RL Training Stack | Right: 9 Upgrades mapped to Architecture (3-3-3)</a:t>
+            </a:r>
+          </a:p>
+        </p:txBody>
+      </p:sp>
+      <p:pic>
+        <p:nvPicPr>
+          <p:cNvPr id="5" name="Picture 4" descr="P4_arch_left.png"/>
+          <p:cNvPicPr>
+            <a:picLocks noChangeAspect="1"/>
+          </p:cNvPicPr>
+          <p:nvPr/>
+        </p:nvPicPr>
+        <p:blipFill>
+          <a:blip r:embed="rId2"/>
+          <a:stretch>
+            <a:fillRect/>
+          </a:stretch>
+        </p:blipFill>
+        <p:spPr>
+          <a:xfrm>
+            <a:off x="182880" y="914400"/>
+            <a:ext cx="5486400" cy="5486400"/>
+          </a:xfrm>
+          <a:prstGeom prst="rect">
+            <a:avLst/>
+          </a:prstGeom>
+        </p:spPr>
+      </p:pic>
+      <p:sp>
+        <p:nvSpPr>
+          <p:cNvPr id="6" name="Rectangle 5"/>
           <p:cNvSpPr/>
           <p:nvPr/>
         </p:nvSpPr>
         <p:spPr>
           <a:xfrm>
-            <a:off x="182880" y="1097280"/>
-            <a:ext cx="2011680" cy="502920"/>
+            <a:off x="5852160" y="914400"/>
+            <a:ext cx="365760" cy="320040"/>
           </a:xfrm>
           <a:prstGeom prst="rect">
             <a:avLst/>
@@ -8918,81 +8977,49 @@
       </p:sp>
       <p:sp>
         <p:nvSpPr>
-          <p:cNvPr id="5" name="TextBox 4"/>
-          <p:cNvSpPr txBox="1"/>
-          <p:nvPr/>
-        </p:nvSpPr>
-        <p:spPr>
-          <a:xfrm>
-            <a:off x="320040" y="1188720"/>
-            <a:ext cx="1737360" cy="365760"/>
-          </a:xfrm>
-          <a:prstGeom prst="rect">
-            <a:avLst/>
-          </a:prstGeom>
-          <a:noFill/>
-        </p:spPr>
-        <p:txBody>
-          <a:bodyPr wrap="square">
-            <a:spAutoFit/>
-          </a:bodyPr>
-          <a:lstStyle/>
-          <a:p>
-            <a:pPr algn="l">
-              <a:defRPr sz="1300" b="1">
-                <a:solidFill>
-                  <a:srgbClr val="0096D6"/>
-                </a:solidFill>
-              </a:defRPr>
-            </a:pPr>
-            <a:r>
-              <a:t>1 推理开销</a:t>
-            </a:r>
-          </a:p>
-        </p:txBody>
-      </p:sp>
-      <p:sp>
-        <p:nvSpPr>
-          <p:cNvPr id="6" name="TextBox 5"/>
-          <p:cNvSpPr txBox="1"/>
-          <p:nvPr/>
-        </p:nvSpPr>
-        <p:spPr>
-          <a:xfrm>
-            <a:off x="320040" y="1554480"/>
-            <a:ext cx="1737360" cy="-45719"/>
-          </a:xfrm>
-          <a:prstGeom prst="rect">
-            <a:avLst/>
-          </a:prstGeom>
-          <a:noFill/>
-        </p:spPr>
-        <p:txBody>
-          <a:bodyPr wrap="square">
-            <a:spAutoFit/>
-          </a:bodyPr>
-          <a:lstStyle/>
-          <a:p>
-            <a:pPr algn="l">
-              <a:defRPr sz="1100" b="0">
-                <a:solidFill>
-                  <a:srgbClr val="B0B8C8"/>
-                </a:solidFill>
-              </a:defRPr>
-            </a:pPr>
-          </a:p>
-        </p:txBody>
-      </p:sp>
-      <p:sp>
-        <p:nvSpPr>
-          <p:cNvPr id="7" name="Rectangle 6"/>
+          <p:cNvPr id="7" name="TextBox 6"/>
+          <p:cNvSpPr txBox="1"/>
+          <p:nvPr/>
+        </p:nvSpPr>
+        <p:spPr>
+          <a:xfrm>
+            <a:off x="5852160" y="914400"/>
+            <a:ext cx="365760" cy="320040"/>
+          </a:xfrm>
+          <a:prstGeom prst="rect">
+            <a:avLst/>
+          </a:prstGeom>
+          <a:noFill/>
+        </p:spPr>
+        <p:txBody>
+          <a:bodyPr wrap="square">
+            <a:spAutoFit/>
+          </a:bodyPr>
+          <a:lstStyle/>
+          <a:p>
+            <a:pPr>
+              <a:defRPr sz="900" b="1">
+                <a:solidFill>
+                  <a:srgbClr val="FFFFFF"/>
+                </a:solidFill>
+              </a:defRPr>
+            </a:pPr>
+            <a:r>
+              <a:t>#</a:t>
+            </a:r>
+          </a:p>
+        </p:txBody>
+      </p:sp>
+      <p:sp>
+        <p:nvSpPr>
+          <p:cNvPr id="8" name="Rectangle 7"/>
           <p:cNvSpPr/>
           <p:nvPr/>
         </p:nvSpPr>
         <p:spPr>
           <a:xfrm>
-            <a:off x="182880" y="1691640"/>
-            <a:ext cx="2011680" cy="502920"/>
+            <a:off x="6217920" y="914400"/>
+            <a:ext cx="2011680" cy="320040"/>
           </a:xfrm>
           <a:prstGeom prst="rect">
             <a:avLst/>
@@ -9028,68 +9055,36 @@
       </p:sp>
       <p:sp>
         <p:nvSpPr>
-          <p:cNvPr id="8" name="TextBox 7"/>
-          <p:cNvSpPr txBox="1"/>
-          <p:nvPr/>
-        </p:nvSpPr>
-        <p:spPr>
-          <a:xfrm>
-            <a:off x="320040" y="1783080"/>
-            <a:ext cx="1737360" cy="365760"/>
-          </a:xfrm>
-          <a:prstGeom prst="rect">
-            <a:avLst/>
-          </a:prstGeom>
-          <a:noFill/>
-        </p:spPr>
-        <p:txBody>
-          <a:bodyPr wrap="square">
-            <a:spAutoFit/>
-          </a:bodyPr>
-          <a:lstStyle/>
-          <a:p>
-            <a:pPr algn="l">
-              <a:defRPr sz="1300" b="1">
-                <a:solidFill>
-                  <a:srgbClr val="00C853"/>
-                </a:solidFill>
-              </a:defRPr>
-            </a:pPr>
-            <a:r>
-              <a:t>2 环境延迟</a:t>
-            </a:r>
-          </a:p>
-        </p:txBody>
-      </p:sp>
-      <p:sp>
-        <p:nvSpPr>
           <p:cNvPr id="9" name="TextBox 8"/>
           <p:cNvSpPr txBox="1"/>
           <p:nvPr/>
         </p:nvSpPr>
         <p:spPr>
           <a:xfrm>
-            <a:off x="320040" y="2148840"/>
-            <a:ext cx="1737360" cy="-45719"/>
-          </a:xfrm>
-          <a:prstGeom prst="rect">
-            <a:avLst/>
-          </a:prstGeom>
-          <a:noFill/>
-        </p:spPr>
-        <p:txBody>
-          <a:bodyPr wrap="square">
-            <a:spAutoFit/>
-          </a:bodyPr>
-          <a:lstStyle/>
-          <a:p>
-            <a:pPr algn="l">
-              <a:defRPr sz="1100" b="0">
-                <a:solidFill>
-                  <a:srgbClr val="B0B8C8"/>
-                </a:solidFill>
-              </a:defRPr>
-            </a:pPr>
+            <a:off x="6217920" y="914400"/>
+            <a:ext cx="2011680" cy="320040"/>
+          </a:xfrm>
+          <a:prstGeom prst="rect">
+            <a:avLst/>
+          </a:prstGeom>
+          <a:noFill/>
+        </p:spPr>
+        <p:txBody>
+          <a:bodyPr wrap="square">
+            <a:spAutoFit/>
+          </a:bodyPr>
+          <a:lstStyle/>
+          <a:p>
+            <a:pPr>
+              <a:defRPr sz="900" b="1">
+                <a:solidFill>
+                  <a:srgbClr val="FFFFFF"/>
+                </a:solidFill>
+              </a:defRPr>
+            </a:pPr>
+            <a:r>
+              <a:t>Upgrade Direction</a:t>
+            </a:r>
           </a:p>
         </p:txBody>
       </p:sp>
@@ -9101,8 +9096,8 @@
         </p:nvSpPr>
         <p:spPr>
           <a:xfrm>
-            <a:off x="182880" y="2286000"/>
-            <a:ext cx="2011680" cy="502920"/>
+            <a:off x="8229600" y="914400"/>
+            <a:ext cx="1097280" cy="320040"/>
           </a:xfrm>
           <a:prstGeom prst="rect">
             <a:avLst/>
@@ -9144,75 +9139,43 @@
         </p:nvSpPr>
         <p:spPr>
           <a:xfrm>
-            <a:off x="320040" y="2377440"/>
-            <a:ext cx="1737360" cy="365760"/>
-          </a:xfrm>
-          <a:prstGeom prst="rect">
-            <a:avLst/>
-          </a:prstGeom>
-          <a:noFill/>
-        </p:spPr>
-        <p:txBody>
-          <a:bodyPr wrap="square">
-            <a:spAutoFit/>
-          </a:bodyPr>
-          <a:lstStyle/>
-          <a:p>
-            <a:pPr algn="l">
-              <a:defRPr sz="1300" b="1">
-                <a:solidFill>
-                  <a:srgbClr val="00C853"/>
-                </a:solidFill>
-              </a:defRPr>
-            </a:pPr>
-            <a:r>
-              <a:t>3 数据吞吐</a:t>
-            </a:r>
-          </a:p>
-        </p:txBody>
-      </p:sp>
-      <p:sp>
-        <p:nvSpPr>
-          <p:cNvPr id="12" name="TextBox 11"/>
-          <p:cNvSpPr txBox="1"/>
-          <p:nvPr/>
-        </p:nvSpPr>
-        <p:spPr>
-          <a:xfrm>
-            <a:off x="320040" y="2743200"/>
-            <a:ext cx="1737360" cy="-45719"/>
-          </a:xfrm>
-          <a:prstGeom prst="rect">
-            <a:avLst/>
-          </a:prstGeom>
-          <a:noFill/>
-        </p:spPr>
-        <p:txBody>
-          <a:bodyPr wrap="square">
-            <a:spAutoFit/>
-          </a:bodyPr>
-          <a:lstStyle/>
-          <a:p>
-            <a:pPr algn="l">
-              <a:defRPr sz="1100" b="0">
-                <a:solidFill>
-                  <a:srgbClr val="B0B8C8"/>
-                </a:solidFill>
-              </a:defRPr>
-            </a:pPr>
-          </a:p>
-        </p:txBody>
-      </p:sp>
-      <p:sp>
-        <p:nvSpPr>
-          <p:cNvPr id="13" name="Rectangle 12"/>
+            <a:off x="8229600" y="914400"/>
+            <a:ext cx="1097280" cy="320040"/>
+          </a:xfrm>
+          <a:prstGeom prst="rect">
+            <a:avLst/>
+          </a:prstGeom>
+          <a:noFill/>
+        </p:spPr>
+        <p:txBody>
+          <a:bodyPr wrap="square">
+            <a:spAutoFit/>
+          </a:bodyPr>
+          <a:lstStyle/>
+          <a:p>
+            <a:pPr>
+              <a:defRPr sz="900" b="1">
+                <a:solidFill>
+                  <a:srgbClr val="FFFFFF"/>
+                </a:solidFill>
+              </a:defRPr>
+            </a:pPr>
+            <a:r>
+              <a:t>Challenge</a:t>
+            </a:r>
+          </a:p>
+        </p:txBody>
+      </p:sp>
+      <p:sp>
+        <p:nvSpPr>
+          <p:cNvPr id="12" name="Rectangle 11"/>
           <p:cNvSpPr/>
           <p:nvPr/>
         </p:nvSpPr>
         <p:spPr>
           <a:xfrm>
-            <a:off x="182880" y="2880360"/>
-            <a:ext cx="2011680" cy="502920"/>
+            <a:off x="9326880" y="914400"/>
+            <a:ext cx="2560320" cy="320040"/>
           </a:xfrm>
           <a:prstGeom prst="rect">
             <a:avLst/>
@@ -9248,87 +9211,90 @@
       </p:sp>
       <p:sp>
         <p:nvSpPr>
+          <p:cNvPr id="13" name="TextBox 12"/>
+          <p:cNvSpPr txBox="1"/>
+          <p:nvPr/>
+        </p:nvSpPr>
+        <p:spPr>
+          <a:xfrm>
+            <a:off x="9326880" y="914400"/>
+            <a:ext cx="2560320" cy="320040"/>
+          </a:xfrm>
+          <a:prstGeom prst="rect">
+            <a:avLst/>
+          </a:prstGeom>
+          <a:noFill/>
+        </p:spPr>
+        <p:txBody>
+          <a:bodyPr wrap="square">
+            <a:spAutoFit/>
+          </a:bodyPr>
+          <a:lstStyle/>
+          <a:p>
+            <a:pPr>
+              <a:defRPr sz="900" b="1">
+                <a:solidFill>
+                  <a:srgbClr val="FFFFFF"/>
+                </a:solidFill>
+              </a:defRPr>
+            </a:pPr>
+            <a:r>
+              <a:t>Key Technology</a:t>
+            </a:r>
+          </a:p>
+        </p:txBody>
+      </p:sp>
+      <p:sp>
+        <p:nvSpPr>
           <p:cNvPr id="14" name="TextBox 13"/>
           <p:cNvSpPr txBox="1"/>
           <p:nvPr/>
         </p:nvSpPr>
         <p:spPr>
           <a:xfrm>
-            <a:off x="320040" y="2971800"/>
-            <a:ext cx="1737360" cy="365760"/>
-          </a:xfrm>
-          <a:prstGeom prst="rect">
-            <a:avLst/>
-          </a:prstGeom>
-          <a:noFill/>
-        </p:spPr>
-        <p:txBody>
-          <a:bodyPr wrap="square">
-            <a:spAutoFit/>
-          </a:bodyPr>
-          <a:lstStyle/>
-          <a:p>
-            <a:pPr algn="l">
-              <a:defRPr sz="1300" b="1">
-                <a:solidFill>
-                  <a:srgbClr val="FF8C00"/>
-                </a:solidFill>
-              </a:defRPr>
-            </a:pPr>
-            <a:r>
-              <a:t>4 探索效率</a:t>
-            </a:r>
-          </a:p>
-        </p:txBody>
-      </p:sp>
-      <p:sp>
-        <p:nvSpPr>
-          <p:cNvPr id="15" name="TextBox 14"/>
-          <p:cNvSpPr txBox="1"/>
-          <p:nvPr/>
-        </p:nvSpPr>
-        <p:spPr>
-          <a:xfrm>
-            <a:off x="320040" y="3337560"/>
-            <a:ext cx="1737360" cy="-45719"/>
-          </a:xfrm>
-          <a:prstGeom prst="rect">
-            <a:avLst/>
-          </a:prstGeom>
-          <a:noFill/>
-        </p:spPr>
-        <p:txBody>
-          <a:bodyPr wrap="square">
-            <a:spAutoFit/>
-          </a:bodyPr>
-          <a:lstStyle/>
-          <a:p>
-            <a:pPr algn="l">
-              <a:defRPr sz="1100" b="0">
-                <a:solidFill>
-                  <a:srgbClr val="B0B8C8"/>
-                </a:solidFill>
-              </a:defRPr>
-            </a:pPr>
-          </a:p>
-        </p:txBody>
-      </p:sp>
-      <p:sp>
-        <p:nvSpPr>
-          <p:cNvPr id="16" name="Rectangle 15"/>
+            <a:off x="5760720" y="1243584"/>
+            <a:ext cx="6217920" cy="137160"/>
+          </a:xfrm>
+          <a:prstGeom prst="rect">
+            <a:avLst/>
+          </a:prstGeom>
+          <a:noFill/>
+        </p:spPr>
+        <p:txBody>
+          <a:bodyPr wrap="square">
+            <a:spAutoFit/>
+          </a:bodyPr>
+          <a:lstStyle/>
+          <a:p>
+            <a:pPr>
+              <a:defRPr sz="700" b="1">
+                <a:solidFill>
+                  <a:srgbClr val="0096D6"/>
+                </a:solidFill>
+              </a:defRPr>
+            </a:pPr>
+            <a:r>
+              <a:t>Infrastructure Layer</a:t>
+            </a:r>
+          </a:p>
+        </p:txBody>
+      </p:sp>
+      <p:sp>
+        <p:nvSpPr>
+          <p:cNvPr id="15" name="Rectangle 14"/>
           <p:cNvSpPr/>
           <p:nvPr/>
         </p:nvSpPr>
         <p:spPr>
           <a:xfrm>
-            <a:off x="182880" y="3474720"/>
-            <a:ext cx="2011680" cy="502920"/>
+            <a:off x="5852160" y="1380743"/>
+            <a:ext cx="365760" cy="384048"/>
           </a:xfrm>
           <a:prstGeom prst="rect">
             <a:avLst/>
           </a:prstGeom>
           <a:solidFill>
-            <a:srgbClr val="1B2A4A"/>
+            <a:srgbClr val="15223A"/>
           </a:solidFill>
           <a:ln>
             <a:noFill/>
@@ -9358,87 +9324,55 @@
       </p:sp>
       <p:sp>
         <p:nvSpPr>
-          <p:cNvPr id="17" name="TextBox 16"/>
-          <p:cNvSpPr txBox="1"/>
-          <p:nvPr/>
-        </p:nvSpPr>
-        <p:spPr>
-          <a:xfrm>
-            <a:off x="320040" y="3566160"/>
-            <a:ext cx="1737360" cy="365760"/>
-          </a:xfrm>
-          <a:prstGeom prst="rect">
-            <a:avLst/>
-          </a:prstGeom>
-          <a:noFill/>
-        </p:spPr>
-        <p:txBody>
-          <a:bodyPr wrap="square">
-            <a:spAutoFit/>
-          </a:bodyPr>
-          <a:lstStyle/>
-          <a:p>
-            <a:pPr algn="l">
-              <a:defRPr sz="1300" b="1">
-                <a:solidFill>
-                  <a:srgbClr val="FF8C00"/>
-                </a:solidFill>
-              </a:defRPr>
-            </a:pPr>
-            <a:r>
-              <a:t>5 奖励归因</a:t>
-            </a:r>
-          </a:p>
-        </p:txBody>
-      </p:sp>
-      <p:sp>
-        <p:nvSpPr>
-          <p:cNvPr id="18" name="TextBox 17"/>
-          <p:cNvSpPr txBox="1"/>
-          <p:nvPr/>
-        </p:nvSpPr>
-        <p:spPr>
-          <a:xfrm>
-            <a:off x="320040" y="3931920"/>
-            <a:ext cx="1737360" cy="-45719"/>
-          </a:xfrm>
-          <a:prstGeom prst="rect">
-            <a:avLst/>
-          </a:prstGeom>
-          <a:noFill/>
-        </p:spPr>
-        <p:txBody>
-          <a:bodyPr wrap="square">
-            <a:spAutoFit/>
-          </a:bodyPr>
-          <a:lstStyle/>
-          <a:p>
-            <a:pPr algn="l">
-              <a:defRPr sz="1100" b="0">
-                <a:solidFill>
-                  <a:srgbClr val="B0B8C8"/>
-                </a:solidFill>
-              </a:defRPr>
-            </a:pPr>
-          </a:p>
-        </p:txBody>
-      </p:sp>
-      <p:sp>
-        <p:nvSpPr>
-          <p:cNvPr id="19" name="Rectangle 18"/>
+          <p:cNvPr id="16" name="TextBox 15"/>
+          <p:cNvSpPr txBox="1"/>
+          <p:nvPr/>
+        </p:nvSpPr>
+        <p:spPr>
+          <a:xfrm>
+            <a:off x="5852160" y="1380743"/>
+            <a:ext cx="365760" cy="384048"/>
+          </a:xfrm>
+          <a:prstGeom prst="rect">
+            <a:avLst/>
+          </a:prstGeom>
+          <a:noFill/>
+        </p:spPr>
+        <p:txBody>
+          <a:bodyPr wrap="square">
+            <a:spAutoFit/>
+          </a:bodyPr>
+          <a:lstStyle/>
+          <a:p>
+            <a:pPr>
+              <a:defRPr sz="1100" b="1">
+                <a:solidFill>
+                  <a:srgbClr val="0096D6"/>
+                </a:solidFill>
+              </a:defRPr>
+            </a:pPr>
+            <a:r>
+              <a:t>A</a:t>
+            </a:r>
+          </a:p>
+        </p:txBody>
+      </p:sp>
+      <p:sp>
+        <p:nvSpPr>
+          <p:cNvPr id="17" name="Rectangle 16"/>
           <p:cNvSpPr/>
           <p:nvPr/>
         </p:nvSpPr>
         <p:spPr>
           <a:xfrm>
-            <a:off x="2560320" y="1097280"/>
-            <a:ext cx="4754880" cy="502920"/>
+            <a:off x="6217920" y="1380743"/>
+            <a:ext cx="2011680" cy="384048"/>
           </a:xfrm>
           <a:prstGeom prst="rect">
             <a:avLst/>
           </a:prstGeom>
           <a:solidFill>
-            <a:srgbClr val="1B2A4A"/>
+            <a:srgbClr val="15223A"/>
           </a:solidFill>
           <a:ln>
             <a:noFill/>
@@ -9468,90 +9402,55 @@
       </p:sp>
       <p:sp>
         <p:nvSpPr>
-          <p:cNvPr id="20" name="TextBox 19"/>
-          <p:cNvSpPr txBox="1"/>
-          <p:nvPr/>
-        </p:nvSpPr>
-        <p:spPr>
-          <a:xfrm>
-            <a:off x="2697479" y="1188720"/>
-            <a:ext cx="4480560" cy="365760"/>
-          </a:xfrm>
-          <a:prstGeom prst="rect">
-            <a:avLst/>
-          </a:prstGeom>
-          <a:noFill/>
-        </p:spPr>
-        <p:txBody>
-          <a:bodyPr wrap="square">
-            <a:spAutoFit/>
-          </a:bodyPr>
-          <a:lstStyle/>
-          <a:p>
-            <a:pPr algn="l">
-              <a:defRPr sz="1300" b="1">
-                <a:solidFill>
-                  <a:srgbClr val="0096D6"/>
-                </a:solidFill>
-              </a:defRPr>
-            </a:pPr>
-            <a:r>
-              <a:t>a KV Cache分布式池化 [基础设施]</a:t>
-            </a:r>
-          </a:p>
-        </p:txBody>
-      </p:sp>
-      <p:sp>
-        <p:nvSpPr>
-          <p:cNvPr id="21" name="TextBox 20"/>
-          <p:cNvSpPr txBox="1"/>
-          <p:nvPr/>
-        </p:nvSpPr>
-        <p:spPr>
-          <a:xfrm>
-            <a:off x="2697479" y="1554480"/>
-            <a:ext cx="4480560" cy="-45719"/>
-          </a:xfrm>
-          <a:prstGeom prst="rect">
-            <a:avLst/>
-          </a:prstGeom>
-          <a:noFill/>
-        </p:spPr>
-        <p:txBody>
-          <a:bodyPr wrap="square">
-            <a:spAutoFit/>
-          </a:bodyPr>
-          <a:lstStyle/>
-          <a:p>
-            <a:pPr algn="l">
-              <a:defRPr sz="1100" b="0">
+          <p:cNvPr id="18" name="TextBox 17"/>
+          <p:cNvSpPr txBox="1"/>
+          <p:nvPr/>
+        </p:nvSpPr>
+        <p:spPr>
+          <a:xfrm>
+            <a:off x="6217920" y="1380743"/>
+            <a:ext cx="2011680" cy="384048"/>
+          </a:xfrm>
+          <a:prstGeom prst="rect">
+            <a:avLst/>
+          </a:prstGeom>
+          <a:noFill/>
+        </p:spPr>
+        <p:txBody>
+          <a:bodyPr wrap="square">
+            <a:spAutoFit/>
+          </a:bodyPr>
+          <a:lstStyle/>
+          <a:p>
+            <a:pPr>
+              <a:defRPr sz="900" b="0">
                 <a:solidFill>
                   <a:srgbClr val="B0B8C8"/>
                 </a:solidFill>
               </a:defRPr>
             </a:pPr>
             <a:r>
-              <a:t>因为:KV数GB 否则:显存爆</a:t>
-            </a:r>
-          </a:p>
-        </p:txBody>
-      </p:sp>
-      <p:sp>
-        <p:nvSpPr>
-          <p:cNvPr id="22" name="Rectangle 21"/>
+              <a:t>KV Cache Storage</a:t>
+            </a:r>
+          </a:p>
+        </p:txBody>
+      </p:sp>
+      <p:sp>
+        <p:nvSpPr>
+          <p:cNvPr id="19" name="Rectangle 18"/>
           <p:cNvSpPr/>
           <p:nvPr/>
         </p:nvSpPr>
         <p:spPr>
           <a:xfrm>
-            <a:off x="2560320" y="1691640"/>
-            <a:ext cx="4754880" cy="502920"/>
+            <a:off x="8229600" y="1380743"/>
+            <a:ext cx="1097280" cy="384048"/>
           </a:xfrm>
           <a:prstGeom prst="rect">
             <a:avLst/>
           </a:prstGeom>
           <a:solidFill>
-            <a:srgbClr val="1B2A4A"/>
+            <a:srgbClr val="15223A"/>
           </a:solidFill>
           <a:ln>
             <a:noFill/>
@@ -9581,90 +9480,55 @@
       </p:sp>
       <p:sp>
         <p:nvSpPr>
-          <p:cNvPr id="23" name="TextBox 22"/>
-          <p:cNvSpPr txBox="1"/>
-          <p:nvPr/>
-        </p:nvSpPr>
-        <p:spPr>
-          <a:xfrm>
-            <a:off x="2697479" y="1783080"/>
-            <a:ext cx="4480560" cy="365760"/>
-          </a:xfrm>
-          <a:prstGeom prst="rect">
-            <a:avLst/>
-          </a:prstGeom>
-          <a:noFill/>
-        </p:spPr>
-        <p:txBody>
-          <a:bodyPr wrap="square">
-            <a:spAutoFit/>
-          </a:bodyPr>
-          <a:lstStyle/>
-          <a:p>
-            <a:pPr algn="l">
-              <a:defRPr sz="1300" b="1">
-                <a:solidFill>
-                  <a:srgbClr val="0096D6"/>
-                </a:solidFill>
-              </a:defRPr>
-            </a:pPr>
-            <a:r>
-              <a:t>b 推理加速 [基础设施]</a:t>
-            </a:r>
-          </a:p>
-        </p:txBody>
-      </p:sp>
-      <p:sp>
-        <p:nvSpPr>
-          <p:cNvPr id="24" name="TextBox 23"/>
-          <p:cNvSpPr txBox="1"/>
-          <p:nvPr/>
-        </p:nvSpPr>
-        <p:spPr>
-          <a:xfrm>
-            <a:off x="2697479" y="2148840"/>
-            <a:ext cx="4480560" cy="-45719"/>
-          </a:xfrm>
-          <a:prstGeom prst="rect">
-            <a:avLst/>
-          </a:prstGeom>
-          <a:noFill/>
-        </p:spPr>
-        <p:txBody>
-          <a:bodyPr wrap="square">
-            <a:spAutoFit/>
-          </a:bodyPr>
-          <a:lstStyle/>
-          <a:p>
-            <a:pPr algn="l">
-              <a:defRPr sz="1100" b="0">
+          <p:cNvPr id="20" name="TextBox 19"/>
+          <p:cNvSpPr txBox="1"/>
+          <p:nvPr/>
+        </p:nvSpPr>
+        <p:spPr>
+          <a:xfrm>
+            <a:off x="8229600" y="1380743"/>
+            <a:ext cx="1097280" cy="384048"/>
+          </a:xfrm>
+          <a:prstGeom prst="rect">
+            <a:avLst/>
+          </a:prstGeom>
+          <a:noFill/>
+        </p:spPr>
+        <p:txBody>
+          <a:bodyPr wrap="square">
+            <a:spAutoFit/>
+          </a:bodyPr>
+          <a:lstStyle/>
+          <a:p>
+            <a:pPr>
+              <a:defRPr sz="900" b="0">
                 <a:solidFill>
                   <a:srgbClr val="B0B8C8"/>
                 </a:solidFill>
               </a:defRPr>
             </a:pPr>
             <a:r>
-              <a:t>因为:70B放不下 否则:成本崩</a:t>
-            </a:r>
-          </a:p>
-        </p:txBody>
-      </p:sp>
-      <p:sp>
-        <p:nvSpPr>
-          <p:cNvPr id="25" name="Rectangle 24"/>
+              <a:t>1,2</a:t>
+            </a:r>
+          </a:p>
+        </p:txBody>
+      </p:sp>
+      <p:sp>
+        <p:nvSpPr>
+          <p:cNvPr id="21" name="Rectangle 20"/>
           <p:cNvSpPr/>
           <p:nvPr/>
         </p:nvSpPr>
         <p:spPr>
           <a:xfrm>
-            <a:off x="2560320" y="2286000"/>
-            <a:ext cx="4754880" cy="502920"/>
+            <a:off x="9326880" y="1380743"/>
+            <a:ext cx="2560320" cy="384048"/>
           </a:xfrm>
           <a:prstGeom prst="rect">
             <a:avLst/>
           </a:prstGeom>
           <a:solidFill>
-            <a:srgbClr val="1B2A4A"/>
+            <a:srgbClr val="15223A"/>
           </a:solidFill>
           <a:ln>
             <a:noFill/>
@@ -9694,90 +9558,55 @@
       </p:sp>
       <p:sp>
         <p:nvSpPr>
-          <p:cNvPr id="26" name="TextBox 25"/>
-          <p:cNvSpPr txBox="1"/>
-          <p:nvPr/>
-        </p:nvSpPr>
-        <p:spPr>
-          <a:xfrm>
-            <a:off x="2697479" y="2377440"/>
-            <a:ext cx="4480560" cy="365760"/>
-          </a:xfrm>
-          <a:prstGeom prst="rect">
-            <a:avLst/>
-          </a:prstGeom>
-          <a:noFill/>
-        </p:spPr>
-        <p:txBody>
-          <a:bodyPr wrap="square">
-            <a:spAutoFit/>
-          </a:bodyPr>
-          <a:lstStyle/>
-          <a:p>
-            <a:pPr algn="l">
-              <a:defRPr sz="1300" b="1">
-                <a:solidFill>
-                  <a:srgbClr val="0096D6"/>
-                </a:solidFill>
-              </a:defRPr>
-            </a:pPr>
-            <a:r>
-              <a:t>c sandbox并行化 [基础设施]</a:t>
-            </a:r>
-          </a:p>
-        </p:txBody>
-      </p:sp>
-      <p:sp>
-        <p:nvSpPr>
-          <p:cNvPr id="27" name="TextBox 26"/>
-          <p:cNvSpPr txBox="1"/>
-          <p:nvPr/>
-        </p:nvSpPr>
-        <p:spPr>
-          <a:xfrm>
-            <a:off x="2697479" y="2743200"/>
-            <a:ext cx="4480560" cy="-45719"/>
-          </a:xfrm>
-          <a:prstGeom prst="rect">
-            <a:avLst/>
-          </a:prstGeom>
-          <a:noFill/>
-        </p:spPr>
-        <p:txBody>
-          <a:bodyPr wrap="square">
-            <a:spAutoFit/>
-          </a:bodyPr>
-          <a:lstStyle/>
-          <a:p>
-            <a:pPr algn="l">
-              <a:defRPr sz="1100" b="0">
+          <p:cNvPr id="22" name="TextBox 21"/>
+          <p:cNvSpPr txBox="1"/>
+          <p:nvPr/>
+        </p:nvSpPr>
+        <p:spPr>
+          <a:xfrm>
+            <a:off x="9326880" y="1380743"/>
+            <a:ext cx="2560320" cy="384048"/>
+          </a:xfrm>
+          <a:prstGeom prst="rect">
+            <a:avLst/>
+          </a:prstGeom>
+          <a:noFill/>
+        </p:spPr>
+        <p:txBody>
+          <a:bodyPr wrap="square">
+            <a:spAutoFit/>
+          </a:bodyPr>
+          <a:lstStyle/>
+          <a:p>
+            <a:pPr>
+              <a:defRPr sz="900" b="0">
                 <a:solidFill>
                   <a:srgbClr val="B0B8C8"/>
                 </a:solidFill>
               </a:defRPr>
             </a:pPr>
             <a:r>
-              <a:t>因为:EP分钟级 否则:吞吐塞</a:t>
-            </a:r>
-          </a:p>
-        </p:txBody>
-      </p:sp>
-      <p:sp>
-        <p:nvSpPr>
-          <p:cNvPr id="28" name="Rectangle 27"/>
+              <a:t>LMCache / Mooncake</a:t>
+            </a:r>
+          </a:p>
+        </p:txBody>
+      </p:sp>
+      <p:sp>
+        <p:nvSpPr>
+          <p:cNvPr id="23" name="Rectangle 22"/>
           <p:cNvSpPr/>
           <p:nvPr/>
         </p:nvSpPr>
         <p:spPr>
           <a:xfrm>
-            <a:off x="2560320" y="2880360"/>
-            <a:ext cx="4754880" cy="502920"/>
+            <a:off x="5852160" y="1764792"/>
+            <a:ext cx="365760" cy="384048"/>
           </a:xfrm>
           <a:prstGeom prst="rect">
             <a:avLst/>
           </a:prstGeom>
           <a:solidFill>
-            <a:srgbClr val="1B2A4A"/>
+            <a:srgbClr val="15223A"/>
           </a:solidFill>
           <a:ln>
             <a:noFill/>
@@ -9807,90 +9636,55 @@
       </p:sp>
       <p:sp>
         <p:nvSpPr>
-          <p:cNvPr id="29" name="TextBox 28"/>
-          <p:cNvSpPr txBox="1"/>
-          <p:nvPr/>
-        </p:nvSpPr>
-        <p:spPr>
-          <a:xfrm>
-            <a:off x="2697479" y="2971800"/>
-            <a:ext cx="4480560" cy="365760"/>
-          </a:xfrm>
-          <a:prstGeom prst="rect">
-            <a:avLst/>
-          </a:prstGeom>
-          <a:noFill/>
-        </p:spPr>
-        <p:txBody>
-          <a:bodyPr wrap="square">
-            <a:spAutoFit/>
-          </a:bodyPr>
-          <a:lstStyle/>
-          <a:p>
-            <a:pPr algn="l">
-              <a:defRPr sz="1300" b="1">
-                <a:solidFill>
-                  <a:srgbClr val="00C853"/>
-                </a:solidFill>
-              </a:defRPr>
-            </a:pPr>
-            <a:r>
-              <a:t>d 训推解耦 [框架]</a:t>
-            </a:r>
-          </a:p>
-        </p:txBody>
-      </p:sp>
-      <p:sp>
-        <p:nvSpPr>
-          <p:cNvPr id="30" name="TextBox 29"/>
-          <p:cNvSpPr txBox="1"/>
-          <p:nvPr/>
-        </p:nvSpPr>
-        <p:spPr>
-          <a:xfrm>
-            <a:off x="2697479" y="3337560"/>
-            <a:ext cx="4480560" cy="-45719"/>
-          </a:xfrm>
-          <a:prstGeom prst="rect">
-            <a:avLst/>
-          </a:prstGeom>
-          <a:noFill/>
-        </p:spPr>
-        <p:txBody>
-          <a:bodyPr wrap="square">
-            <a:spAutoFit/>
-          </a:bodyPr>
-          <a:lstStyle/>
-          <a:p>
-            <a:pPr algn="l">
-              <a:defRPr sz="1100" b="0">
-                <a:solidFill>
-                  <a:srgbClr val="B0B8C8"/>
-                </a:solidFill>
-              </a:defRPr>
-            </a:pPr>
-            <a:r>
-              <a:t>因为:I/O阻塞 否则:GPU空转</a:t>
-            </a:r>
-          </a:p>
-        </p:txBody>
-      </p:sp>
-      <p:sp>
-        <p:nvSpPr>
-          <p:cNvPr id="31" name="Rectangle 30"/>
+          <p:cNvPr id="24" name="TextBox 23"/>
+          <p:cNvSpPr txBox="1"/>
+          <p:nvPr/>
+        </p:nvSpPr>
+        <p:spPr>
+          <a:xfrm>
+            <a:off x="5852160" y="1764792"/>
+            <a:ext cx="365760" cy="384048"/>
+          </a:xfrm>
+          <a:prstGeom prst="rect">
+            <a:avLst/>
+          </a:prstGeom>
+          <a:noFill/>
+        </p:spPr>
+        <p:txBody>
+          <a:bodyPr wrap="square">
+            <a:spAutoFit/>
+          </a:bodyPr>
+          <a:lstStyle/>
+          <a:p>
+            <a:pPr>
+              <a:defRPr sz="1100" b="1">
+                <a:solidFill>
+                  <a:srgbClr val="0096D6"/>
+                </a:solidFill>
+              </a:defRPr>
+            </a:pPr>
+            <a:r>
+              <a:t>B</a:t>
+            </a:r>
+          </a:p>
+        </p:txBody>
+      </p:sp>
+      <p:sp>
+        <p:nvSpPr>
+          <p:cNvPr id="25" name="Rectangle 24"/>
           <p:cNvSpPr/>
           <p:nvPr/>
         </p:nvSpPr>
         <p:spPr>
           <a:xfrm>
-            <a:off x="2560320" y="3474720"/>
-            <a:ext cx="4754880" cy="502920"/>
+            <a:off x="6217920" y="1764792"/>
+            <a:ext cx="2011680" cy="384048"/>
           </a:xfrm>
           <a:prstGeom prst="rect">
             <a:avLst/>
           </a:prstGeom>
           <a:solidFill>
-            <a:srgbClr val="1B2A4A"/>
+            <a:srgbClr val="15223A"/>
           </a:solidFill>
           <a:ln>
             <a:noFill/>
@@ -9920,90 +9714,55 @@
       </p:sp>
       <p:sp>
         <p:nvSpPr>
-          <p:cNvPr id="32" name="TextBox 31"/>
-          <p:cNvSpPr txBox="1"/>
-          <p:nvPr/>
-        </p:nvSpPr>
-        <p:spPr>
-          <a:xfrm>
-            <a:off x="2697479" y="3566160"/>
-            <a:ext cx="4480560" cy="365760"/>
-          </a:xfrm>
-          <a:prstGeom prst="rect">
-            <a:avLst/>
-          </a:prstGeom>
-          <a:noFill/>
-        </p:spPr>
-        <p:txBody>
-          <a:bodyPr wrap="square">
-            <a:spAutoFit/>
-          </a:bodyPr>
-          <a:lstStyle/>
-          <a:p>
-            <a:pPr algn="l">
-              <a:defRPr sz="1300" b="1">
-                <a:solidFill>
-                  <a:srgbClr val="00C853"/>
-                </a:solidFill>
-              </a:defRPr>
-            </a:pPr>
-            <a:r>
-              <a:t>e 异步调度 [框架]</a:t>
-            </a:r>
-          </a:p>
-        </p:txBody>
-      </p:sp>
-      <p:sp>
-        <p:nvSpPr>
-          <p:cNvPr id="33" name="TextBox 32"/>
-          <p:cNvSpPr txBox="1"/>
-          <p:nvPr/>
-        </p:nvSpPr>
-        <p:spPr>
-          <a:xfrm>
-            <a:off x="2697479" y="3931920"/>
-            <a:ext cx="4480560" cy="-45719"/>
-          </a:xfrm>
-          <a:prstGeom prst="rect">
-            <a:avLst/>
-          </a:prstGeom>
-          <a:noFill/>
-        </p:spPr>
-        <p:txBody>
-          <a:bodyPr wrap="square">
-            <a:spAutoFit/>
-          </a:bodyPr>
-          <a:lstStyle/>
-          <a:p>
-            <a:pPr algn="l">
-              <a:defRPr sz="1100" b="0">
+          <p:cNvPr id="26" name="TextBox 25"/>
+          <p:cNvSpPr txBox="1"/>
+          <p:nvPr/>
+        </p:nvSpPr>
+        <p:spPr>
+          <a:xfrm>
+            <a:off x="6217920" y="1764792"/>
+            <a:ext cx="2011680" cy="384048"/>
+          </a:xfrm>
+          <a:prstGeom prst="rect">
+            <a:avLst/>
+          </a:prstGeom>
+          <a:noFill/>
+        </p:spPr>
+        <p:txBody>
+          <a:bodyPr wrap="square">
+            <a:spAutoFit/>
+          </a:bodyPr>
+          <a:lstStyle/>
+          <a:p>
+            <a:pPr>
+              <a:defRPr sz="900" b="0">
                 <a:solidFill>
                   <a:srgbClr val="B0B8C8"/>
                 </a:solidFill>
               </a:defRPr>
             </a:pPr>
             <a:r>
-              <a:t>因为:流式产生 否则:等待空转</a:t>
-            </a:r>
-          </a:p>
-        </p:txBody>
-      </p:sp>
-      <p:sp>
-        <p:nvSpPr>
-          <p:cNvPr id="34" name="Rectangle 33"/>
+              <a:t>Sandbox Orchestration</a:t>
+            </a:r>
+          </a:p>
+        </p:txBody>
+      </p:sp>
+      <p:sp>
+        <p:nvSpPr>
+          <p:cNvPr id="27" name="Rectangle 26"/>
           <p:cNvSpPr/>
           <p:nvPr/>
         </p:nvSpPr>
         <p:spPr>
           <a:xfrm>
-            <a:off x="2560320" y="4069080"/>
-            <a:ext cx="4754880" cy="502920"/>
+            <a:off x="8229600" y="1764792"/>
+            <a:ext cx="1097280" cy="384048"/>
           </a:xfrm>
           <a:prstGeom prst="rect">
             <a:avLst/>
           </a:prstGeom>
           <a:solidFill>
-            <a:srgbClr val="1B2A4A"/>
+            <a:srgbClr val="15223A"/>
           </a:solidFill>
           <a:ln>
             <a:noFill/>
@@ -10033,90 +9792,55 @@
       </p:sp>
       <p:sp>
         <p:nvSpPr>
-          <p:cNvPr id="35" name="TextBox 34"/>
-          <p:cNvSpPr txBox="1"/>
-          <p:nvPr/>
-        </p:nvSpPr>
-        <p:spPr>
-          <a:xfrm>
-            <a:off x="2697479" y="4160520"/>
-            <a:ext cx="4480560" cy="365760"/>
-          </a:xfrm>
-          <a:prstGeom prst="rect">
-            <a:avLst/>
-          </a:prstGeom>
-          <a:noFill/>
-        </p:spPr>
-        <p:txBody>
-          <a:bodyPr wrap="square">
-            <a:spAutoFit/>
-          </a:bodyPr>
-          <a:lstStyle/>
-          <a:p>
-            <a:pPr algn="l">
-              <a:defRPr sz="1300" b="1">
-                <a:solidFill>
-                  <a:srgbClr val="FF8C00"/>
-                </a:solidFill>
-              </a:defRPr>
-            </a:pPr>
-            <a:r>
-              <a:t>f off-policy容忍 [算法]</a:t>
-            </a:r>
-          </a:p>
-        </p:txBody>
-      </p:sp>
-      <p:sp>
-        <p:nvSpPr>
-          <p:cNvPr id="36" name="TextBox 35"/>
-          <p:cNvSpPr txBox="1"/>
-          <p:nvPr/>
-        </p:nvSpPr>
-        <p:spPr>
-          <a:xfrm>
-            <a:off x="2697479" y="4526280"/>
-            <a:ext cx="4480560" cy="-45719"/>
-          </a:xfrm>
-          <a:prstGeom prst="rect">
-            <a:avLst/>
-          </a:prstGeom>
-          <a:noFill/>
-        </p:spPr>
-        <p:txBody>
-          <a:bodyPr wrap="square">
-            <a:spAutoFit/>
-          </a:bodyPr>
-          <a:lstStyle/>
-          <a:p>
-            <a:pPr algn="l">
-              <a:defRPr sz="1100" b="0">
+          <p:cNvPr id="28" name="TextBox 27"/>
+          <p:cNvSpPr txBox="1"/>
+          <p:nvPr/>
+        </p:nvSpPr>
+        <p:spPr>
+          <a:xfrm>
+            <a:off x="8229600" y="1764792"/>
+            <a:ext cx="1097280" cy="384048"/>
+          </a:xfrm>
+          <a:prstGeom prst="rect">
+            <a:avLst/>
+          </a:prstGeom>
+          <a:noFill/>
+        </p:spPr>
+        <p:txBody>
+          <a:bodyPr wrap="square">
+            <a:spAutoFit/>
+          </a:bodyPr>
+          <a:lstStyle/>
+          <a:p>
+            <a:pPr>
+              <a:defRPr sz="900" b="0">
                 <a:solidFill>
                   <a:srgbClr val="B0B8C8"/>
                 </a:solidFill>
               </a:defRPr>
             </a:pPr>
             <a:r>
-              <a:t>因为:数据过时 否则:训练发散</a:t>
-            </a:r>
-          </a:p>
-        </p:txBody>
-      </p:sp>
-      <p:sp>
-        <p:nvSpPr>
-          <p:cNvPr id="37" name="Rectangle 36"/>
+              <a:t>2</a:t>
+            </a:r>
+          </a:p>
+        </p:txBody>
+      </p:sp>
+      <p:sp>
+        <p:nvSpPr>
+          <p:cNvPr id="29" name="Rectangle 28"/>
           <p:cNvSpPr/>
           <p:nvPr/>
         </p:nvSpPr>
         <p:spPr>
           <a:xfrm>
-            <a:off x="2560320" y="4434840"/>
-            <a:ext cx="4754880" cy="457200"/>
+            <a:off x="9326880" y="1764792"/>
+            <a:ext cx="2560320" cy="384048"/>
           </a:xfrm>
           <a:prstGeom prst="rect">
             <a:avLst/>
           </a:prstGeom>
           <a:solidFill>
-            <a:srgbClr val="1B2A4A"/>
+            <a:srgbClr val="15223A"/>
           </a:solidFill>
           <a:ln>
             <a:noFill/>
@@ -10146,90 +9870,55 @@
       </p:sp>
       <p:sp>
         <p:nvSpPr>
-          <p:cNvPr id="38" name="TextBox 37"/>
-          <p:cNvSpPr txBox="1"/>
-          <p:nvPr/>
-        </p:nvSpPr>
-        <p:spPr>
-          <a:xfrm>
-            <a:off x="2697479" y="4526279"/>
-            <a:ext cx="4480560" cy="365760"/>
-          </a:xfrm>
-          <a:prstGeom prst="rect">
-            <a:avLst/>
-          </a:prstGeom>
-          <a:noFill/>
-        </p:spPr>
-        <p:txBody>
-          <a:bodyPr wrap="square">
-            <a:spAutoFit/>
-          </a:bodyPr>
-          <a:lstStyle/>
-          <a:p>
-            <a:pPr algn="l">
-              <a:defRPr sz="1300" b="1">
-                <a:solidFill>
-                  <a:srgbClr val="FF8C00"/>
-                </a:solidFill>
-              </a:defRPr>
-            </a:pPr>
-            <a:r>
-              <a:t>g 步级归因 [算法]</a:t>
-            </a:r>
-          </a:p>
-        </p:txBody>
-      </p:sp>
-      <p:sp>
-        <p:nvSpPr>
-          <p:cNvPr id="39" name="TextBox 38"/>
-          <p:cNvSpPr txBox="1"/>
-          <p:nvPr/>
-        </p:nvSpPr>
-        <p:spPr>
-          <a:xfrm>
-            <a:off x="2697479" y="4892040"/>
-            <a:ext cx="4480560" cy="-91439"/>
-          </a:xfrm>
-          <a:prstGeom prst="rect">
-            <a:avLst/>
-          </a:prstGeom>
-          <a:noFill/>
-        </p:spPr>
-        <p:txBody>
-          <a:bodyPr wrap="square">
-            <a:spAutoFit/>
-          </a:bodyPr>
-          <a:lstStyle/>
-          <a:p>
-            <a:pPr algn="l">
-              <a:defRPr sz="1100" b="0">
+          <p:cNvPr id="30" name="TextBox 29"/>
+          <p:cNvSpPr txBox="1"/>
+          <p:nvPr/>
+        </p:nvSpPr>
+        <p:spPr>
+          <a:xfrm>
+            <a:off x="9326880" y="1764792"/>
+            <a:ext cx="2560320" cy="384048"/>
+          </a:xfrm>
+          <a:prstGeom prst="rect">
+            <a:avLst/>
+          </a:prstGeom>
+          <a:noFill/>
+        </p:spPr>
+        <p:txBody>
+          <a:bodyPr wrap="square">
+            <a:spAutoFit/>
+          </a:bodyPr>
+          <a:lstStyle/>
+          <a:p>
+            <a:pPr>
+              <a:defRPr sz="900" b="0">
                 <a:solidFill>
                   <a:srgbClr val="B0B8C8"/>
                 </a:solidFill>
               </a:defRPr>
             </a:pPr>
             <a:r>
-              <a:t>因为:奖励太粗 否则:84%浪费</a:t>
-            </a:r>
-          </a:p>
-        </p:txBody>
-      </p:sp>
-      <p:sp>
-        <p:nvSpPr>
-          <p:cNvPr id="40" name="Rectangle 39"/>
+              <a:t>Forge / Pool+Preheat</a:t>
+            </a:r>
+          </a:p>
+        </p:txBody>
+      </p:sp>
+      <p:sp>
+        <p:nvSpPr>
+          <p:cNvPr id="31" name="Rectangle 30"/>
           <p:cNvSpPr/>
           <p:nvPr/>
         </p:nvSpPr>
         <p:spPr>
           <a:xfrm>
-            <a:off x="2560320" y="4937760"/>
-            <a:ext cx="4754880" cy="457200"/>
+            <a:off x="5852160" y="2267712"/>
+            <a:ext cx="365760" cy="384048"/>
           </a:xfrm>
           <a:prstGeom prst="rect">
             <a:avLst/>
           </a:prstGeom>
           <a:solidFill>
-            <a:srgbClr val="1B2A4A"/>
+            <a:srgbClr val="15223A"/>
           </a:solidFill>
           <a:ln>
             <a:noFill/>
@@ -10259,90 +9948,55 @@
       </p:sp>
       <p:sp>
         <p:nvSpPr>
-          <p:cNvPr id="41" name="TextBox 40"/>
-          <p:cNvSpPr txBox="1"/>
-          <p:nvPr/>
-        </p:nvSpPr>
-        <p:spPr>
-          <a:xfrm>
-            <a:off x="2697479" y="5029200"/>
-            <a:ext cx="4480560" cy="365760"/>
-          </a:xfrm>
-          <a:prstGeom prst="rect">
-            <a:avLst/>
-          </a:prstGeom>
-          <a:noFill/>
-        </p:spPr>
-        <p:txBody>
-          <a:bodyPr wrap="square">
-            <a:spAutoFit/>
-          </a:bodyPr>
-          <a:lstStyle/>
-          <a:p>
-            <a:pPr algn="l">
-              <a:defRPr sz="1300" b="1">
-                <a:solidFill>
-                  <a:srgbClr val="FF8C00"/>
-                </a:solidFill>
-              </a:defRPr>
-            </a:pPr>
-            <a:r>
-              <a:t>h 上下文自压缩 [算法]</a:t>
-            </a:r>
-          </a:p>
-        </p:txBody>
-      </p:sp>
-      <p:sp>
-        <p:nvSpPr>
-          <p:cNvPr id="42" name="TextBox 41"/>
-          <p:cNvSpPr txBox="1"/>
-          <p:nvPr/>
-        </p:nvSpPr>
-        <p:spPr>
-          <a:xfrm>
-            <a:off x="2697479" y="5394960"/>
-            <a:ext cx="4480560" cy="-91439"/>
-          </a:xfrm>
-          <a:prstGeom prst="rect">
-            <a:avLst/>
-          </a:prstGeom>
-          <a:noFill/>
-        </p:spPr>
-        <p:txBody>
-          <a:bodyPr wrap="square">
-            <a:spAutoFit/>
-          </a:bodyPr>
-          <a:lstStyle/>
-          <a:p>
-            <a:pPr algn="l">
-              <a:defRPr sz="1100" b="0">
-                <a:solidFill>
-                  <a:srgbClr val="B0B8C8"/>
-                </a:solidFill>
-              </a:defRPr>
-            </a:pPr>
-            <a:r>
-              <a:t>因为:M级上下文爆炸 否则:truncation丢信息</a:t>
-            </a:r>
-          </a:p>
-        </p:txBody>
-      </p:sp>
-      <p:sp>
-        <p:nvSpPr>
-          <p:cNvPr id="43" name="Rectangle 42"/>
+          <p:cNvPr id="32" name="TextBox 31"/>
+          <p:cNvSpPr txBox="1"/>
+          <p:nvPr/>
+        </p:nvSpPr>
+        <p:spPr>
+          <a:xfrm>
+            <a:off x="5852160" y="2267712"/>
+            <a:ext cx="365760" cy="384048"/>
+          </a:xfrm>
+          <a:prstGeom prst="rect">
+            <a:avLst/>
+          </a:prstGeom>
+          <a:noFill/>
+        </p:spPr>
+        <p:txBody>
+          <a:bodyPr wrap="square">
+            <a:spAutoFit/>
+          </a:bodyPr>
+          <a:lstStyle/>
+          <a:p>
+            <a:pPr>
+              <a:defRPr sz="1100" b="1">
+                <a:solidFill>
+                  <a:srgbClr val="0096D6"/>
+                </a:solidFill>
+              </a:defRPr>
+            </a:pPr>
+            <a:r>
+              <a:t>I</a:t>
+            </a:r>
+          </a:p>
+        </p:txBody>
+      </p:sp>
+      <p:sp>
+        <p:nvSpPr>
+          <p:cNvPr id="33" name="Rectangle 32"/>
           <p:cNvSpPr/>
           <p:nvPr/>
         </p:nvSpPr>
         <p:spPr>
           <a:xfrm>
-            <a:off x="7680960" y="1097280"/>
-            <a:ext cx="4114800" cy="502920"/>
+            <a:off x="6217920" y="2267712"/>
+            <a:ext cx="2011680" cy="384048"/>
           </a:xfrm>
           <a:prstGeom prst="rect">
             <a:avLst/>
           </a:prstGeom>
           <a:solidFill>
-            <a:srgbClr val="1B2A4A"/>
+            <a:srgbClr val="15223A"/>
           </a:solidFill>
           <a:ln>
             <a:noFill/>
@@ -10372,87 +10026,55 @@
       </p:sp>
       <p:sp>
         <p:nvSpPr>
-          <p:cNvPr id="44" name="TextBox 43"/>
-          <p:cNvSpPr txBox="1"/>
-          <p:nvPr/>
-        </p:nvSpPr>
-        <p:spPr>
-          <a:xfrm>
-            <a:off x="7818120" y="1188720"/>
-            <a:ext cx="3840480" cy="365760"/>
-          </a:xfrm>
-          <a:prstGeom prst="rect">
-            <a:avLst/>
-          </a:prstGeom>
-          <a:noFill/>
-        </p:spPr>
-        <p:txBody>
-          <a:bodyPr wrap="square">
-            <a:spAutoFit/>
-          </a:bodyPr>
-          <a:lstStyle/>
-          <a:p>
-            <a:pPr algn="l">
-              <a:defRPr sz="1300" b="1">
-                <a:solidFill>
-                  <a:srgbClr val="0096D6"/>
-                </a:solidFill>
-              </a:defRPr>
-            </a:pPr>
-            <a:r>
-              <a:t>LMCache / Mooncake</a:t>
-            </a:r>
-          </a:p>
-        </p:txBody>
-      </p:sp>
-      <p:sp>
-        <p:nvSpPr>
-          <p:cNvPr id="45" name="TextBox 44"/>
-          <p:cNvSpPr txBox="1"/>
-          <p:nvPr/>
-        </p:nvSpPr>
-        <p:spPr>
-          <a:xfrm>
-            <a:off x="7818120" y="1554480"/>
-            <a:ext cx="3840480" cy="-45719"/>
-          </a:xfrm>
-          <a:prstGeom prst="rect">
-            <a:avLst/>
-          </a:prstGeom>
-          <a:noFill/>
-        </p:spPr>
-        <p:txBody>
-          <a:bodyPr wrap="square">
-            <a:spAutoFit/>
-          </a:bodyPr>
-          <a:lstStyle/>
-          <a:p>
-            <a:pPr algn="l">
-              <a:defRPr sz="1100" b="0">
+          <p:cNvPr id="34" name="TextBox 33"/>
+          <p:cNvSpPr txBox="1"/>
+          <p:nvPr/>
+        </p:nvSpPr>
+        <p:spPr>
+          <a:xfrm>
+            <a:off x="6217920" y="2267712"/>
+            <a:ext cx="2011680" cy="384048"/>
+          </a:xfrm>
+          <a:prstGeom prst="rect">
+            <a:avLst/>
+          </a:prstGeom>
+          <a:noFill/>
+        </p:spPr>
+        <p:txBody>
+          <a:bodyPr wrap="square">
+            <a:spAutoFit/>
+          </a:bodyPr>
+          <a:lstStyle/>
+          <a:p>
+            <a:pPr>
+              <a:defRPr sz="900" b="0">
                 <a:solidFill>
                   <a:srgbClr val="B0B8C8"/>
                 </a:solidFill>
               </a:defRPr>
             </a:pPr>
-          </a:p>
-        </p:txBody>
-      </p:sp>
-      <p:sp>
-        <p:nvSpPr>
-          <p:cNvPr id="46" name="Rectangle 45"/>
+            <a:r>
+              <a:t>Operator Precision Align</a:t>
+            </a:r>
+          </a:p>
+        </p:txBody>
+      </p:sp>
+      <p:sp>
+        <p:nvSpPr>
+          <p:cNvPr id="35" name="Rectangle 34"/>
           <p:cNvSpPr/>
           <p:nvPr/>
         </p:nvSpPr>
         <p:spPr>
           <a:xfrm>
-            <a:off x="7680960" y="1691640"/>
-            <a:ext cx="4114800" cy="502920"/>
+            <a:off x="8229600" y="2267712"/>
+            <a:ext cx="1097280" cy="384048"/>
           </a:xfrm>
           <a:prstGeom prst="rect">
             <a:avLst/>
           </a:prstGeom>
           <a:solidFill>
-            <a:srgbClr val="1B2A4A"/>
+            <a:srgbClr val="15223A"/>
           </a:solidFill>
           <a:ln>
             <a:noFill/>
@@ -10482,87 +10104,55 @@
       </p:sp>
       <p:sp>
         <p:nvSpPr>
-          <p:cNvPr id="47" name="TextBox 46"/>
-          <p:cNvSpPr txBox="1"/>
-          <p:nvPr/>
-        </p:nvSpPr>
-        <p:spPr>
-          <a:xfrm>
-            <a:off x="7818120" y="1783080"/>
-            <a:ext cx="3840480" cy="365760"/>
-          </a:xfrm>
-          <a:prstGeom prst="rect">
-            <a:avLst/>
-          </a:prstGeom>
-          <a:noFill/>
-        </p:spPr>
-        <p:txBody>
-          <a:bodyPr wrap="square">
-            <a:spAutoFit/>
-          </a:bodyPr>
-          <a:lstStyle/>
-          <a:p>
-            <a:pPr algn="l">
-              <a:defRPr sz="1300" b="1">
-                <a:solidFill>
-                  <a:srgbClr val="0096D6"/>
-                </a:solidFill>
-              </a:defRPr>
-            </a:pPr>
-            <a:r>
-              <a:t>Eagle3 / 4bit量化</a:t>
-            </a:r>
-          </a:p>
-        </p:txBody>
-      </p:sp>
-      <p:sp>
-        <p:nvSpPr>
-          <p:cNvPr id="48" name="TextBox 47"/>
-          <p:cNvSpPr txBox="1"/>
-          <p:nvPr/>
-        </p:nvSpPr>
-        <p:spPr>
-          <a:xfrm>
-            <a:off x="7818120" y="2148840"/>
-            <a:ext cx="3840480" cy="-45719"/>
-          </a:xfrm>
-          <a:prstGeom prst="rect">
-            <a:avLst/>
-          </a:prstGeom>
-          <a:noFill/>
-        </p:spPr>
-        <p:txBody>
-          <a:bodyPr wrap="square">
-            <a:spAutoFit/>
-          </a:bodyPr>
-          <a:lstStyle/>
-          <a:p>
-            <a:pPr algn="l">
-              <a:defRPr sz="1100" b="0">
+          <p:cNvPr id="36" name="TextBox 35"/>
+          <p:cNvSpPr txBox="1"/>
+          <p:nvPr/>
+        </p:nvSpPr>
+        <p:spPr>
+          <a:xfrm>
+            <a:off x="8229600" y="2267712"/>
+            <a:ext cx="1097280" cy="384048"/>
+          </a:xfrm>
+          <a:prstGeom prst="rect">
+            <a:avLst/>
+          </a:prstGeom>
+          <a:noFill/>
+        </p:spPr>
+        <p:txBody>
+          <a:bodyPr wrap="square">
+            <a:spAutoFit/>
+          </a:bodyPr>
+          <a:lstStyle/>
+          <a:p>
+            <a:pPr>
+              <a:defRPr sz="900" b="0">
                 <a:solidFill>
                   <a:srgbClr val="B0B8C8"/>
                 </a:solidFill>
               </a:defRPr>
             </a:pPr>
-          </a:p>
-        </p:txBody>
-      </p:sp>
-      <p:sp>
-        <p:nvSpPr>
-          <p:cNvPr id="49" name="Rectangle 48"/>
+            <a:r>
+              <a:t>6</a:t>
+            </a:r>
+          </a:p>
+        </p:txBody>
+      </p:sp>
+      <p:sp>
+        <p:nvSpPr>
+          <p:cNvPr id="37" name="Rectangle 36"/>
           <p:cNvSpPr/>
           <p:nvPr/>
         </p:nvSpPr>
         <p:spPr>
           <a:xfrm>
-            <a:off x="7680960" y="2286000"/>
-            <a:ext cx="4114800" cy="502920"/>
+            <a:off x="9326880" y="2267712"/>
+            <a:ext cx="2560320" cy="384048"/>
           </a:xfrm>
           <a:prstGeom prst="rect">
             <a:avLst/>
           </a:prstGeom>
           <a:solidFill>
-            <a:srgbClr val="1B2A4A"/>
+            <a:srgbClr val="15223A"/>
           </a:solidFill>
           <a:ln>
             <a:noFill/>
@@ -10592,87 +10182,90 @@
       </p:sp>
       <p:sp>
         <p:nvSpPr>
-          <p:cNvPr id="50" name="TextBox 49"/>
-          <p:cNvSpPr txBox="1"/>
-          <p:nvPr/>
-        </p:nvSpPr>
-        <p:spPr>
-          <a:xfrm>
-            <a:off x="7818120" y="2377440"/>
-            <a:ext cx="3840480" cy="365760"/>
-          </a:xfrm>
-          <a:prstGeom prst="rect">
-            <a:avLst/>
-          </a:prstGeom>
-          <a:noFill/>
-        </p:spPr>
-        <p:txBody>
-          <a:bodyPr wrap="square">
-            <a:spAutoFit/>
-          </a:bodyPr>
-          <a:lstStyle/>
-          <a:p>
-            <a:pPr algn="l">
-              <a:defRPr sz="1300" b="1">
-                <a:solidFill>
-                  <a:srgbClr val="0096D6"/>
-                </a:solidFill>
-              </a:defRPr>
-            </a:pPr>
-            <a:r>
-              <a:t>Forge</a:t>
-            </a:r>
-          </a:p>
-        </p:txBody>
-      </p:sp>
-      <p:sp>
-        <p:nvSpPr>
-          <p:cNvPr id="51" name="TextBox 50"/>
-          <p:cNvSpPr txBox="1"/>
-          <p:nvPr/>
-        </p:nvSpPr>
-        <p:spPr>
-          <a:xfrm>
-            <a:off x="7818120" y="2743200"/>
-            <a:ext cx="3840480" cy="-45719"/>
-          </a:xfrm>
-          <a:prstGeom prst="rect">
-            <a:avLst/>
-          </a:prstGeom>
-          <a:noFill/>
-        </p:spPr>
-        <p:txBody>
-          <a:bodyPr wrap="square">
-            <a:spAutoFit/>
-          </a:bodyPr>
-          <a:lstStyle/>
-          <a:p>
-            <a:pPr algn="l">
-              <a:defRPr sz="1100" b="0">
+          <p:cNvPr id="38" name="TextBox 37"/>
+          <p:cNvSpPr txBox="1"/>
+          <p:nvPr/>
+        </p:nvSpPr>
+        <p:spPr>
+          <a:xfrm>
+            <a:off x="9326880" y="2267712"/>
+            <a:ext cx="2560320" cy="384048"/>
+          </a:xfrm>
+          <a:prstGeom prst="rect">
+            <a:avLst/>
+          </a:prstGeom>
+          <a:noFill/>
+        </p:spPr>
+        <p:txBody>
+          <a:bodyPr wrap="square">
+            <a:spAutoFit/>
+          </a:bodyPr>
+          <a:lstStyle/>
+          <a:p>
+            <a:pPr>
+              <a:defRPr sz="900" b="0">
                 <a:solidFill>
                   <a:srgbClr val="B0B8C8"/>
                 </a:solidFill>
               </a:defRPr>
             </a:pPr>
-          </a:p>
-        </p:txBody>
-      </p:sp>
-      <p:sp>
-        <p:nvSpPr>
-          <p:cNvPr id="52" name="Rectangle 51"/>
+            <a:r>
+              <a:t>CANN/CUDA diff / R3</a:t>
+            </a:r>
+          </a:p>
+        </p:txBody>
+      </p:sp>
+      <p:sp>
+        <p:nvSpPr>
+          <p:cNvPr id="39" name="TextBox 38"/>
+          <p:cNvSpPr txBox="1"/>
+          <p:nvPr/>
+        </p:nvSpPr>
+        <p:spPr>
+          <a:xfrm>
+            <a:off x="5760720" y="2752344"/>
+            <a:ext cx="6217920" cy="137160"/>
+          </a:xfrm>
+          <a:prstGeom prst="rect">
+            <a:avLst/>
+          </a:prstGeom>
+          <a:noFill/>
+        </p:spPr>
+        <p:txBody>
+          <a:bodyPr wrap="square">
+            <a:spAutoFit/>
+          </a:bodyPr>
+          <a:lstStyle/>
+          <a:p>
+            <a:pPr>
+              <a:defRPr sz="700" b="1">
+                <a:solidFill>
+                  <a:srgbClr val="00C853"/>
+                </a:solidFill>
+              </a:defRPr>
+            </a:pPr>
+            <a:r>
+              <a:t>Framework Layer</a:t>
+            </a:r>
+          </a:p>
+        </p:txBody>
+      </p:sp>
+      <p:sp>
+        <p:nvSpPr>
+          <p:cNvPr id="40" name="Rectangle 39"/>
           <p:cNvSpPr/>
           <p:nvPr/>
         </p:nvSpPr>
         <p:spPr>
           <a:xfrm>
-            <a:off x="7680960" y="2880360"/>
-            <a:ext cx="4114800" cy="502920"/>
+            <a:off x="5852160" y="2889504"/>
+            <a:ext cx="365760" cy="384048"/>
           </a:xfrm>
           <a:prstGeom prst="rect">
             <a:avLst/>
           </a:prstGeom>
           <a:solidFill>
-            <a:srgbClr val="1B2A4A"/>
+            <a:srgbClr val="15223A"/>
           </a:solidFill>
           <a:ln>
             <a:noFill/>
@@ -10702,87 +10295,55 @@
       </p:sp>
       <p:sp>
         <p:nvSpPr>
-          <p:cNvPr id="53" name="TextBox 52"/>
-          <p:cNvSpPr txBox="1"/>
-          <p:nvPr/>
-        </p:nvSpPr>
-        <p:spPr>
-          <a:xfrm>
-            <a:off x="7818120" y="2971800"/>
-            <a:ext cx="3840480" cy="365760"/>
-          </a:xfrm>
-          <a:prstGeom prst="rect">
-            <a:avLst/>
-          </a:prstGeom>
-          <a:noFill/>
-        </p:spPr>
-        <p:txBody>
-          <a:bodyPr wrap="square">
-            <a:spAutoFit/>
-          </a:bodyPr>
-          <a:lstStyle/>
-          <a:p>
-            <a:pPr algn="l">
-              <a:defRPr sz="1300" b="1">
+          <p:cNvPr id="41" name="TextBox 40"/>
+          <p:cNvSpPr txBox="1"/>
+          <p:nvPr/>
+        </p:nvSpPr>
+        <p:spPr>
+          <a:xfrm>
+            <a:off x="5852160" y="2889504"/>
+            <a:ext cx="365760" cy="384048"/>
+          </a:xfrm>
+          <a:prstGeom prst="rect">
+            <a:avLst/>
+          </a:prstGeom>
+          <a:noFill/>
+        </p:spPr>
+        <p:txBody>
+          <a:bodyPr wrap="square">
+            <a:spAutoFit/>
+          </a:bodyPr>
+          <a:lstStyle/>
+          <a:p>
+            <a:pPr>
+              <a:defRPr sz="1100" b="1">
                 <a:solidFill>
                   <a:srgbClr val="00C853"/>
                 </a:solidFill>
               </a:defRPr>
             </a:pPr>
             <a:r>
-              <a:t>ProRL Agent (NVIDIA)</a:t>
-            </a:r>
-          </a:p>
-        </p:txBody>
-      </p:sp>
-      <p:sp>
-        <p:nvSpPr>
-          <p:cNvPr id="54" name="TextBox 53"/>
-          <p:cNvSpPr txBox="1"/>
-          <p:nvPr/>
-        </p:nvSpPr>
-        <p:spPr>
-          <a:xfrm>
-            <a:off x="7818120" y="3337560"/>
-            <a:ext cx="3840480" cy="-45719"/>
-          </a:xfrm>
-          <a:prstGeom prst="rect">
-            <a:avLst/>
-          </a:prstGeom>
-          <a:noFill/>
-        </p:spPr>
-        <p:txBody>
-          <a:bodyPr wrap="square">
-            <a:spAutoFit/>
-          </a:bodyPr>
-          <a:lstStyle/>
-          <a:p>
-            <a:pPr algn="l">
-              <a:defRPr sz="1100" b="0">
-                <a:solidFill>
-                  <a:srgbClr val="B0B8C8"/>
-                </a:solidFill>
-              </a:defRPr>
-            </a:pPr>
-          </a:p>
-        </p:txBody>
-      </p:sp>
-      <p:sp>
-        <p:nvSpPr>
-          <p:cNvPr id="55" name="Rectangle 54"/>
+              <a:t>C</a:t>
+            </a:r>
+          </a:p>
+        </p:txBody>
+      </p:sp>
+      <p:sp>
+        <p:nvSpPr>
+          <p:cNvPr id="42" name="Rectangle 41"/>
           <p:cNvSpPr/>
           <p:nvPr/>
         </p:nvSpPr>
         <p:spPr>
           <a:xfrm>
-            <a:off x="7680960" y="3474720"/>
-            <a:ext cx="4114800" cy="502920"/>
+            <a:off x="6217920" y="2889504"/>
+            <a:ext cx="2011680" cy="384048"/>
           </a:xfrm>
           <a:prstGeom prst="rect">
             <a:avLst/>
           </a:prstGeom>
           <a:solidFill>
-            <a:srgbClr val="1B2A4A"/>
+            <a:srgbClr val="15223A"/>
           </a:solidFill>
           <a:ln>
             <a:noFill/>
@@ -10812,87 +10373,55 @@
       </p:sp>
       <p:sp>
         <p:nvSpPr>
-          <p:cNvPr id="56" name="TextBox 55"/>
-          <p:cNvSpPr txBox="1"/>
-          <p:nvPr/>
-        </p:nvSpPr>
-        <p:spPr>
-          <a:xfrm>
-            <a:off x="7818120" y="3566160"/>
-            <a:ext cx="3840480" cy="365760"/>
-          </a:xfrm>
-          <a:prstGeom prst="rect">
-            <a:avLst/>
-          </a:prstGeom>
-          <a:noFill/>
-        </p:spPr>
-        <p:txBody>
-          <a:bodyPr wrap="square">
-            <a:spAutoFit/>
-          </a:bodyPr>
-          <a:lstStyle/>
-          <a:p>
-            <a:pPr algn="l">
-              <a:defRPr sz="1300" b="1">
-                <a:solidFill>
-                  <a:srgbClr val="00C853"/>
-                </a:solidFill>
-              </a:defRPr>
-            </a:pPr>
-            <a:r>
-              <a:t>Dynamo (NVIDIA)</a:t>
-            </a:r>
-          </a:p>
-        </p:txBody>
-      </p:sp>
-      <p:sp>
-        <p:nvSpPr>
-          <p:cNvPr id="57" name="TextBox 56"/>
-          <p:cNvSpPr txBox="1"/>
-          <p:nvPr/>
-        </p:nvSpPr>
-        <p:spPr>
-          <a:xfrm>
-            <a:off x="7818120" y="3931920"/>
-            <a:ext cx="3840480" cy="-45719"/>
-          </a:xfrm>
-          <a:prstGeom prst="rect">
-            <a:avLst/>
-          </a:prstGeom>
-          <a:noFill/>
-        </p:spPr>
-        <p:txBody>
-          <a:bodyPr wrap="square">
-            <a:spAutoFit/>
-          </a:bodyPr>
-          <a:lstStyle/>
-          <a:p>
-            <a:pPr algn="l">
-              <a:defRPr sz="1100" b="0">
+          <p:cNvPr id="43" name="TextBox 42"/>
+          <p:cNvSpPr txBox="1"/>
+          <p:nvPr/>
+        </p:nvSpPr>
+        <p:spPr>
+          <a:xfrm>
+            <a:off x="6217920" y="2889504"/>
+            <a:ext cx="2011680" cy="384048"/>
+          </a:xfrm>
+          <a:prstGeom prst="rect">
+            <a:avLst/>
+          </a:prstGeom>
+          <a:noFill/>
+        </p:spPr>
+        <p:txBody>
+          <a:bodyPr wrap="square">
+            <a:spAutoFit/>
+          </a:bodyPr>
+          <a:lstStyle/>
+          <a:p>
+            <a:pPr>
+              <a:defRPr sz="900" b="0">
                 <a:solidFill>
                   <a:srgbClr val="B0B8C8"/>
                 </a:solidFill>
               </a:defRPr>
             </a:pPr>
-          </a:p>
-        </p:txBody>
-      </p:sp>
-      <p:sp>
-        <p:nvSpPr>
-          <p:cNvPr id="58" name="Rectangle 57"/>
+            <a:r>
+              <a:t>Inference Acceleration</a:t>
+            </a:r>
+          </a:p>
+        </p:txBody>
+      </p:sp>
+      <p:sp>
+        <p:nvSpPr>
+          <p:cNvPr id="44" name="Rectangle 43"/>
           <p:cNvSpPr/>
           <p:nvPr/>
         </p:nvSpPr>
         <p:spPr>
           <a:xfrm>
-            <a:off x="7680960" y="4069080"/>
-            <a:ext cx="4114800" cy="502920"/>
+            <a:off x="8229600" y="2889504"/>
+            <a:ext cx="1097280" cy="384048"/>
           </a:xfrm>
           <a:prstGeom prst="rect">
             <a:avLst/>
           </a:prstGeom>
           <a:solidFill>
-            <a:srgbClr val="1B2A4A"/>
+            <a:srgbClr val="15223A"/>
           </a:solidFill>
           <a:ln>
             <a:noFill/>
@@ -10922,87 +10451,55 @@
       </p:sp>
       <p:sp>
         <p:nvSpPr>
-          <p:cNvPr id="59" name="TextBox 58"/>
-          <p:cNvSpPr txBox="1"/>
-          <p:nvPr/>
-        </p:nvSpPr>
-        <p:spPr>
-          <a:xfrm>
-            <a:off x="7818120" y="4160520"/>
-            <a:ext cx="3840480" cy="365760"/>
-          </a:xfrm>
-          <a:prstGeom prst="rect">
-            <a:avLst/>
-          </a:prstGeom>
-          <a:noFill/>
-        </p:spPr>
-        <p:txBody>
-          <a:bodyPr wrap="square">
-            <a:spAutoFit/>
-          </a:bodyPr>
-          <a:lstStyle/>
-          <a:p>
-            <a:pPr algn="l">
-              <a:defRPr sz="1300" b="1">
-                <a:solidFill>
-                  <a:srgbClr val="FF8C00"/>
-                </a:solidFill>
-              </a:defRPr>
-            </a:pPr>
-            <a:r>
-              <a:t>Decoupled PPO / DAPO+CISPO</a:t>
-            </a:r>
-          </a:p>
-        </p:txBody>
-      </p:sp>
-      <p:sp>
-        <p:nvSpPr>
-          <p:cNvPr id="60" name="TextBox 59"/>
-          <p:cNvSpPr txBox="1"/>
-          <p:nvPr/>
-        </p:nvSpPr>
-        <p:spPr>
-          <a:xfrm>
-            <a:off x="7818120" y="4526280"/>
-            <a:ext cx="3840480" cy="-45719"/>
-          </a:xfrm>
-          <a:prstGeom prst="rect">
-            <a:avLst/>
-          </a:prstGeom>
-          <a:noFill/>
-        </p:spPr>
-        <p:txBody>
-          <a:bodyPr wrap="square">
-            <a:spAutoFit/>
-          </a:bodyPr>
-          <a:lstStyle/>
-          <a:p>
-            <a:pPr algn="l">
-              <a:defRPr sz="1100" b="0">
+          <p:cNvPr id="45" name="TextBox 44"/>
+          <p:cNvSpPr txBox="1"/>
+          <p:nvPr/>
+        </p:nvSpPr>
+        <p:spPr>
+          <a:xfrm>
+            <a:off x="8229600" y="2889504"/>
+            <a:ext cx="1097280" cy="384048"/>
+          </a:xfrm>
+          <a:prstGeom prst="rect">
+            <a:avLst/>
+          </a:prstGeom>
+          <a:noFill/>
+        </p:spPr>
+        <p:txBody>
+          <a:bodyPr wrap="square">
+            <a:spAutoFit/>
+          </a:bodyPr>
+          <a:lstStyle/>
+          <a:p>
+            <a:pPr>
+              <a:defRPr sz="900" b="0">
                 <a:solidFill>
                   <a:srgbClr val="B0B8C8"/>
                 </a:solidFill>
               </a:defRPr>
             </a:pPr>
-          </a:p>
-        </p:txBody>
-      </p:sp>
-      <p:sp>
-        <p:nvSpPr>
-          <p:cNvPr id="61" name="Rectangle 60"/>
+            <a:r>
+              <a:t>1</a:t>
+            </a:r>
+          </a:p>
+        </p:txBody>
+      </p:sp>
+      <p:sp>
+        <p:nvSpPr>
+          <p:cNvPr id="46" name="Rectangle 45"/>
           <p:cNvSpPr/>
           <p:nvPr/>
         </p:nvSpPr>
         <p:spPr>
           <a:xfrm>
-            <a:off x="7680960" y="4434840"/>
-            <a:ext cx="4114800" cy="457200"/>
+            <a:off x="9326880" y="2889504"/>
+            <a:ext cx="2560320" cy="384048"/>
           </a:xfrm>
           <a:prstGeom prst="rect">
             <a:avLst/>
           </a:prstGeom>
           <a:solidFill>
-            <a:srgbClr val="1B2A4A"/>
+            <a:srgbClr val="15223A"/>
           </a:solidFill>
           <a:ln>
             <a:noFill/>
@@ -11032,87 +10529,55 @@
       </p:sp>
       <p:sp>
         <p:nvSpPr>
-          <p:cNvPr id="62" name="TextBox 61"/>
-          <p:cNvSpPr txBox="1"/>
-          <p:nvPr/>
-        </p:nvSpPr>
-        <p:spPr>
-          <a:xfrm>
-            <a:off x="7818120" y="4526279"/>
-            <a:ext cx="3840480" cy="365760"/>
-          </a:xfrm>
-          <a:prstGeom prst="rect">
-            <a:avLst/>
-          </a:prstGeom>
-          <a:noFill/>
-        </p:spPr>
-        <p:txBody>
-          <a:bodyPr wrap="square">
-            <a:spAutoFit/>
-          </a:bodyPr>
-          <a:lstStyle/>
-          <a:p>
-            <a:pPr algn="l">
-              <a:defRPr sz="1300" b="1">
-                <a:solidFill>
-                  <a:srgbClr val="FF8C00"/>
-                </a:solidFill>
-              </a:defRPr>
-            </a:pPr>
-            <a:r>
-              <a:t>Cursor实时RL / Meta SSR</a:t>
-            </a:r>
-          </a:p>
-        </p:txBody>
-      </p:sp>
-      <p:sp>
-        <p:nvSpPr>
-          <p:cNvPr id="63" name="TextBox 62"/>
-          <p:cNvSpPr txBox="1"/>
-          <p:nvPr/>
-        </p:nvSpPr>
-        <p:spPr>
-          <a:xfrm>
-            <a:off x="7818120" y="4892040"/>
-            <a:ext cx="3840480" cy="-91439"/>
-          </a:xfrm>
-          <a:prstGeom prst="rect">
-            <a:avLst/>
-          </a:prstGeom>
-          <a:noFill/>
-        </p:spPr>
-        <p:txBody>
-          <a:bodyPr wrap="square">
-            <a:spAutoFit/>
-          </a:bodyPr>
-          <a:lstStyle/>
-          <a:p>
-            <a:pPr algn="l">
-              <a:defRPr sz="1100" b="0">
+          <p:cNvPr id="47" name="TextBox 46"/>
+          <p:cNvSpPr txBox="1"/>
+          <p:nvPr/>
+        </p:nvSpPr>
+        <p:spPr>
+          <a:xfrm>
+            <a:off x="9326880" y="2889504"/>
+            <a:ext cx="2560320" cy="384048"/>
+          </a:xfrm>
+          <a:prstGeom prst="rect">
+            <a:avLst/>
+          </a:prstGeom>
+          <a:noFill/>
+        </p:spPr>
+        <p:txBody>
+          <a:bodyPr wrap="square">
+            <a:spAutoFit/>
+          </a:bodyPr>
+          <a:lstStyle/>
+          <a:p>
+            <a:pPr>
+              <a:defRPr sz="900" b="0">
                 <a:solidFill>
                   <a:srgbClr val="B0B8C8"/>
                 </a:solidFill>
               </a:defRPr>
             </a:pPr>
-          </a:p>
-        </p:txBody>
-      </p:sp>
-      <p:sp>
-        <p:nvSpPr>
-          <p:cNvPr id="64" name="Rectangle 63"/>
+            <a:r>
+              <a:t>Eagle3 / 4bit Quant</a:t>
+            </a:r>
+          </a:p>
+        </p:txBody>
+      </p:sp>
+      <p:sp>
+        <p:nvSpPr>
+          <p:cNvPr id="48" name="Rectangle 47"/>
           <p:cNvSpPr/>
           <p:nvPr/>
         </p:nvSpPr>
         <p:spPr>
           <a:xfrm>
-            <a:off x="7680960" y="4937760"/>
-            <a:ext cx="4114800" cy="457200"/>
+            <a:off x="5852160" y="3273552"/>
+            <a:ext cx="365760" cy="384048"/>
           </a:xfrm>
           <a:prstGeom prst="rect">
             <a:avLst/>
           </a:prstGeom>
           <a:solidFill>
-            <a:srgbClr val="1B2A4A"/>
+            <a:srgbClr val="15223A"/>
           </a:solidFill>
           <a:ln>
             <a:noFill/>
@@ -11142,227 +10607,55 @@
       </p:sp>
       <p:sp>
         <p:nvSpPr>
-          <p:cNvPr id="65" name="TextBox 64"/>
-          <p:cNvSpPr txBox="1"/>
-          <p:nvPr/>
-        </p:nvSpPr>
-        <p:spPr>
-          <a:xfrm>
-            <a:off x="7818120" y="5029200"/>
-            <a:ext cx="3840480" cy="365760"/>
-          </a:xfrm>
-          <a:prstGeom prst="rect">
-            <a:avLst/>
-          </a:prstGeom>
-          <a:noFill/>
-        </p:spPr>
-        <p:txBody>
-          <a:bodyPr wrap="square">
-            <a:spAutoFit/>
-          </a:bodyPr>
-          <a:lstStyle/>
-          <a:p>
-            <a:pPr algn="l">
-              <a:defRPr sz="1300" b="1">
-                <a:solidFill>
-                  <a:srgbClr val="FF8C00"/>
-                </a:solidFill>
-              </a:defRPr>
-            </a:pPr>
-            <a:r>
-              <a:t>Cursor self-summarization</a:t>
-            </a:r>
-          </a:p>
-        </p:txBody>
-      </p:sp>
-      <p:sp>
-        <p:nvSpPr>
-          <p:cNvPr id="66" name="TextBox 65"/>
-          <p:cNvSpPr txBox="1"/>
-          <p:nvPr/>
-        </p:nvSpPr>
-        <p:spPr>
-          <a:xfrm>
-            <a:off x="7818120" y="5394960"/>
-            <a:ext cx="3840480" cy="-91439"/>
-          </a:xfrm>
-          <a:prstGeom prst="rect">
-            <a:avLst/>
-          </a:prstGeom>
-          <a:noFill/>
-        </p:spPr>
-        <p:txBody>
-          <a:bodyPr wrap="square">
-            <a:spAutoFit/>
-          </a:bodyPr>
-          <a:lstStyle/>
-          <a:p>
-            <a:pPr algn="l">
-              <a:defRPr sz="1100" b="0">
-                <a:solidFill>
-                  <a:srgbClr val="B0B8C8"/>
-                </a:solidFill>
-              </a:defRPr>
-            </a:pPr>
-          </a:p>
-        </p:txBody>
-      </p:sp>
-      <p:sp>
-        <p:nvSpPr>
-          <p:cNvPr id="67" name="TextBox 66"/>
-          <p:cNvSpPr txBox="1"/>
-          <p:nvPr/>
-        </p:nvSpPr>
-        <p:spPr>
-          <a:xfrm>
-            <a:off x="182880" y="5303520"/>
-            <a:ext cx="11430000" cy="274320"/>
-          </a:xfrm>
-          <a:prstGeom prst="rect">
-            <a:avLst/>
-          </a:prstGeom>
-          <a:noFill/>
-        </p:spPr>
-        <p:txBody>
-          <a:bodyPr wrap="square">
-            <a:spAutoFit/>
-          </a:bodyPr>
-          <a:lstStyle/>
-          <a:p>
-            <a:pPr algn="l">
-              <a:defRPr sz="1000" b="0">
-                <a:solidFill>
-                  <a:srgbClr val="B0B8C8"/>
-                </a:solidFill>
-              </a:defRPr>
-            </a:pPr>
-            <a:r>
-              <a:t>横切: 数值精度保证 -&gt; 训推一致性 / 确定性计算 / 精度基线 / 算子自动生成</a:t>
-            </a:r>
-          </a:p>
-        </p:txBody>
-      </p:sp>
-      <p:sp>
-        <p:nvSpPr>
-          <p:cNvPr id="68" name="TextBox 67"/>
-          <p:cNvSpPr txBox="1"/>
-          <p:nvPr/>
-        </p:nvSpPr>
-        <p:spPr>
-          <a:xfrm>
-            <a:off x="182880" y="5669280"/>
-            <a:ext cx="3840480" cy="274320"/>
-          </a:xfrm>
-          <a:prstGeom prst="rect">
-            <a:avLst/>
-          </a:prstGeom>
-          <a:noFill/>
-        </p:spPr>
-        <p:txBody>
-          <a:bodyPr wrap="square">
-            <a:spAutoFit/>
-          </a:bodyPr>
-          <a:lstStyle/>
-          <a:p>
-            <a:pPr algn="l">
-              <a:defRPr sz="1000" b="0">
-                <a:solidFill>
-                  <a:srgbClr val="0096D6"/>
-                </a:solidFill>
-              </a:defRPr>
-            </a:pPr>
-            <a:r>
-              <a:t>基础设施层 a+b+c (1,2驱动)</a:t>
-            </a:r>
-          </a:p>
-        </p:txBody>
-      </p:sp>
-      <p:sp>
-        <p:nvSpPr>
-          <p:cNvPr id="69" name="TextBox 68"/>
-          <p:cNvSpPr txBox="1"/>
-          <p:nvPr/>
-        </p:nvSpPr>
-        <p:spPr>
-          <a:xfrm>
-            <a:off x="4206240" y="5669280"/>
-            <a:ext cx="3840480" cy="274320"/>
-          </a:xfrm>
-          <a:prstGeom prst="rect">
-            <a:avLst/>
-          </a:prstGeom>
-          <a:noFill/>
-        </p:spPr>
-        <p:txBody>
-          <a:bodyPr wrap="square">
-            <a:spAutoFit/>
-          </a:bodyPr>
-          <a:lstStyle/>
-          <a:p>
-            <a:pPr algn="l">
-              <a:defRPr sz="1000" b="0">
+          <p:cNvPr id="49" name="TextBox 48"/>
+          <p:cNvSpPr txBox="1"/>
+          <p:nvPr/>
+        </p:nvSpPr>
+        <p:spPr>
+          <a:xfrm>
+            <a:off x="5852160" y="3273552"/>
+            <a:ext cx="365760" cy="384048"/>
+          </a:xfrm>
+          <a:prstGeom prst="rect">
+            <a:avLst/>
+          </a:prstGeom>
+          <a:noFill/>
+        </p:spPr>
+        <p:txBody>
+          <a:bodyPr wrap="square">
+            <a:spAutoFit/>
+          </a:bodyPr>
+          <a:lstStyle/>
+          <a:p>
+            <a:pPr>
+              <a:defRPr sz="1100" b="1">
                 <a:solidFill>
                   <a:srgbClr val="00C853"/>
                 </a:solidFill>
               </a:defRPr>
             </a:pPr>
             <a:r>
-              <a:t>框架层 d+e (2,3驱动)</a:t>
-            </a:r>
-          </a:p>
-        </p:txBody>
-      </p:sp>
-      <p:sp>
-        <p:nvSpPr>
-          <p:cNvPr id="70" name="TextBox 69"/>
-          <p:cNvSpPr txBox="1"/>
-          <p:nvPr/>
-        </p:nvSpPr>
-        <p:spPr>
-          <a:xfrm>
-            <a:off x="8229600" y="5669280"/>
-            <a:ext cx="3840480" cy="274320"/>
-          </a:xfrm>
-          <a:prstGeom prst="rect">
-            <a:avLst/>
-          </a:prstGeom>
-          <a:noFill/>
-        </p:spPr>
-        <p:txBody>
-          <a:bodyPr wrap="square">
-            <a:spAutoFit/>
-          </a:bodyPr>
-          <a:lstStyle/>
-          <a:p>
-            <a:pPr algn="l">
-              <a:defRPr sz="1000" b="0">
-                <a:solidFill>
-                  <a:srgbClr val="FF8C00"/>
-                </a:solidFill>
-              </a:defRPr>
-            </a:pPr>
-            <a:r>
-              <a:t>算法层 f+g+h (1,4,5驱动)</a:t>
-            </a:r>
-          </a:p>
-        </p:txBody>
-      </p:sp>
-      <p:sp>
-        <p:nvSpPr>
-          <p:cNvPr id="71" name="Rectangle 70"/>
+              <a:t>D</a:t>
+            </a:r>
+          </a:p>
+        </p:txBody>
+      </p:sp>
+      <p:sp>
+        <p:nvSpPr>
+          <p:cNvPr id="50" name="Rectangle 49"/>
           <p:cNvSpPr/>
           <p:nvPr/>
         </p:nvSpPr>
         <p:spPr>
           <a:xfrm>
-            <a:off x="0" y="6035040"/>
-            <a:ext cx="12191695" cy="822960"/>
+            <a:off x="6217920" y="3273552"/>
+            <a:ext cx="2011680" cy="384048"/>
           </a:xfrm>
           <a:prstGeom prst="rect">
             <a:avLst/>
           </a:prstGeom>
           <a:solidFill>
-            <a:srgbClr val="0A1422"/>
+            <a:srgbClr val="15223A"/>
           </a:solidFill>
           <a:ln>
             <a:noFill/>
@@ -11392,35 +10685,1474 @@
       </p:sp>
       <p:sp>
         <p:nvSpPr>
+          <p:cNvPr id="51" name="TextBox 50"/>
+          <p:cNvSpPr txBox="1"/>
+          <p:nvPr/>
+        </p:nvSpPr>
+        <p:spPr>
+          <a:xfrm>
+            <a:off x="6217920" y="3273552"/>
+            <a:ext cx="2011680" cy="384048"/>
+          </a:xfrm>
+          <a:prstGeom prst="rect">
+            <a:avLst/>
+          </a:prstGeom>
+          <a:noFill/>
+        </p:spPr>
+        <p:txBody>
+          <a:bodyPr wrap="square">
+            <a:spAutoFit/>
+          </a:bodyPr>
+          <a:lstStyle/>
+          <a:p>
+            <a:pPr>
+              <a:defRPr sz="900" b="0">
+                <a:solidFill>
+                  <a:srgbClr val="B0B8C8"/>
+                </a:solidFill>
+              </a:defRPr>
+            </a:pPr>
+            <a:r>
+              <a:t>Train-Infer Orchestration</a:t>
+            </a:r>
+          </a:p>
+        </p:txBody>
+      </p:sp>
+      <p:sp>
+        <p:nvSpPr>
+          <p:cNvPr id="52" name="Rectangle 51"/>
+          <p:cNvSpPr/>
+          <p:nvPr/>
+        </p:nvSpPr>
+        <p:spPr>
+          <a:xfrm>
+            <a:off x="8229600" y="3273552"/>
+            <a:ext cx="1097280" cy="384048"/>
+          </a:xfrm>
+          <a:prstGeom prst="rect">
+            <a:avLst/>
+          </a:prstGeom>
+          <a:solidFill>
+            <a:srgbClr val="15223A"/>
+          </a:solidFill>
+          <a:ln>
+            <a:noFill/>
+          </a:ln>
+        </p:spPr>
+        <p:style>
+          <a:lnRef idx="1">
+            <a:schemeClr val="accent1"/>
+          </a:lnRef>
+          <a:fillRef idx="3">
+            <a:schemeClr val="accent1"/>
+          </a:fillRef>
+          <a:effectRef idx="2">
+            <a:schemeClr val="accent1"/>
+          </a:effectRef>
+          <a:fontRef idx="minor">
+            <a:schemeClr val="lt1"/>
+          </a:fontRef>
+        </p:style>
+        <p:txBody>
+          <a:bodyPr rtlCol="0" anchor="ctr"/>
+          <a:lstStyle/>
+          <a:p>
+            <a:pPr algn="ctr"/>
+          </a:p>
+        </p:txBody>
+      </p:sp>
+      <p:sp>
+        <p:nvSpPr>
+          <p:cNvPr id="53" name="TextBox 52"/>
+          <p:cNvSpPr txBox="1"/>
+          <p:nvPr/>
+        </p:nvSpPr>
+        <p:spPr>
+          <a:xfrm>
+            <a:off x="8229600" y="3273552"/>
+            <a:ext cx="1097280" cy="384048"/>
+          </a:xfrm>
+          <a:prstGeom prst="rect">
+            <a:avLst/>
+          </a:prstGeom>
+          <a:noFill/>
+        </p:spPr>
+        <p:txBody>
+          <a:bodyPr wrap="square">
+            <a:spAutoFit/>
+          </a:bodyPr>
+          <a:lstStyle/>
+          <a:p>
+            <a:pPr>
+              <a:defRPr sz="900" b="0">
+                <a:solidFill>
+                  <a:srgbClr val="B0B8C8"/>
+                </a:solidFill>
+              </a:defRPr>
+            </a:pPr>
+            <a:r>
+              <a:t>2,3</a:t>
+            </a:r>
+          </a:p>
+        </p:txBody>
+      </p:sp>
+      <p:sp>
+        <p:nvSpPr>
+          <p:cNvPr id="54" name="Rectangle 53"/>
+          <p:cNvSpPr/>
+          <p:nvPr/>
+        </p:nvSpPr>
+        <p:spPr>
+          <a:xfrm>
+            <a:off x="9326880" y="3273552"/>
+            <a:ext cx="2560320" cy="384048"/>
+          </a:xfrm>
+          <a:prstGeom prst="rect">
+            <a:avLst/>
+          </a:prstGeom>
+          <a:solidFill>
+            <a:srgbClr val="15223A"/>
+          </a:solidFill>
+          <a:ln>
+            <a:noFill/>
+          </a:ln>
+        </p:spPr>
+        <p:style>
+          <a:lnRef idx="1">
+            <a:schemeClr val="accent1"/>
+          </a:lnRef>
+          <a:fillRef idx="3">
+            <a:schemeClr val="accent1"/>
+          </a:fillRef>
+          <a:effectRef idx="2">
+            <a:schemeClr val="accent1"/>
+          </a:effectRef>
+          <a:fontRef idx="minor">
+            <a:schemeClr val="lt1"/>
+          </a:fontRef>
+        </p:style>
+        <p:txBody>
+          <a:bodyPr rtlCol="0" anchor="ctr"/>
+          <a:lstStyle/>
+          <a:p>
+            <a:pPr algn="ctr"/>
+          </a:p>
+        </p:txBody>
+      </p:sp>
+      <p:sp>
+        <p:nvSpPr>
+          <p:cNvPr id="55" name="TextBox 54"/>
+          <p:cNvSpPr txBox="1"/>
+          <p:nvPr/>
+        </p:nvSpPr>
+        <p:spPr>
+          <a:xfrm>
+            <a:off x="9326880" y="3273552"/>
+            <a:ext cx="2560320" cy="384048"/>
+          </a:xfrm>
+          <a:prstGeom prst="rect">
+            <a:avLst/>
+          </a:prstGeom>
+          <a:noFill/>
+        </p:spPr>
+        <p:txBody>
+          <a:bodyPr wrap="square">
+            <a:spAutoFit/>
+          </a:bodyPr>
+          <a:lstStyle/>
+          <a:p>
+            <a:pPr>
+              <a:defRPr sz="900" b="0">
+                <a:solidFill>
+                  <a:srgbClr val="B0B8C8"/>
+                </a:solidFill>
+              </a:defRPr>
+            </a:pPr>
+            <a:r>
+              <a:t>ProRL Agent / Dynamo</a:t>
+            </a:r>
+          </a:p>
+        </p:txBody>
+      </p:sp>
+      <p:sp>
+        <p:nvSpPr>
+          <p:cNvPr id="56" name="Rectangle 55"/>
+          <p:cNvSpPr/>
+          <p:nvPr/>
+        </p:nvSpPr>
+        <p:spPr>
+          <a:xfrm>
+            <a:off x="5852160" y="3776472"/>
+            <a:ext cx="365760" cy="384048"/>
+          </a:xfrm>
+          <a:prstGeom prst="rect">
+            <a:avLst/>
+          </a:prstGeom>
+          <a:solidFill>
+            <a:srgbClr val="15223A"/>
+          </a:solidFill>
+          <a:ln>
+            <a:noFill/>
+          </a:ln>
+        </p:spPr>
+        <p:style>
+          <a:lnRef idx="1">
+            <a:schemeClr val="accent1"/>
+          </a:lnRef>
+          <a:fillRef idx="3">
+            <a:schemeClr val="accent1"/>
+          </a:fillRef>
+          <a:effectRef idx="2">
+            <a:schemeClr val="accent1"/>
+          </a:effectRef>
+          <a:fontRef idx="minor">
+            <a:schemeClr val="lt1"/>
+          </a:fontRef>
+        </p:style>
+        <p:txBody>
+          <a:bodyPr rtlCol="0" anchor="ctr"/>
+          <a:lstStyle/>
+          <a:p>
+            <a:pPr algn="ctr"/>
+          </a:p>
+        </p:txBody>
+      </p:sp>
+      <p:sp>
+        <p:nvSpPr>
+          <p:cNvPr id="57" name="TextBox 56"/>
+          <p:cNvSpPr txBox="1"/>
+          <p:nvPr/>
+        </p:nvSpPr>
+        <p:spPr>
+          <a:xfrm>
+            <a:off x="5852160" y="3776472"/>
+            <a:ext cx="365760" cy="384048"/>
+          </a:xfrm>
+          <a:prstGeom prst="rect">
+            <a:avLst/>
+          </a:prstGeom>
+          <a:noFill/>
+        </p:spPr>
+        <p:txBody>
+          <a:bodyPr wrap="square">
+            <a:spAutoFit/>
+          </a:bodyPr>
+          <a:lstStyle/>
+          <a:p>
+            <a:pPr>
+              <a:defRPr sz="1100" b="1">
+                <a:solidFill>
+                  <a:srgbClr val="00C853"/>
+                </a:solidFill>
+              </a:defRPr>
+            </a:pPr>
+            <a:r>
+              <a:t>E</a:t>
+            </a:r>
+          </a:p>
+        </p:txBody>
+      </p:sp>
+      <p:sp>
+        <p:nvSpPr>
+          <p:cNvPr id="58" name="Rectangle 57"/>
+          <p:cNvSpPr/>
+          <p:nvPr/>
+        </p:nvSpPr>
+        <p:spPr>
+          <a:xfrm>
+            <a:off x="6217920" y="3776472"/>
+            <a:ext cx="2011680" cy="384048"/>
+          </a:xfrm>
+          <a:prstGeom prst="rect">
+            <a:avLst/>
+          </a:prstGeom>
+          <a:solidFill>
+            <a:srgbClr val="15223A"/>
+          </a:solidFill>
+          <a:ln>
+            <a:noFill/>
+          </a:ln>
+        </p:spPr>
+        <p:style>
+          <a:lnRef idx="1">
+            <a:schemeClr val="accent1"/>
+          </a:lnRef>
+          <a:fillRef idx="3">
+            <a:schemeClr val="accent1"/>
+          </a:fillRef>
+          <a:effectRef idx="2">
+            <a:schemeClr val="accent1"/>
+          </a:effectRef>
+          <a:fontRef idx="minor">
+            <a:schemeClr val="lt1"/>
+          </a:fontRef>
+        </p:style>
+        <p:txBody>
+          <a:bodyPr rtlCol="0" anchor="ctr"/>
+          <a:lstStyle/>
+          <a:p>
+            <a:pPr algn="ctr"/>
+          </a:p>
+        </p:txBody>
+      </p:sp>
+      <p:sp>
+        <p:nvSpPr>
+          <p:cNvPr id="59" name="TextBox 58"/>
+          <p:cNvSpPr txBox="1"/>
+          <p:nvPr/>
+        </p:nvSpPr>
+        <p:spPr>
+          <a:xfrm>
+            <a:off x="6217920" y="3776472"/>
+            <a:ext cx="2011680" cy="384048"/>
+          </a:xfrm>
+          <a:prstGeom prst="rect">
+            <a:avLst/>
+          </a:prstGeom>
+          <a:noFill/>
+        </p:spPr>
+        <p:txBody>
+          <a:bodyPr wrap="square">
+            <a:spAutoFit/>
+          </a:bodyPr>
+          <a:lstStyle/>
+          <a:p>
+            <a:pPr>
+              <a:defRPr sz="900" b="0">
+                <a:solidFill>
+                  <a:srgbClr val="B0B8C8"/>
+                </a:solidFill>
+              </a:defRPr>
+            </a:pPr>
+            <a:r>
+              <a:t>Long-tail Rollout Mgmt</a:t>
+            </a:r>
+          </a:p>
+        </p:txBody>
+      </p:sp>
+      <p:sp>
+        <p:nvSpPr>
+          <p:cNvPr id="60" name="Rectangle 59"/>
+          <p:cNvSpPr/>
+          <p:nvPr/>
+        </p:nvSpPr>
+        <p:spPr>
+          <a:xfrm>
+            <a:off x="8229600" y="3776472"/>
+            <a:ext cx="1097280" cy="384048"/>
+          </a:xfrm>
+          <a:prstGeom prst="rect">
+            <a:avLst/>
+          </a:prstGeom>
+          <a:solidFill>
+            <a:srgbClr val="15223A"/>
+          </a:solidFill>
+          <a:ln>
+            <a:noFill/>
+          </a:ln>
+        </p:spPr>
+        <p:style>
+          <a:lnRef idx="1">
+            <a:schemeClr val="accent1"/>
+          </a:lnRef>
+          <a:fillRef idx="3">
+            <a:schemeClr val="accent1"/>
+          </a:fillRef>
+          <a:effectRef idx="2">
+            <a:schemeClr val="accent1"/>
+          </a:effectRef>
+          <a:fontRef idx="minor">
+            <a:schemeClr val="lt1"/>
+          </a:fontRef>
+        </p:style>
+        <p:txBody>
+          <a:bodyPr rtlCol="0" anchor="ctr"/>
+          <a:lstStyle/>
+          <a:p>
+            <a:pPr algn="ctr"/>
+          </a:p>
+        </p:txBody>
+      </p:sp>
+      <p:sp>
+        <p:nvSpPr>
+          <p:cNvPr id="61" name="TextBox 60"/>
+          <p:cNvSpPr txBox="1"/>
+          <p:nvPr/>
+        </p:nvSpPr>
+        <p:spPr>
+          <a:xfrm>
+            <a:off x="8229600" y="3776472"/>
+            <a:ext cx="1097280" cy="384048"/>
+          </a:xfrm>
+          <a:prstGeom prst="rect">
+            <a:avLst/>
+          </a:prstGeom>
+          <a:noFill/>
+        </p:spPr>
+        <p:txBody>
+          <a:bodyPr wrap="square">
+            <a:spAutoFit/>
+          </a:bodyPr>
+          <a:lstStyle/>
+          <a:p>
+            <a:pPr>
+              <a:defRPr sz="900" b="0">
+                <a:solidFill>
+                  <a:srgbClr val="B0B8C8"/>
+                </a:solidFill>
+              </a:defRPr>
+            </a:pPr>
+            <a:r>
+              <a:t>2,3</a:t>
+            </a:r>
+          </a:p>
+        </p:txBody>
+      </p:sp>
+      <p:sp>
+        <p:nvSpPr>
+          <p:cNvPr id="62" name="Rectangle 61"/>
+          <p:cNvSpPr/>
+          <p:nvPr/>
+        </p:nvSpPr>
+        <p:spPr>
+          <a:xfrm>
+            <a:off x="9326880" y="3776472"/>
+            <a:ext cx="2560320" cy="384048"/>
+          </a:xfrm>
+          <a:prstGeom prst="rect">
+            <a:avLst/>
+          </a:prstGeom>
+          <a:solidFill>
+            <a:srgbClr val="15223A"/>
+          </a:solidFill>
+          <a:ln>
+            <a:noFill/>
+          </a:ln>
+        </p:spPr>
+        <p:style>
+          <a:lnRef idx="1">
+            <a:schemeClr val="accent1"/>
+          </a:lnRef>
+          <a:fillRef idx="3">
+            <a:schemeClr val="accent1"/>
+          </a:fillRef>
+          <a:effectRef idx="2">
+            <a:schemeClr val="accent1"/>
+          </a:effectRef>
+          <a:fontRef idx="minor">
+            <a:schemeClr val="lt1"/>
+          </a:fontRef>
+        </p:style>
+        <p:txBody>
+          <a:bodyPr rtlCol="0" anchor="ctr"/>
+          <a:lstStyle/>
+          <a:p>
+            <a:pPr algn="ctr"/>
+          </a:p>
+        </p:txBody>
+      </p:sp>
+      <p:sp>
+        <p:nvSpPr>
+          <p:cNvPr id="63" name="TextBox 62"/>
+          <p:cNvSpPr txBox="1"/>
+          <p:nvPr/>
+        </p:nvSpPr>
+        <p:spPr>
+          <a:xfrm>
+            <a:off x="9326880" y="3776472"/>
+            <a:ext cx="2560320" cy="384048"/>
+          </a:xfrm>
+          <a:prstGeom prst="rect">
+            <a:avLst/>
+          </a:prstGeom>
+          <a:noFill/>
+        </p:spPr>
+        <p:txBody>
+          <a:bodyPr wrap="square">
+            <a:spAutoFit/>
+          </a:bodyPr>
+          <a:lstStyle/>
+          <a:p>
+            <a:pPr>
+              <a:defRPr sz="900" b="0">
+                <a:solidFill>
+                  <a:srgbClr val="B0B8C8"/>
+                </a:solidFill>
+              </a:defRPr>
+            </a:pPr>
+            <a:r>
+              <a:t>Tail Batch / Partial</a:t>
+            </a:r>
+          </a:p>
+        </p:txBody>
+      </p:sp>
+      <p:sp>
+        <p:nvSpPr>
+          <p:cNvPr id="64" name="TextBox 63"/>
+          <p:cNvSpPr txBox="1"/>
+          <p:nvPr/>
+        </p:nvSpPr>
+        <p:spPr>
+          <a:xfrm>
+            <a:off x="5760720" y="4261104"/>
+            <a:ext cx="6217920" cy="137160"/>
+          </a:xfrm>
+          <a:prstGeom prst="rect">
+            <a:avLst/>
+          </a:prstGeom>
+          <a:noFill/>
+        </p:spPr>
+        <p:txBody>
+          <a:bodyPr wrap="square">
+            <a:spAutoFit/>
+          </a:bodyPr>
+          <a:lstStyle/>
+          <a:p>
+            <a:pPr>
+              <a:defRPr sz="700" b="1">
+                <a:solidFill>
+                  <a:srgbClr val="FF8C00"/>
+                </a:solidFill>
+              </a:defRPr>
+            </a:pPr>
+            <a:r>
+              <a:t>Algorithm Layer</a:t>
+            </a:r>
+          </a:p>
+        </p:txBody>
+      </p:sp>
+      <p:sp>
+        <p:nvSpPr>
+          <p:cNvPr id="65" name="Rectangle 64"/>
+          <p:cNvSpPr/>
+          <p:nvPr/>
+        </p:nvSpPr>
+        <p:spPr>
+          <a:xfrm>
+            <a:off x="5852160" y="4398264"/>
+            <a:ext cx="365760" cy="384048"/>
+          </a:xfrm>
+          <a:prstGeom prst="rect">
+            <a:avLst/>
+          </a:prstGeom>
+          <a:solidFill>
+            <a:srgbClr val="15223A"/>
+          </a:solidFill>
+          <a:ln>
+            <a:noFill/>
+          </a:ln>
+        </p:spPr>
+        <p:style>
+          <a:lnRef idx="1">
+            <a:schemeClr val="accent1"/>
+          </a:lnRef>
+          <a:fillRef idx="3">
+            <a:schemeClr val="accent1"/>
+          </a:fillRef>
+          <a:effectRef idx="2">
+            <a:schemeClr val="accent1"/>
+          </a:effectRef>
+          <a:fontRef idx="minor">
+            <a:schemeClr val="lt1"/>
+          </a:fontRef>
+        </p:style>
+        <p:txBody>
+          <a:bodyPr rtlCol="0" anchor="ctr"/>
+          <a:lstStyle/>
+          <a:p>
+            <a:pPr algn="ctr"/>
+          </a:p>
+        </p:txBody>
+      </p:sp>
+      <p:sp>
+        <p:nvSpPr>
+          <p:cNvPr id="66" name="TextBox 65"/>
+          <p:cNvSpPr txBox="1"/>
+          <p:nvPr/>
+        </p:nvSpPr>
+        <p:spPr>
+          <a:xfrm>
+            <a:off x="5852160" y="4398264"/>
+            <a:ext cx="365760" cy="384048"/>
+          </a:xfrm>
+          <a:prstGeom prst="rect">
+            <a:avLst/>
+          </a:prstGeom>
+          <a:noFill/>
+        </p:spPr>
+        <p:txBody>
+          <a:bodyPr wrap="square">
+            <a:spAutoFit/>
+          </a:bodyPr>
+          <a:lstStyle/>
+          <a:p>
+            <a:pPr>
+              <a:defRPr sz="1100" b="1">
+                <a:solidFill>
+                  <a:srgbClr val="FF8C00"/>
+                </a:solidFill>
+              </a:defRPr>
+            </a:pPr>
+            <a:r>
+              <a:t>F</a:t>
+            </a:r>
+          </a:p>
+        </p:txBody>
+      </p:sp>
+      <p:sp>
+        <p:nvSpPr>
+          <p:cNvPr id="67" name="Rectangle 66"/>
+          <p:cNvSpPr/>
+          <p:nvPr/>
+        </p:nvSpPr>
+        <p:spPr>
+          <a:xfrm>
+            <a:off x="6217920" y="4398264"/>
+            <a:ext cx="2011680" cy="384048"/>
+          </a:xfrm>
+          <a:prstGeom prst="rect">
+            <a:avLst/>
+          </a:prstGeom>
+          <a:solidFill>
+            <a:srgbClr val="15223A"/>
+          </a:solidFill>
+          <a:ln>
+            <a:noFill/>
+          </a:ln>
+        </p:spPr>
+        <p:style>
+          <a:lnRef idx="1">
+            <a:schemeClr val="accent1"/>
+          </a:lnRef>
+          <a:fillRef idx="3">
+            <a:schemeClr val="accent1"/>
+          </a:fillRef>
+          <a:effectRef idx="2">
+            <a:schemeClr val="accent1"/>
+          </a:effectRef>
+          <a:fontRef idx="minor">
+            <a:schemeClr val="lt1"/>
+          </a:fontRef>
+        </p:style>
+        <p:txBody>
+          <a:bodyPr rtlCol="0" anchor="ctr"/>
+          <a:lstStyle/>
+          <a:p>
+            <a:pPr algn="ctr"/>
+          </a:p>
+        </p:txBody>
+      </p:sp>
+      <p:sp>
+        <p:nvSpPr>
+          <p:cNvPr id="68" name="TextBox 67"/>
+          <p:cNvSpPr txBox="1"/>
+          <p:nvPr/>
+        </p:nvSpPr>
+        <p:spPr>
+          <a:xfrm>
+            <a:off x="6217920" y="4398264"/>
+            <a:ext cx="2011680" cy="384048"/>
+          </a:xfrm>
+          <a:prstGeom prst="rect">
+            <a:avLst/>
+          </a:prstGeom>
+          <a:noFill/>
+        </p:spPr>
+        <p:txBody>
+          <a:bodyPr wrap="square">
+            <a:spAutoFit/>
+          </a:bodyPr>
+          <a:lstStyle/>
+          <a:p>
+            <a:pPr>
+              <a:defRPr sz="900" b="0">
+                <a:solidFill>
+                  <a:srgbClr val="B0B8C8"/>
+                </a:solidFill>
+              </a:defRPr>
+            </a:pPr>
+            <a:r>
+              <a:t>Off-policy Tolerance</a:t>
+            </a:r>
+          </a:p>
+        </p:txBody>
+      </p:sp>
+      <p:sp>
+        <p:nvSpPr>
+          <p:cNvPr id="69" name="Rectangle 68"/>
+          <p:cNvSpPr/>
+          <p:nvPr/>
+        </p:nvSpPr>
+        <p:spPr>
+          <a:xfrm>
+            <a:off x="8229600" y="4398264"/>
+            <a:ext cx="1097280" cy="384048"/>
+          </a:xfrm>
+          <a:prstGeom prst="rect">
+            <a:avLst/>
+          </a:prstGeom>
+          <a:solidFill>
+            <a:srgbClr val="15223A"/>
+          </a:solidFill>
+          <a:ln>
+            <a:noFill/>
+          </a:ln>
+        </p:spPr>
+        <p:style>
+          <a:lnRef idx="1">
+            <a:schemeClr val="accent1"/>
+          </a:lnRef>
+          <a:fillRef idx="3">
+            <a:schemeClr val="accent1"/>
+          </a:fillRef>
+          <a:effectRef idx="2">
+            <a:schemeClr val="accent1"/>
+          </a:effectRef>
+          <a:fontRef idx="minor">
+            <a:schemeClr val="lt1"/>
+          </a:fontRef>
+        </p:style>
+        <p:txBody>
+          <a:bodyPr rtlCol="0" anchor="ctr"/>
+          <a:lstStyle/>
+          <a:p>
+            <a:pPr algn="ctr"/>
+          </a:p>
+        </p:txBody>
+      </p:sp>
+      <p:sp>
+        <p:nvSpPr>
+          <p:cNvPr id="70" name="TextBox 69"/>
+          <p:cNvSpPr txBox="1"/>
+          <p:nvPr/>
+        </p:nvSpPr>
+        <p:spPr>
+          <a:xfrm>
+            <a:off x="8229600" y="4398264"/>
+            <a:ext cx="1097280" cy="384048"/>
+          </a:xfrm>
+          <a:prstGeom prst="rect">
+            <a:avLst/>
+          </a:prstGeom>
+          <a:noFill/>
+        </p:spPr>
+        <p:txBody>
+          <a:bodyPr wrap="square">
+            <a:spAutoFit/>
+          </a:bodyPr>
+          <a:lstStyle/>
+          <a:p>
+            <a:pPr>
+              <a:defRPr sz="900" b="0">
+                <a:solidFill>
+                  <a:srgbClr val="B0B8C8"/>
+                </a:solidFill>
+              </a:defRPr>
+            </a:pPr>
+            <a:r>
+              <a:t>3,4</a:t>
+            </a:r>
+          </a:p>
+        </p:txBody>
+      </p:sp>
+      <p:sp>
+        <p:nvSpPr>
+          <p:cNvPr id="71" name="Rectangle 70"/>
+          <p:cNvSpPr/>
+          <p:nvPr/>
+        </p:nvSpPr>
+        <p:spPr>
+          <a:xfrm>
+            <a:off x="9326880" y="4398264"/>
+            <a:ext cx="2560320" cy="384048"/>
+          </a:xfrm>
+          <a:prstGeom prst="rect">
+            <a:avLst/>
+          </a:prstGeom>
+          <a:solidFill>
+            <a:srgbClr val="15223A"/>
+          </a:solidFill>
+          <a:ln>
+            <a:noFill/>
+          </a:ln>
+        </p:spPr>
+        <p:style>
+          <a:lnRef idx="1">
+            <a:schemeClr val="accent1"/>
+          </a:lnRef>
+          <a:fillRef idx="3">
+            <a:schemeClr val="accent1"/>
+          </a:fillRef>
+          <a:effectRef idx="2">
+            <a:schemeClr val="accent1"/>
+          </a:effectRef>
+          <a:fontRef idx="minor">
+            <a:schemeClr val="lt1"/>
+          </a:fontRef>
+        </p:style>
+        <p:txBody>
+          <a:bodyPr rtlCol="0" anchor="ctr"/>
+          <a:lstStyle/>
+          <a:p>
+            <a:pPr algn="ctr"/>
+          </a:p>
+        </p:txBody>
+      </p:sp>
+      <p:sp>
+        <p:nvSpPr>
           <p:cNvPr id="72" name="TextBox 71"/>
           <p:cNvSpPr txBox="1"/>
           <p:nvPr/>
         </p:nvSpPr>
         <p:spPr>
           <a:xfrm>
-            <a:off x="457200" y="6126480"/>
-            <a:ext cx="10972800" cy="640080"/>
-          </a:xfrm>
-          <a:prstGeom prst="rect">
-            <a:avLst/>
-          </a:prstGeom>
-          <a:noFill/>
-        </p:spPr>
-        <p:txBody>
-          <a:bodyPr wrap="square">
-            <a:spAutoFit/>
-          </a:bodyPr>
-          <a:lstStyle/>
-          <a:p>
-            <a:pPr algn="l">
-              <a:defRPr sz="1200" b="1">
-                <a:solidFill>
-                  <a:srgbClr val="0096D6"/>
-                </a:solidFill>
-              </a:defRPr>
-            </a:pPr>
-            <a:r>
-              <a:t>五挑战驱动八升级，每层都有因果必然 -&gt; 先看基础设施层</a:t>
+            <a:off x="9326880" y="4398264"/>
+            <a:ext cx="2560320" cy="384048"/>
+          </a:xfrm>
+          <a:prstGeom prst="rect">
+            <a:avLst/>
+          </a:prstGeom>
+          <a:noFill/>
+        </p:spPr>
+        <p:txBody>
+          <a:bodyPr wrap="square">
+            <a:spAutoFit/>
+          </a:bodyPr>
+          <a:lstStyle/>
+          <a:p>
+            <a:pPr>
+              <a:defRPr sz="900" b="0">
+                <a:solidFill>
+                  <a:srgbClr val="B0B8C8"/>
+                </a:solidFill>
+              </a:defRPr>
+            </a:pPr>
+            <a:r>
+              <a:t>DecPPO / DAPO+CISPO</a:t>
+            </a:r>
+          </a:p>
+        </p:txBody>
+      </p:sp>
+      <p:sp>
+        <p:nvSpPr>
+          <p:cNvPr id="73" name="Rectangle 72"/>
+          <p:cNvSpPr/>
+          <p:nvPr/>
+        </p:nvSpPr>
+        <p:spPr>
+          <a:xfrm>
+            <a:off x="5852160" y="4782312"/>
+            <a:ext cx="365760" cy="384048"/>
+          </a:xfrm>
+          <a:prstGeom prst="rect">
+            <a:avLst/>
+          </a:prstGeom>
+          <a:solidFill>
+            <a:srgbClr val="15223A"/>
+          </a:solidFill>
+          <a:ln>
+            <a:noFill/>
+          </a:ln>
+        </p:spPr>
+        <p:style>
+          <a:lnRef idx="1">
+            <a:schemeClr val="accent1"/>
+          </a:lnRef>
+          <a:fillRef idx="3">
+            <a:schemeClr val="accent1"/>
+          </a:fillRef>
+          <a:effectRef idx="2">
+            <a:schemeClr val="accent1"/>
+          </a:effectRef>
+          <a:fontRef idx="minor">
+            <a:schemeClr val="lt1"/>
+          </a:fontRef>
+        </p:style>
+        <p:txBody>
+          <a:bodyPr rtlCol="0" anchor="ctr"/>
+          <a:lstStyle/>
+          <a:p>
+            <a:pPr algn="ctr"/>
+          </a:p>
+        </p:txBody>
+      </p:sp>
+      <p:sp>
+        <p:nvSpPr>
+          <p:cNvPr id="74" name="TextBox 73"/>
+          <p:cNvSpPr txBox="1"/>
+          <p:nvPr/>
+        </p:nvSpPr>
+        <p:spPr>
+          <a:xfrm>
+            <a:off x="5852160" y="4782312"/>
+            <a:ext cx="365760" cy="384048"/>
+          </a:xfrm>
+          <a:prstGeom prst="rect">
+            <a:avLst/>
+          </a:prstGeom>
+          <a:noFill/>
+        </p:spPr>
+        <p:txBody>
+          <a:bodyPr wrap="square">
+            <a:spAutoFit/>
+          </a:bodyPr>
+          <a:lstStyle/>
+          <a:p>
+            <a:pPr>
+              <a:defRPr sz="1100" b="1">
+                <a:solidFill>
+                  <a:srgbClr val="FF8C00"/>
+                </a:solidFill>
+              </a:defRPr>
+            </a:pPr>
+            <a:r>
+              <a:t>G</a:t>
+            </a:r>
+          </a:p>
+        </p:txBody>
+      </p:sp>
+      <p:sp>
+        <p:nvSpPr>
+          <p:cNvPr id="75" name="Rectangle 74"/>
+          <p:cNvSpPr/>
+          <p:nvPr/>
+        </p:nvSpPr>
+        <p:spPr>
+          <a:xfrm>
+            <a:off x="6217920" y="4782312"/>
+            <a:ext cx="2011680" cy="384048"/>
+          </a:xfrm>
+          <a:prstGeom prst="rect">
+            <a:avLst/>
+          </a:prstGeom>
+          <a:solidFill>
+            <a:srgbClr val="15223A"/>
+          </a:solidFill>
+          <a:ln>
+            <a:noFill/>
+          </a:ln>
+        </p:spPr>
+        <p:style>
+          <a:lnRef idx="1">
+            <a:schemeClr val="accent1"/>
+          </a:lnRef>
+          <a:fillRef idx="3">
+            <a:schemeClr val="accent1"/>
+          </a:fillRef>
+          <a:effectRef idx="2">
+            <a:schemeClr val="accent1"/>
+          </a:effectRef>
+          <a:fontRef idx="minor">
+            <a:schemeClr val="lt1"/>
+          </a:fontRef>
+        </p:style>
+        <p:txBody>
+          <a:bodyPr rtlCol="0" anchor="ctr"/>
+          <a:lstStyle/>
+          <a:p>
+            <a:pPr algn="ctr"/>
+          </a:p>
+        </p:txBody>
+      </p:sp>
+      <p:sp>
+        <p:nvSpPr>
+          <p:cNvPr id="76" name="TextBox 75"/>
+          <p:cNvSpPr txBox="1"/>
+          <p:nvPr/>
+        </p:nvSpPr>
+        <p:spPr>
+          <a:xfrm>
+            <a:off x="6217920" y="4782312"/>
+            <a:ext cx="2011680" cy="384048"/>
+          </a:xfrm>
+          <a:prstGeom prst="rect">
+            <a:avLst/>
+          </a:prstGeom>
+          <a:noFill/>
+        </p:spPr>
+        <p:txBody>
+          <a:bodyPr wrap="square">
+            <a:spAutoFit/>
+          </a:bodyPr>
+          <a:lstStyle/>
+          <a:p>
+            <a:pPr>
+              <a:defRPr sz="900" b="0">
+                <a:solidFill>
+                  <a:srgbClr val="B0B8C8"/>
+                </a:solidFill>
+              </a:defRPr>
+            </a:pPr>
+            <a:r>
+              <a:t>Step-level Attribution</a:t>
+            </a:r>
+          </a:p>
+        </p:txBody>
+      </p:sp>
+      <p:sp>
+        <p:nvSpPr>
+          <p:cNvPr id="77" name="Rectangle 76"/>
+          <p:cNvSpPr/>
+          <p:nvPr/>
+        </p:nvSpPr>
+        <p:spPr>
+          <a:xfrm>
+            <a:off x="8229600" y="4782312"/>
+            <a:ext cx="1097280" cy="384048"/>
+          </a:xfrm>
+          <a:prstGeom prst="rect">
+            <a:avLst/>
+          </a:prstGeom>
+          <a:solidFill>
+            <a:srgbClr val="15223A"/>
+          </a:solidFill>
+          <a:ln>
+            <a:noFill/>
+          </a:ln>
+        </p:spPr>
+        <p:style>
+          <a:lnRef idx="1">
+            <a:schemeClr val="accent1"/>
+          </a:lnRef>
+          <a:fillRef idx="3">
+            <a:schemeClr val="accent1"/>
+          </a:fillRef>
+          <a:effectRef idx="2">
+            <a:schemeClr val="accent1"/>
+          </a:effectRef>
+          <a:fontRef idx="minor">
+            <a:schemeClr val="lt1"/>
+          </a:fontRef>
+        </p:style>
+        <p:txBody>
+          <a:bodyPr rtlCol="0" anchor="ctr"/>
+          <a:lstStyle/>
+          <a:p>
+            <a:pPr algn="ctr"/>
+          </a:p>
+        </p:txBody>
+      </p:sp>
+      <p:sp>
+        <p:nvSpPr>
+          <p:cNvPr id="78" name="TextBox 77"/>
+          <p:cNvSpPr txBox="1"/>
+          <p:nvPr/>
+        </p:nvSpPr>
+        <p:spPr>
+          <a:xfrm>
+            <a:off x="8229600" y="4782312"/>
+            <a:ext cx="1097280" cy="384048"/>
+          </a:xfrm>
+          <a:prstGeom prst="rect">
+            <a:avLst/>
+          </a:prstGeom>
+          <a:noFill/>
+        </p:spPr>
+        <p:txBody>
+          <a:bodyPr wrap="square">
+            <a:spAutoFit/>
+          </a:bodyPr>
+          <a:lstStyle/>
+          <a:p>
+            <a:pPr>
+              <a:defRPr sz="900" b="0">
+                <a:solidFill>
+                  <a:srgbClr val="B0B8C8"/>
+                </a:solidFill>
+              </a:defRPr>
+            </a:pPr>
+            <a:r>
+              <a:t>5</a:t>
+            </a:r>
+          </a:p>
+        </p:txBody>
+      </p:sp>
+      <p:sp>
+        <p:nvSpPr>
+          <p:cNvPr id="79" name="Rectangle 78"/>
+          <p:cNvSpPr/>
+          <p:nvPr/>
+        </p:nvSpPr>
+        <p:spPr>
+          <a:xfrm>
+            <a:off x="9326880" y="4782312"/>
+            <a:ext cx="2560320" cy="384048"/>
+          </a:xfrm>
+          <a:prstGeom prst="rect">
+            <a:avLst/>
+          </a:prstGeom>
+          <a:solidFill>
+            <a:srgbClr val="15223A"/>
+          </a:solidFill>
+          <a:ln>
+            <a:noFill/>
+          </a:ln>
+        </p:spPr>
+        <p:style>
+          <a:lnRef idx="1">
+            <a:schemeClr val="accent1"/>
+          </a:lnRef>
+          <a:fillRef idx="3">
+            <a:schemeClr val="accent1"/>
+          </a:fillRef>
+          <a:effectRef idx="2">
+            <a:schemeClr val="accent1"/>
+          </a:effectRef>
+          <a:fontRef idx="minor">
+            <a:schemeClr val="lt1"/>
+          </a:fontRef>
+        </p:style>
+        <p:txBody>
+          <a:bodyPr rtlCol="0" anchor="ctr"/>
+          <a:lstStyle/>
+          <a:p>
+            <a:pPr algn="ctr"/>
+          </a:p>
+        </p:txBody>
+      </p:sp>
+      <p:sp>
+        <p:nvSpPr>
+          <p:cNvPr id="80" name="TextBox 79"/>
+          <p:cNvSpPr txBox="1"/>
+          <p:nvPr/>
+        </p:nvSpPr>
+        <p:spPr>
+          <a:xfrm>
+            <a:off x="9326880" y="4782312"/>
+            <a:ext cx="2560320" cy="384048"/>
+          </a:xfrm>
+          <a:prstGeom prst="rect">
+            <a:avLst/>
+          </a:prstGeom>
+          <a:noFill/>
+        </p:spPr>
+        <p:txBody>
+          <a:bodyPr wrap="square">
+            <a:spAutoFit/>
+          </a:bodyPr>
+          <a:lstStyle/>
+          <a:p>
+            <a:pPr>
+              <a:defRPr sz="900" b="0">
+                <a:solidFill>
+                  <a:srgbClr val="B0B8C8"/>
+                </a:solidFill>
+              </a:defRPr>
+            </a:pPr>
+            <a:r>
+              <a:t>Cursor RL / Meta SSR</a:t>
+            </a:r>
+          </a:p>
+        </p:txBody>
+      </p:sp>
+      <p:sp>
+        <p:nvSpPr>
+          <p:cNvPr id="81" name="Rectangle 80"/>
+          <p:cNvSpPr/>
+          <p:nvPr/>
+        </p:nvSpPr>
+        <p:spPr>
+          <a:xfrm>
+            <a:off x="5852160" y="5285232"/>
+            <a:ext cx="365760" cy="384048"/>
+          </a:xfrm>
+          <a:prstGeom prst="rect">
+            <a:avLst/>
+          </a:prstGeom>
+          <a:solidFill>
+            <a:srgbClr val="15223A"/>
+          </a:solidFill>
+          <a:ln>
+            <a:noFill/>
+          </a:ln>
+        </p:spPr>
+        <p:style>
+          <a:lnRef idx="1">
+            <a:schemeClr val="accent1"/>
+          </a:lnRef>
+          <a:fillRef idx="3">
+            <a:schemeClr val="accent1"/>
+          </a:fillRef>
+          <a:effectRef idx="2">
+            <a:schemeClr val="accent1"/>
+          </a:effectRef>
+          <a:fontRef idx="minor">
+            <a:schemeClr val="lt1"/>
+          </a:fontRef>
+        </p:style>
+        <p:txBody>
+          <a:bodyPr rtlCol="0" anchor="ctr"/>
+          <a:lstStyle/>
+          <a:p>
+            <a:pPr algn="ctr"/>
+          </a:p>
+        </p:txBody>
+      </p:sp>
+      <p:sp>
+        <p:nvSpPr>
+          <p:cNvPr id="82" name="TextBox 81"/>
+          <p:cNvSpPr txBox="1"/>
+          <p:nvPr/>
+        </p:nvSpPr>
+        <p:spPr>
+          <a:xfrm>
+            <a:off x="5852160" y="5285232"/>
+            <a:ext cx="365760" cy="384048"/>
+          </a:xfrm>
+          <a:prstGeom prst="rect">
+            <a:avLst/>
+          </a:prstGeom>
+          <a:noFill/>
+        </p:spPr>
+        <p:txBody>
+          <a:bodyPr wrap="square">
+            <a:spAutoFit/>
+          </a:bodyPr>
+          <a:lstStyle/>
+          <a:p>
+            <a:pPr>
+              <a:defRPr sz="1100" b="1">
+                <a:solidFill>
+                  <a:srgbClr val="FF8C00"/>
+                </a:solidFill>
+              </a:defRPr>
+            </a:pPr>
+            <a:r>
+              <a:t>H</a:t>
+            </a:r>
+          </a:p>
+        </p:txBody>
+      </p:sp>
+      <p:sp>
+        <p:nvSpPr>
+          <p:cNvPr id="83" name="Rectangle 82"/>
+          <p:cNvSpPr/>
+          <p:nvPr/>
+        </p:nvSpPr>
+        <p:spPr>
+          <a:xfrm>
+            <a:off x="6217920" y="5285232"/>
+            <a:ext cx="2011680" cy="384048"/>
+          </a:xfrm>
+          <a:prstGeom prst="rect">
+            <a:avLst/>
+          </a:prstGeom>
+          <a:solidFill>
+            <a:srgbClr val="15223A"/>
+          </a:solidFill>
+          <a:ln>
+            <a:noFill/>
+          </a:ln>
+        </p:spPr>
+        <p:style>
+          <a:lnRef idx="1">
+            <a:schemeClr val="accent1"/>
+          </a:lnRef>
+          <a:fillRef idx="3">
+            <a:schemeClr val="accent1"/>
+          </a:fillRef>
+          <a:effectRef idx="2">
+            <a:schemeClr val="accent1"/>
+          </a:effectRef>
+          <a:fontRef idx="minor">
+            <a:schemeClr val="lt1"/>
+          </a:fontRef>
+        </p:style>
+        <p:txBody>
+          <a:bodyPr rtlCol="0" anchor="ctr"/>
+          <a:lstStyle/>
+          <a:p>
+            <a:pPr algn="ctr"/>
+          </a:p>
+        </p:txBody>
+      </p:sp>
+      <p:sp>
+        <p:nvSpPr>
+          <p:cNvPr id="84" name="TextBox 83"/>
+          <p:cNvSpPr txBox="1"/>
+          <p:nvPr/>
+        </p:nvSpPr>
+        <p:spPr>
+          <a:xfrm>
+            <a:off x="6217920" y="5285232"/>
+            <a:ext cx="2011680" cy="384048"/>
+          </a:xfrm>
+          <a:prstGeom prst="rect">
+            <a:avLst/>
+          </a:prstGeom>
+          <a:noFill/>
+        </p:spPr>
+        <p:txBody>
+          <a:bodyPr wrap="square">
+            <a:spAutoFit/>
+          </a:bodyPr>
+          <a:lstStyle/>
+          <a:p>
+            <a:pPr>
+              <a:defRPr sz="900" b="0">
+                <a:solidFill>
+                  <a:srgbClr val="B0B8C8"/>
+                </a:solidFill>
+              </a:defRPr>
+            </a:pPr>
+            <a:r>
+              <a:t>Context Self-Compression</a:t>
+            </a:r>
+          </a:p>
+        </p:txBody>
+      </p:sp>
+      <p:sp>
+        <p:nvSpPr>
+          <p:cNvPr id="85" name="Rectangle 84"/>
+          <p:cNvSpPr/>
+          <p:nvPr/>
+        </p:nvSpPr>
+        <p:spPr>
+          <a:xfrm>
+            <a:off x="8229600" y="5285232"/>
+            <a:ext cx="1097280" cy="384048"/>
+          </a:xfrm>
+          <a:prstGeom prst="rect">
+            <a:avLst/>
+          </a:prstGeom>
+          <a:solidFill>
+            <a:srgbClr val="15223A"/>
+          </a:solidFill>
+          <a:ln>
+            <a:noFill/>
+          </a:ln>
+        </p:spPr>
+        <p:style>
+          <a:lnRef idx="1">
+            <a:schemeClr val="accent1"/>
+          </a:lnRef>
+          <a:fillRef idx="3">
+            <a:schemeClr val="accent1"/>
+          </a:fillRef>
+          <a:effectRef idx="2">
+            <a:schemeClr val="accent1"/>
+          </a:effectRef>
+          <a:fontRef idx="minor">
+            <a:schemeClr val="lt1"/>
+          </a:fontRef>
+        </p:style>
+        <p:txBody>
+          <a:bodyPr rtlCol="0" anchor="ctr"/>
+          <a:lstStyle/>
+          <a:p>
+            <a:pPr algn="ctr"/>
+          </a:p>
+        </p:txBody>
+      </p:sp>
+      <p:sp>
+        <p:nvSpPr>
+          <p:cNvPr id="86" name="TextBox 85"/>
+          <p:cNvSpPr txBox="1"/>
+          <p:nvPr/>
+        </p:nvSpPr>
+        <p:spPr>
+          <a:xfrm>
+            <a:off x="8229600" y="5285232"/>
+            <a:ext cx="1097280" cy="384048"/>
+          </a:xfrm>
+          <a:prstGeom prst="rect">
+            <a:avLst/>
+          </a:prstGeom>
+          <a:noFill/>
+        </p:spPr>
+        <p:txBody>
+          <a:bodyPr wrap="square">
+            <a:spAutoFit/>
+          </a:bodyPr>
+          <a:lstStyle/>
+          <a:p>
+            <a:pPr>
+              <a:defRPr sz="900" b="0">
+                <a:solidFill>
+                  <a:srgbClr val="B0B8C8"/>
+                </a:solidFill>
+              </a:defRPr>
+            </a:pPr>
+            <a:r>
+              <a:t>1</a:t>
+            </a:r>
+          </a:p>
+        </p:txBody>
+      </p:sp>
+      <p:sp>
+        <p:nvSpPr>
+          <p:cNvPr id="87" name="Rectangle 86"/>
+          <p:cNvSpPr/>
+          <p:nvPr/>
+        </p:nvSpPr>
+        <p:spPr>
+          <a:xfrm>
+            <a:off x="9326880" y="5285232"/>
+            <a:ext cx="2560320" cy="384048"/>
+          </a:xfrm>
+          <a:prstGeom prst="rect">
+            <a:avLst/>
+          </a:prstGeom>
+          <a:solidFill>
+            <a:srgbClr val="15223A"/>
+          </a:solidFill>
+          <a:ln>
+            <a:noFill/>
+          </a:ln>
+        </p:spPr>
+        <p:style>
+          <a:lnRef idx="1">
+            <a:schemeClr val="accent1"/>
+          </a:lnRef>
+          <a:fillRef idx="3">
+            <a:schemeClr val="accent1"/>
+          </a:fillRef>
+          <a:effectRef idx="2">
+            <a:schemeClr val="accent1"/>
+          </a:effectRef>
+          <a:fontRef idx="minor">
+            <a:schemeClr val="lt1"/>
+          </a:fontRef>
+        </p:style>
+        <p:txBody>
+          <a:bodyPr rtlCol="0" anchor="ctr"/>
+          <a:lstStyle/>
+          <a:p>
+            <a:pPr algn="ctr"/>
+          </a:p>
+        </p:txBody>
+      </p:sp>
+      <p:sp>
+        <p:nvSpPr>
+          <p:cNvPr id="88" name="TextBox 87"/>
+          <p:cNvSpPr txBox="1"/>
+          <p:nvPr/>
+        </p:nvSpPr>
+        <p:spPr>
+          <a:xfrm>
+            <a:off x="9326880" y="5285232"/>
+            <a:ext cx="2560320" cy="384048"/>
+          </a:xfrm>
+          <a:prstGeom prst="rect">
+            <a:avLst/>
+          </a:prstGeom>
+          <a:noFill/>
+        </p:spPr>
+        <p:txBody>
+          <a:bodyPr wrap="square">
+            <a:spAutoFit/>
+          </a:bodyPr>
+          <a:lstStyle/>
+          <a:p>
+            <a:pPr>
+              <a:defRPr sz="900" b="0">
+                <a:solidFill>
+                  <a:srgbClr val="B0B8C8"/>
+                </a:solidFill>
+              </a:defRPr>
+            </a:pPr>
+            <a:r>
+              <a:t>Self-summarization</a:t>
             </a:r>
           </a:p>
         </p:txBody>
